--- a/FinalPresentation_LibraryManagement.pptx
+++ b/FinalPresentation_LibraryManagement.pptx
@@ -10,8 +10,8 @@
   <p:sldIdLst>
     <p:sldId id="256" r:id="rId2"/>
     <p:sldId id="257" r:id="rId3"/>
-    <p:sldId id="271" r:id="rId4"/>
-    <p:sldId id="258" r:id="rId5"/>
+    <p:sldId id="258" r:id="rId4"/>
+    <p:sldId id="271" r:id="rId5"/>
     <p:sldId id="272" r:id="rId6"/>
     <p:sldId id="259" r:id="rId7"/>
     <p:sldId id="260" r:id="rId8"/>
@@ -1128,6 +1128,93 @@
   <p:cSld>
     <p:spTree>
       <p:nvGrpSpPr>
+        <p:cNvPr id="1" name=""/>
+        <p:cNvGrpSpPr/>
+        <p:nvPr/>
+      </p:nvGrpSpPr>
+      <p:grpSpPr>
+        <a:xfrm>
+          <a:off x="0" y="0"/>
+          <a:ext cx="0" cy="0"/>
+          <a:chOff x="0" y="0"/>
+          <a:chExt cx="0" cy="0"/>
+        </a:xfrm>
+      </p:grpSpPr>
+      <p:sp>
+        <p:nvSpPr>
+          <p:cNvPr id="2" name="Slide Image Placeholder 1"/>
+          <p:cNvSpPr>
+            <a:spLocks noGrp="1" noRot="1" noChangeAspect="1"/>
+          </p:cNvSpPr>
+          <p:nvPr>
+            <p:ph type="sldImg"/>
+          </p:nvPr>
+        </p:nvSpPr>
+        <p:spPr/>
+      </p:sp>
+      <p:sp>
+        <p:nvSpPr>
+          <p:cNvPr id="3" name="Notes Placeholder 2"/>
+          <p:cNvSpPr>
+            <a:spLocks noGrp="1"/>
+          </p:cNvSpPr>
+          <p:nvPr>
+            <p:ph type="body" idx="1"/>
+          </p:nvPr>
+        </p:nvSpPr>
+        <p:spPr/>
+        <p:txBody>
+          <a:bodyPr/>
+          <a:lstStyle/>
+          <a:p>
+            <a:r>
+              <a:rPr lang="en-US" dirty="0"/>
+              <a:t>Explain the real pain point: Phenikaa University Library manages borrowing for thousands of users with a paper-based process. Our system digitizes the entire 8-step workflow defined in the official QT.03.TV.DV regulation, from self-service requests to overdue fine collection.</a:t>
+            </a:r>
+          </a:p>
+        </p:txBody>
+      </p:sp>
+      <p:sp>
+        <p:nvSpPr>
+          <p:cNvPr id="4" name="Slide Number Placeholder 3"/>
+          <p:cNvSpPr>
+            <a:spLocks noGrp="1"/>
+          </p:cNvSpPr>
+          <p:nvPr>
+            <p:ph type="sldNum" sz="quarter" idx="10"/>
+          </p:nvPr>
+        </p:nvSpPr>
+        <p:spPr/>
+        <p:txBody>
+          <a:bodyPr/>
+          <a:lstStyle/>
+          <a:p>
+            <a:fld id="{F7021451-1387-4CA6-816F-3879F97B5CBC}" type="slidenum">
+              <a:rPr lang="en-US"/>
+              <a:t>3</a:t>
+            </a:fld>
+            <a:endParaRPr lang="en-US"/>
+          </a:p>
+        </p:txBody>
+      </p:sp>
+    </p:spTree>
+    <p:extLst>
+      <p:ext uri="{BB962C8B-B14F-4D97-AF65-F5344CB8AC3E}">
+        <p14:creationId xmlns:p14="http://schemas.microsoft.com/office/powerpoint/2010/main" val="1024086991"/>
+      </p:ext>
+    </p:extLst>
+  </p:cSld>
+  <p:clrMapOvr>
+    <a:masterClrMapping/>
+  </p:clrMapOvr>
+</p:notes>
+</file>
+
+<file path=ppt/notesSlides/notesSlide4.xml><?xml version="1.0" encoding="utf-8"?>
+<p:notes xmlns:a="http://schemas.openxmlformats.org/drawingml/2006/main" xmlns:r="http://schemas.openxmlformats.org/officeDocument/2006/relationships" xmlns:p="http://schemas.openxmlformats.org/presentationml/2006/main">
+  <p:cSld>
+    <p:spTree>
+      <p:nvGrpSpPr>
         <p:cNvPr id="1" name="">
           <a:extLst>
             <a:ext uri="{FF2B5EF4-FFF2-40B4-BE49-F238E27FC236}">
@@ -1215,7 +1302,7 @@
           <a:p>
             <a:fld id="{F7021451-1387-4CA6-816F-3879F97B5CBC}" type="slidenum">
               <a:rPr lang="en-US"/>
-              <a:t>3</a:t>
+              <a:t>4</a:t>
             </a:fld>
             <a:endParaRPr lang="en-US"/>
           </a:p>
@@ -1225,93 +1312,6 @@
     <p:extLst>
       <p:ext uri="{BB962C8B-B14F-4D97-AF65-F5344CB8AC3E}">
         <p14:creationId xmlns:p14="http://schemas.microsoft.com/office/powerpoint/2010/main" val="3342683677"/>
-      </p:ext>
-    </p:extLst>
-  </p:cSld>
-  <p:clrMapOvr>
-    <a:masterClrMapping/>
-  </p:clrMapOvr>
-</p:notes>
-</file>
-
-<file path=ppt/notesSlides/notesSlide4.xml><?xml version="1.0" encoding="utf-8"?>
-<p:notes xmlns:a="http://schemas.openxmlformats.org/drawingml/2006/main" xmlns:r="http://schemas.openxmlformats.org/officeDocument/2006/relationships" xmlns:p="http://schemas.openxmlformats.org/presentationml/2006/main">
-  <p:cSld>
-    <p:spTree>
-      <p:nvGrpSpPr>
-        <p:cNvPr id="1" name=""/>
-        <p:cNvGrpSpPr/>
-        <p:nvPr/>
-      </p:nvGrpSpPr>
-      <p:grpSpPr>
-        <a:xfrm>
-          <a:off x="0" y="0"/>
-          <a:ext cx="0" cy="0"/>
-          <a:chOff x="0" y="0"/>
-          <a:chExt cx="0" cy="0"/>
-        </a:xfrm>
-      </p:grpSpPr>
-      <p:sp>
-        <p:nvSpPr>
-          <p:cNvPr id="2" name="Slide Image Placeholder 1"/>
-          <p:cNvSpPr>
-            <a:spLocks noGrp="1" noRot="1" noChangeAspect="1"/>
-          </p:cNvSpPr>
-          <p:nvPr>
-            <p:ph type="sldImg"/>
-          </p:nvPr>
-        </p:nvSpPr>
-        <p:spPr/>
-      </p:sp>
-      <p:sp>
-        <p:nvSpPr>
-          <p:cNvPr id="3" name="Notes Placeholder 2"/>
-          <p:cNvSpPr>
-            <a:spLocks noGrp="1"/>
-          </p:cNvSpPr>
-          <p:nvPr>
-            <p:ph type="body" idx="1"/>
-          </p:nvPr>
-        </p:nvSpPr>
-        <p:spPr/>
-        <p:txBody>
-          <a:bodyPr/>
-          <a:lstStyle/>
-          <a:p>
-            <a:r>
-              <a:rPr lang="en-US" dirty="0"/>
-              <a:t>Explain the real pain point: Phenikaa University Library manages borrowing for thousands of users with a paper-based process. Our system digitizes the entire 8-step workflow defined in the official QT.03.TV.DV regulation, from self-service requests to overdue fine collection.</a:t>
-            </a:r>
-          </a:p>
-        </p:txBody>
-      </p:sp>
-      <p:sp>
-        <p:nvSpPr>
-          <p:cNvPr id="4" name="Slide Number Placeholder 3"/>
-          <p:cNvSpPr>
-            <a:spLocks noGrp="1"/>
-          </p:cNvSpPr>
-          <p:nvPr>
-            <p:ph type="sldNum" sz="quarter" idx="10"/>
-          </p:nvPr>
-        </p:nvSpPr>
-        <p:spPr/>
-        <p:txBody>
-          <a:bodyPr/>
-          <a:lstStyle/>
-          <a:p>
-            <a:fld id="{F7021451-1387-4CA6-816F-3879F97B5CBC}" type="slidenum">
-              <a:rPr lang="en-US"/>
-              <a:t>4</a:t>
-            </a:fld>
-            <a:endParaRPr lang="en-US"/>
-          </a:p>
-        </p:txBody>
-      </p:sp>
-    </p:spTree>
-    <p:extLst>
-      <p:ext uri="{BB962C8B-B14F-4D97-AF65-F5344CB8AC3E}">
-        <p14:creationId xmlns:p14="http://schemas.microsoft.com/office/powerpoint/2010/main" val="1024086991"/>
       </p:ext>
     </p:extLst>
   </p:cSld>
@@ -1864,10 +1864,10 @@
       </p:grpSpPr>
       <p:sp>
         <p:nvSpPr>
-          <p:cNvPr id="32" name="9Slide.vn - 2019">
+          <p:cNvPr id="7" name="9Slide.vn - 2019">
             <a:extLst>
               <a:ext uri="{FF2B5EF4-FFF2-40B4-BE49-F238E27FC236}">
-                <a16:creationId xmlns:a16="http://schemas.microsoft.com/office/drawing/2014/main" id="{9EB20C2D-C229-690A-B136-B55D6E1EE2F2}"/>
+                <a16:creationId xmlns:a16="http://schemas.microsoft.com/office/drawing/2014/main" id="{4BA02655-BFB8-B398-D9B0-083628BD474C}"/>
               </a:ext>
             </a:extLst>
           </p:cNvPr>
@@ -2729,7 +2729,7 @@
               <a:buNone/>
             </a:pPr>
             <a:r>
-              <a:rPr lang="en-US" sz="1200" dirty="0">
+              <a:rPr lang="vi-VN" sz="1200">
                 <a:solidFill>
                   <a:srgbClr val="FFFFFF"/>
                 </a:solidFill>
@@ -2737,7 +2737,29 @@
                 <a:ea typeface="Calibri" pitchFamily="34" charset="-122"/>
                 <a:cs typeface="Calibri" pitchFamily="34" charset="-120"/>
               </a:rPr>
-              <a:t>2024 – 2025</a:t>
+              <a:t>2025</a:t>
+            </a:r>
+            <a:r>
+              <a:rPr lang="en-US" sz="1200">
+                <a:solidFill>
+                  <a:srgbClr val="FFFFFF"/>
+                </a:solidFill>
+                <a:latin typeface="Calibri" pitchFamily="34" charset="0"/>
+                <a:ea typeface="Calibri" pitchFamily="34" charset="-122"/>
+                <a:cs typeface="Calibri" pitchFamily="34" charset="-120"/>
+              </a:rPr>
+              <a:t> – </a:t>
+            </a:r>
+            <a:r>
+              <a:rPr lang="vi-VN" sz="1200">
+                <a:solidFill>
+                  <a:srgbClr val="FFFFFF"/>
+                </a:solidFill>
+                <a:latin typeface="Calibri" pitchFamily="34" charset="0"/>
+                <a:ea typeface="Calibri" pitchFamily="34" charset="-122"/>
+                <a:cs typeface="Calibri" pitchFamily="34" charset="-120"/>
+              </a:rPr>
+              <a:t>2026</a:t>
             </a:r>
             <a:endParaRPr lang="en-US" sz="1200" dirty="0"/>
           </a:p>
@@ -2848,7 +2870,7 @@
               <a:buNone/>
             </a:pPr>
             <a:r>
-              <a:rPr lang="en-US" sz="1200" dirty="0">
+              <a:rPr lang="vi-VN" sz="1200">
                 <a:solidFill>
                   <a:srgbClr val="FFFFFF"/>
                 </a:solidFill>
@@ -2856,7 +2878,29 @@
                 <a:ea typeface="Calibri" pitchFamily="34" charset="-122"/>
                 <a:cs typeface="Calibri" pitchFamily="34" charset="-120"/>
               </a:rPr>
-              <a:t>May 2025</a:t>
+              <a:t>June</a:t>
+            </a:r>
+            <a:r>
+              <a:rPr lang="en-US" sz="1200">
+                <a:solidFill>
+                  <a:srgbClr val="FFFFFF"/>
+                </a:solidFill>
+                <a:latin typeface="Calibri" pitchFamily="34" charset="0"/>
+                <a:ea typeface="Calibri" pitchFamily="34" charset="-122"/>
+                <a:cs typeface="Calibri" pitchFamily="34" charset="-120"/>
+              </a:rPr>
+              <a:t> </a:t>
+            </a:r>
+            <a:r>
+              <a:rPr lang="vi-VN" sz="1200">
+                <a:solidFill>
+                  <a:srgbClr val="FFFFFF"/>
+                </a:solidFill>
+                <a:latin typeface="Calibri" pitchFamily="34" charset="0"/>
+                <a:ea typeface="Calibri" pitchFamily="34" charset="-122"/>
+                <a:cs typeface="Calibri" pitchFamily="34" charset="-120"/>
+              </a:rPr>
+              <a:t>2026</a:t>
             </a:r>
             <a:endParaRPr lang="en-US" sz="1200" dirty="0"/>
           </a:p>
@@ -2867,13 +2911,13 @@
   <p:clrMapOvr>
     <a:masterClrMapping/>
   </p:clrMapOvr>
-  <mc:AlternateContent xmlns:mc="http://schemas.openxmlformats.org/markup-compatibility/2006">
-    <mc:Choice xmlns:p14="http://schemas.microsoft.com/office/powerpoint/2010/main" Requires="p14">
+  <mc:AlternateContent xmlns:mc="http://schemas.openxmlformats.org/markup-compatibility/2006" xmlns:p14="http://schemas.microsoft.com/office/powerpoint/2010/main">
+    <mc:Choice Requires="p14">
       <p:transition spd="med" p14:dur="700">
         <p:fade/>
       </p:transition>
     </mc:Choice>
-    <mc:Fallback>
+    <mc:Fallback xmlns="">
       <p:transition spd="med">
         <p:fade/>
       </p:transition>
@@ -4425,13 +4469,13 @@
   <p:clrMapOvr>
     <a:masterClrMapping/>
   </p:clrMapOvr>
-  <mc:AlternateContent xmlns:mc="http://schemas.openxmlformats.org/markup-compatibility/2006">
-    <mc:Choice xmlns:p14="http://schemas.microsoft.com/office/powerpoint/2010/main" Requires="p14">
+  <mc:AlternateContent xmlns:mc="http://schemas.openxmlformats.org/markup-compatibility/2006" xmlns:p14="http://schemas.microsoft.com/office/powerpoint/2010/main">
+    <mc:Choice Requires="p14">
       <p:transition spd="med" p14:dur="700">
         <p:fade/>
       </p:transition>
     </mc:Choice>
-    <mc:Fallback>
+    <mc:Fallback xmlns="">
       <p:transition spd="med">
         <p:fade/>
       </p:transition>
@@ -6056,13 +6100,13 @@
   <p:clrMapOvr>
     <a:masterClrMapping/>
   </p:clrMapOvr>
-  <mc:AlternateContent xmlns:mc="http://schemas.openxmlformats.org/markup-compatibility/2006">
-    <mc:Choice xmlns:p14="http://schemas.microsoft.com/office/powerpoint/2010/main" Requires="p14">
+  <mc:AlternateContent xmlns:mc="http://schemas.openxmlformats.org/markup-compatibility/2006" xmlns:p14="http://schemas.microsoft.com/office/powerpoint/2010/main">
+    <mc:Choice Requires="p14">
       <p:transition spd="med" p14:dur="700">
         <p:fade/>
       </p:transition>
     </mc:Choice>
-    <mc:Fallback>
+    <mc:Fallback xmlns="">
       <p:transition spd="med">
         <p:fade/>
       </p:transition>
@@ -8136,13 +8180,13 @@
   <p:clrMapOvr>
     <a:masterClrMapping/>
   </p:clrMapOvr>
-  <mc:AlternateContent xmlns:mc="http://schemas.openxmlformats.org/markup-compatibility/2006">
-    <mc:Choice xmlns:p14="http://schemas.microsoft.com/office/powerpoint/2010/main" Requires="p14">
+  <mc:AlternateContent xmlns:mc="http://schemas.openxmlformats.org/markup-compatibility/2006" xmlns:p14="http://schemas.microsoft.com/office/powerpoint/2010/main">
+    <mc:Choice Requires="p14">
       <p:transition spd="med" p14:dur="700">
         <p:fade/>
       </p:transition>
     </mc:Choice>
-    <mc:Fallback>
+    <mc:Fallback xmlns="">
       <p:transition spd="med">
         <p:fade/>
       </p:transition>
@@ -9282,13 +9326,13 @@
   <p:clrMapOvr>
     <a:masterClrMapping/>
   </p:clrMapOvr>
-  <mc:AlternateContent xmlns:mc="http://schemas.openxmlformats.org/markup-compatibility/2006">
-    <mc:Choice xmlns:p14="http://schemas.microsoft.com/office/powerpoint/2010/main" Requires="p14">
+  <mc:AlternateContent xmlns:mc="http://schemas.openxmlformats.org/markup-compatibility/2006" xmlns:p14="http://schemas.microsoft.com/office/powerpoint/2010/main">
+    <mc:Choice Requires="p14">
       <p:transition spd="med" p14:dur="700">
         <p:fade/>
       </p:transition>
     </mc:Choice>
-    <mc:Fallback>
+    <mc:Fallback xmlns="">
       <p:transition spd="med">
         <p:fade/>
       </p:transition>
@@ -11607,13 +11651,13 @@
   <p:clrMapOvr>
     <a:masterClrMapping/>
   </p:clrMapOvr>
-  <mc:AlternateContent xmlns:mc="http://schemas.openxmlformats.org/markup-compatibility/2006">
-    <mc:Choice xmlns:p14="http://schemas.microsoft.com/office/powerpoint/2010/main" Requires="p14">
+  <mc:AlternateContent xmlns:mc="http://schemas.openxmlformats.org/markup-compatibility/2006" xmlns:p14="http://schemas.microsoft.com/office/powerpoint/2010/main">
+    <mc:Choice Requires="p14">
       <p:transition spd="med" p14:dur="700">
         <p:fade/>
       </p:transition>
     </mc:Choice>
-    <mc:Fallback>
+    <mc:Fallback xmlns="">
       <p:transition spd="med">
         <p:fade/>
       </p:transition>
@@ -12715,13 +12759,13 @@
   <p:clrMapOvr>
     <a:masterClrMapping/>
   </p:clrMapOvr>
-  <mc:AlternateContent xmlns:mc="http://schemas.openxmlformats.org/markup-compatibility/2006">
-    <mc:Choice xmlns:p14="http://schemas.microsoft.com/office/powerpoint/2010/main" Requires="p14">
+  <mc:AlternateContent xmlns:mc="http://schemas.openxmlformats.org/markup-compatibility/2006" xmlns:p14="http://schemas.microsoft.com/office/powerpoint/2010/main">
+    <mc:Choice Requires="p14">
       <p:transition spd="med" p14:dur="700">
         <p:fade/>
       </p:transition>
     </mc:Choice>
-    <mc:Fallback>
+    <mc:Fallback xmlns="">
       <p:transition spd="med">
         <p:fade/>
       </p:transition>
@@ -14171,13 +14215,13 @@
   <p:clrMapOvr>
     <a:masterClrMapping/>
   </p:clrMapOvr>
-  <mc:AlternateContent xmlns:mc="http://schemas.openxmlformats.org/markup-compatibility/2006">
-    <mc:Choice xmlns:p14="http://schemas.microsoft.com/office/powerpoint/2010/main" Requires="p14">
+  <mc:AlternateContent xmlns:mc="http://schemas.openxmlformats.org/markup-compatibility/2006" xmlns:p14="http://schemas.microsoft.com/office/powerpoint/2010/main">
+    <mc:Choice Requires="p14">
       <p:transition spd="med" p14:dur="700">
         <p:fade/>
       </p:transition>
     </mc:Choice>
-    <mc:Fallback>
+    <mc:Fallback xmlns="">
       <p:transition spd="med">
         <p:fade/>
       </p:transition>
@@ -14964,13 +15008,13 @@
   <p:clrMapOvr>
     <a:masterClrMapping/>
   </p:clrMapOvr>
-  <mc:AlternateContent xmlns:mc="http://schemas.openxmlformats.org/markup-compatibility/2006">
-    <mc:Choice xmlns:p14="http://schemas.microsoft.com/office/powerpoint/2010/main" Requires="p14">
+  <mc:AlternateContent xmlns:mc="http://schemas.openxmlformats.org/markup-compatibility/2006" xmlns:p14="http://schemas.microsoft.com/office/powerpoint/2010/main">
+    <mc:Choice Requires="p14">
       <p:transition spd="med" p14:dur="700">
         <p:fade/>
       </p:transition>
     </mc:Choice>
-    <mc:Fallback>
+    <mc:Fallback xmlns="">
       <p:transition spd="med">
         <p:fade/>
       </p:transition>
@@ -17072,13 +17116,13 @@
   <p:clrMapOvr>
     <a:masterClrMapping/>
   </p:clrMapOvr>
-  <mc:AlternateContent xmlns:mc="http://schemas.openxmlformats.org/markup-compatibility/2006">
-    <mc:Choice xmlns:p14="http://schemas.microsoft.com/office/powerpoint/2010/main" Requires="p14">
+  <mc:AlternateContent xmlns:mc="http://schemas.openxmlformats.org/markup-compatibility/2006" xmlns:p14="http://schemas.microsoft.com/office/powerpoint/2010/main">
+    <mc:Choice Requires="p14">
       <p:transition spd="med" p14:dur="700">
         <p:fade/>
       </p:transition>
     </mc:Choice>
-    <mc:Fallback>
+    <mc:Fallback xmlns="">
       <p:transition spd="med">
         <p:fade/>
       </p:transition>
@@ -17088,6 +17132,689 @@
 </file>
 
 <file path=ppt/slides/slide3.xml><?xml version="1.0" encoding="utf-8"?>
+<p:sld xmlns:a="http://schemas.openxmlformats.org/drawingml/2006/main" xmlns:r="http://schemas.openxmlformats.org/officeDocument/2006/relationships" xmlns:p="http://schemas.openxmlformats.org/presentationml/2006/main">
+  <p:cSld name="Slide 3">
+    <p:bg>
+      <p:bgPr>
+        <a:solidFill>
+          <a:srgbClr val="F8F9FC"/>
+        </a:solidFill>
+        <a:effectLst/>
+      </p:bgPr>
+    </p:bg>
+    <p:spTree>
+      <p:nvGrpSpPr>
+        <p:cNvPr id="1" name=""/>
+        <p:cNvGrpSpPr/>
+        <p:nvPr/>
+      </p:nvGrpSpPr>
+      <p:grpSpPr>
+        <a:xfrm>
+          <a:off x="0" y="0"/>
+          <a:ext cx="0" cy="0"/>
+          <a:chOff x="0" y="0"/>
+          <a:chExt cx="0" cy="0"/>
+        </a:xfrm>
+      </p:grpSpPr>
+      <p:sp>
+        <p:nvSpPr>
+          <p:cNvPr id="2" name="Shape 0"/>
+          <p:cNvSpPr/>
+          <p:nvPr/>
+        </p:nvSpPr>
+        <p:spPr>
+          <a:xfrm>
+            <a:off x="201168" y="146304"/>
+            <a:ext cx="329184" cy="329184"/>
+          </a:xfrm>
+          <a:prstGeom prst="ellipse">
+            <a:avLst/>
+          </a:prstGeom>
+          <a:solidFill>
+            <a:srgbClr val="2E5FA3"/>
+          </a:solidFill>
+          <a:ln w="12700">
+            <a:solidFill>
+              <a:srgbClr val="2E5FA3"/>
+            </a:solidFill>
+            <a:prstDash val="solid"/>
+          </a:ln>
+        </p:spPr>
+        <p:txBody>
+          <a:bodyPr/>
+          <a:lstStyle/>
+          <a:p>
+            <a:endParaRPr lang="en-US"/>
+          </a:p>
+        </p:txBody>
+      </p:sp>
+      <p:sp>
+        <p:nvSpPr>
+          <p:cNvPr id="3" name="Text 1"/>
+          <p:cNvSpPr/>
+          <p:nvPr/>
+        </p:nvSpPr>
+        <p:spPr>
+          <a:xfrm>
+            <a:off x="201168" y="146304"/>
+            <a:ext cx="329184" cy="329184"/>
+          </a:xfrm>
+          <a:prstGeom prst="rect">
+            <a:avLst/>
+          </a:prstGeom>
+          <a:noFill/>
+          <a:ln/>
+        </p:spPr>
+        <p:txBody>
+          <a:bodyPr wrap="square" lIns="0" tIns="0" rIns="0" bIns="0" rtlCol="0" anchor="ctr"/>
+          <a:lstStyle/>
+          <a:p>
+            <a:pPr marL="0" indent="0" algn="ctr">
+              <a:buNone/>
+            </a:pPr>
+            <a:r>
+              <a:rPr lang="en-US" sz="1200" b="1" dirty="0">
+                <a:solidFill>
+                  <a:srgbClr val="FFFFFF"/>
+                </a:solidFill>
+              </a:rPr>
+              <a:t>3</a:t>
+            </a:r>
+            <a:endParaRPr lang="en-US" sz="1200" dirty="0"/>
+          </a:p>
+        </p:txBody>
+      </p:sp>
+      <p:sp>
+        <p:nvSpPr>
+          <p:cNvPr id="4" name="Text 2"/>
+          <p:cNvSpPr/>
+          <p:nvPr/>
+        </p:nvSpPr>
+        <p:spPr>
+          <a:xfrm>
+            <a:off x="457200" y="164592"/>
+            <a:ext cx="8229600" cy="594360"/>
+          </a:xfrm>
+          <a:prstGeom prst="rect">
+            <a:avLst/>
+          </a:prstGeom>
+          <a:noFill/>
+          <a:ln/>
+        </p:spPr>
+        <p:txBody>
+          <a:bodyPr wrap="square" rtlCol="0" anchor="ctr"/>
+          <a:lstStyle/>
+          <a:p>
+            <a:pPr marL="0" indent="0" algn="l">
+              <a:buNone/>
+            </a:pPr>
+            <a:r>
+              <a:rPr lang="en-US" sz="3000" b="1" dirty="0">
+                <a:solidFill>
+                  <a:srgbClr val="1B2A4A"/>
+                </a:solidFill>
+                <a:latin typeface="Cambria" pitchFamily="34" charset="0"/>
+                <a:ea typeface="Cambria" pitchFamily="34" charset="-122"/>
+                <a:cs typeface="Cambria" pitchFamily="34" charset="-120"/>
+              </a:rPr>
+              <a:t>Introduction &amp; Motivation</a:t>
+            </a:r>
+            <a:endParaRPr lang="en-US" sz="3000" dirty="0"/>
+          </a:p>
+        </p:txBody>
+      </p:sp>
+      <p:sp>
+        <p:nvSpPr>
+          <p:cNvPr id="5" name="Shape 3"/>
+          <p:cNvSpPr/>
+          <p:nvPr/>
+        </p:nvSpPr>
+        <p:spPr>
+          <a:xfrm>
+            <a:off x="457200" y="768096"/>
+            <a:ext cx="1097280" cy="50292"/>
+          </a:xfrm>
+          <a:prstGeom prst="rect">
+            <a:avLst/>
+          </a:prstGeom>
+          <a:solidFill>
+            <a:srgbClr val="C9922A"/>
+          </a:solidFill>
+          <a:ln w="12700">
+            <a:solidFill>
+              <a:srgbClr val="C9922A"/>
+            </a:solidFill>
+            <a:prstDash val="solid"/>
+          </a:ln>
+        </p:spPr>
+        <p:txBody>
+          <a:bodyPr/>
+          <a:lstStyle/>
+          <a:p>
+            <a:endParaRPr lang="en-US"/>
+          </a:p>
+        </p:txBody>
+      </p:sp>
+      <p:sp>
+        <p:nvSpPr>
+          <p:cNvPr id="6" name="Shape 4"/>
+          <p:cNvSpPr/>
+          <p:nvPr/>
+        </p:nvSpPr>
+        <p:spPr>
+          <a:xfrm>
+            <a:off x="457200" y="932688"/>
+            <a:ext cx="4069080" cy="3611880"/>
+          </a:xfrm>
+          <a:prstGeom prst="roundRect">
+            <a:avLst>
+              <a:gd name="adj" fmla="val 3038"/>
+            </a:avLst>
+          </a:prstGeom>
+          <a:solidFill>
+            <a:srgbClr val="FFFFFF"/>
+          </a:solidFill>
+          <a:ln w="6350">
+            <a:solidFill>
+              <a:srgbClr val="E2E8F0"/>
+            </a:solidFill>
+            <a:prstDash val="solid"/>
+          </a:ln>
+          <a:effectLst>
+            <a:outerShdw blurRad="101600" dist="38100" dir="2700000" algn="bl" rotWithShape="0">
+              <a:srgbClr val="000000">
+                <a:alpha val="10000"/>
+              </a:srgbClr>
+            </a:outerShdw>
+          </a:effectLst>
+        </p:spPr>
+        <p:txBody>
+          <a:bodyPr/>
+          <a:lstStyle/>
+          <a:p>
+            <a:endParaRPr lang="en-US"/>
+          </a:p>
+        </p:txBody>
+      </p:sp>
+      <p:sp>
+        <p:nvSpPr>
+          <p:cNvPr id="7" name="Shape 5"/>
+          <p:cNvSpPr/>
+          <p:nvPr/>
+        </p:nvSpPr>
+        <p:spPr>
+          <a:xfrm>
+            <a:off x="457200" y="932688"/>
+            <a:ext cx="4069080" cy="420624"/>
+          </a:xfrm>
+          <a:prstGeom prst="rect">
+            <a:avLst/>
+          </a:prstGeom>
+          <a:solidFill>
+            <a:srgbClr val="1B2A4A"/>
+          </a:solidFill>
+          <a:ln w="12700">
+            <a:solidFill>
+              <a:srgbClr val="1B2A4A"/>
+            </a:solidFill>
+            <a:prstDash val="solid"/>
+          </a:ln>
+        </p:spPr>
+        <p:txBody>
+          <a:bodyPr/>
+          <a:lstStyle/>
+          <a:p>
+            <a:endParaRPr lang="en-US"/>
+          </a:p>
+        </p:txBody>
+      </p:sp>
+      <p:sp>
+        <p:nvSpPr>
+          <p:cNvPr id="8" name="Text 6"/>
+          <p:cNvSpPr/>
+          <p:nvPr/>
+        </p:nvSpPr>
+        <p:spPr>
+          <a:xfrm>
+            <a:off x="566928" y="950976"/>
+            <a:ext cx="3840480" cy="384048"/>
+          </a:xfrm>
+          <a:prstGeom prst="rect">
+            <a:avLst/>
+          </a:prstGeom>
+          <a:noFill/>
+          <a:ln/>
+        </p:spPr>
+        <p:txBody>
+          <a:bodyPr wrap="square" rtlCol="0" anchor="ctr"/>
+          <a:lstStyle/>
+          <a:p>
+            <a:pPr marL="0" indent="0">
+              <a:buNone/>
+            </a:pPr>
+            <a:r>
+              <a:rPr lang="en-US" sz="1500" b="1" dirty="0">
+                <a:solidFill>
+                  <a:srgbClr val="FFFFFF"/>
+                </a:solidFill>
+                <a:latin typeface="Calibri" pitchFamily="34" charset="0"/>
+                <a:ea typeface="Calibri" pitchFamily="34" charset="-122"/>
+                <a:cs typeface="Calibri" pitchFamily="34" charset="-120"/>
+              </a:rPr>
+              <a:t>The Problem</a:t>
+            </a:r>
+            <a:endParaRPr lang="en-US" sz="1500" dirty="0"/>
+          </a:p>
+        </p:txBody>
+      </p:sp>
+      <p:sp>
+        <p:nvSpPr>
+          <p:cNvPr id="9" name="Text 7"/>
+          <p:cNvSpPr/>
+          <p:nvPr/>
+        </p:nvSpPr>
+        <p:spPr>
+          <a:xfrm>
+            <a:off x="566928" y="1417320"/>
+            <a:ext cx="3840480" cy="2971800"/>
+          </a:xfrm>
+          <a:prstGeom prst="rect">
+            <a:avLst/>
+          </a:prstGeom>
+          <a:noFill/>
+          <a:ln/>
+        </p:spPr>
+        <p:txBody>
+          <a:bodyPr wrap="square" rtlCol="0" anchor="t"/>
+          <a:lstStyle/>
+          <a:p>
+            <a:pPr marL="342900" indent="-342900">
+              <a:spcAft>
+                <a:spcPts val="500"/>
+              </a:spcAft>
+              <a:buSzPct val="100000"/>
+              <a:buChar char="•"/>
+            </a:pPr>
+            <a:r>
+              <a:rPr lang="en-US" sz="1300" dirty="0">
+                <a:solidFill>
+                  <a:srgbClr val="2D3748"/>
+                </a:solidFill>
+                <a:latin typeface="Calibri" pitchFamily="34" charset="0"/>
+                <a:ea typeface="Calibri" pitchFamily="34" charset="-122"/>
+                <a:cs typeface="Calibri" pitchFamily="34" charset="-120"/>
+              </a:rPr>
+              <a:t>Paper-based library cards are slow and error-prone</a:t>
+            </a:r>
+            <a:endParaRPr lang="en-US" sz="1300" dirty="0"/>
+          </a:p>
+          <a:p>
+            <a:pPr marL="342900" indent="-342900">
+              <a:spcAft>
+                <a:spcPts val="500"/>
+              </a:spcAft>
+              <a:buSzPct val="100000"/>
+              <a:buChar char="•"/>
+            </a:pPr>
+            <a:r>
+              <a:rPr lang="en-US" sz="1300" dirty="0">
+                <a:solidFill>
+                  <a:srgbClr val="2D3748"/>
+                </a:solidFill>
+                <a:latin typeface="Calibri" pitchFamily="34" charset="0"/>
+                <a:ea typeface="Calibri" pitchFamily="34" charset="-122"/>
+                <a:cs typeface="Calibri" pitchFamily="34" charset="-120"/>
+              </a:rPr>
+              <a:t>Manual loan slips are hard to audit and trace</a:t>
+            </a:r>
+            <a:endParaRPr lang="en-US" sz="1300" dirty="0"/>
+          </a:p>
+          <a:p>
+            <a:pPr marL="342900" indent="-342900">
+              <a:spcAft>
+                <a:spcPts val="500"/>
+              </a:spcAft>
+              <a:buSzPct val="100000"/>
+              <a:buChar char="•"/>
+            </a:pPr>
+            <a:r>
+              <a:rPr lang="en-US" sz="1300" dirty="0">
+                <a:solidFill>
+                  <a:srgbClr val="2D3748"/>
+                </a:solidFill>
+                <a:latin typeface="Calibri" pitchFamily="34" charset="0"/>
+                <a:ea typeface="Calibri" pitchFamily="34" charset="-122"/>
+                <a:cs typeface="Calibri" pitchFamily="34" charset="-120"/>
+              </a:rPr>
+              <a:t>Overdue fines calculated by hand — inconsistent</a:t>
+            </a:r>
+            <a:endParaRPr lang="en-US" sz="1300" dirty="0"/>
+          </a:p>
+          <a:p>
+            <a:pPr marL="342900" indent="-342900">
+              <a:spcAft>
+                <a:spcPts val="500"/>
+              </a:spcAft>
+              <a:buSzPct val="100000"/>
+              <a:buChar char="•"/>
+            </a:pPr>
+            <a:r>
+              <a:rPr lang="en-US" sz="1300" dirty="0">
+                <a:solidFill>
+                  <a:srgbClr val="2D3748"/>
+                </a:solidFill>
+                <a:latin typeface="Calibri" pitchFamily="34" charset="0"/>
+                <a:ea typeface="Calibri" pitchFamily="34" charset="-122"/>
+                <a:cs typeface="Calibri" pitchFamily="34" charset="-120"/>
+              </a:rPr>
+              <a:t>No digital history for readers or administrators</a:t>
+            </a:r>
+            <a:endParaRPr lang="en-US" sz="1300" dirty="0"/>
+          </a:p>
+          <a:p>
+            <a:pPr marL="342900" indent="-342900">
+              <a:spcAft>
+                <a:spcPts val="500"/>
+              </a:spcAft>
+              <a:buSzPct val="100000"/>
+              <a:buChar char="•"/>
+            </a:pPr>
+            <a:r>
+              <a:rPr lang="en-US" sz="1300" dirty="0">
+                <a:solidFill>
+                  <a:srgbClr val="2D3748"/>
+                </a:solidFill>
+                <a:latin typeface="Calibri" pitchFamily="34" charset="0"/>
+                <a:ea typeface="Calibri" pitchFamily="34" charset="-122"/>
+                <a:cs typeface="Calibri" pitchFamily="34" charset="-120"/>
+              </a:rPr>
+              <a:t>Thousands of students served each semester at Phenikaa University</a:t>
+            </a:r>
+            <a:endParaRPr lang="en-US" sz="1300" dirty="0"/>
+          </a:p>
+        </p:txBody>
+      </p:sp>
+      <p:sp>
+        <p:nvSpPr>
+          <p:cNvPr id="10" name="Shape 8"/>
+          <p:cNvSpPr/>
+          <p:nvPr/>
+        </p:nvSpPr>
+        <p:spPr>
+          <a:xfrm>
+            <a:off x="4754880" y="932688"/>
+            <a:ext cx="3931920" cy="3611880"/>
+          </a:xfrm>
+          <a:prstGeom prst="roundRect">
+            <a:avLst>
+              <a:gd name="adj" fmla="val 3038"/>
+            </a:avLst>
+          </a:prstGeom>
+          <a:solidFill>
+            <a:srgbClr val="FFFFFF"/>
+          </a:solidFill>
+          <a:ln w="6350">
+            <a:solidFill>
+              <a:srgbClr val="E2E8F0"/>
+            </a:solidFill>
+            <a:prstDash val="solid"/>
+          </a:ln>
+          <a:effectLst>
+            <a:outerShdw blurRad="101600" dist="38100" dir="2700000" algn="bl" rotWithShape="0">
+              <a:srgbClr val="000000">
+                <a:alpha val="10000"/>
+              </a:srgbClr>
+            </a:outerShdw>
+          </a:effectLst>
+        </p:spPr>
+        <p:txBody>
+          <a:bodyPr/>
+          <a:lstStyle/>
+          <a:p>
+            <a:endParaRPr lang="en-US"/>
+          </a:p>
+        </p:txBody>
+      </p:sp>
+      <p:sp>
+        <p:nvSpPr>
+          <p:cNvPr id="11" name="Shape 9"/>
+          <p:cNvSpPr/>
+          <p:nvPr/>
+        </p:nvSpPr>
+        <p:spPr>
+          <a:xfrm>
+            <a:off x="4754880" y="932688"/>
+            <a:ext cx="3931920" cy="420624"/>
+          </a:xfrm>
+          <a:prstGeom prst="rect">
+            <a:avLst/>
+          </a:prstGeom>
+          <a:solidFill>
+            <a:srgbClr val="1A7A4A"/>
+          </a:solidFill>
+          <a:ln w="12700">
+            <a:solidFill>
+              <a:srgbClr val="1A7A4A"/>
+            </a:solidFill>
+            <a:prstDash val="solid"/>
+          </a:ln>
+        </p:spPr>
+        <p:txBody>
+          <a:bodyPr/>
+          <a:lstStyle/>
+          <a:p>
+            <a:endParaRPr lang="en-US"/>
+          </a:p>
+        </p:txBody>
+      </p:sp>
+      <p:sp>
+        <p:nvSpPr>
+          <p:cNvPr id="12" name="Text 10"/>
+          <p:cNvSpPr/>
+          <p:nvPr/>
+        </p:nvSpPr>
+        <p:spPr>
+          <a:xfrm>
+            <a:off x="4864608" y="950976"/>
+            <a:ext cx="3703320" cy="384048"/>
+          </a:xfrm>
+          <a:prstGeom prst="rect">
+            <a:avLst/>
+          </a:prstGeom>
+          <a:noFill/>
+          <a:ln/>
+        </p:spPr>
+        <p:txBody>
+          <a:bodyPr wrap="square" rtlCol="0" anchor="ctr"/>
+          <a:lstStyle/>
+          <a:p>
+            <a:pPr marL="0" indent="0">
+              <a:buNone/>
+            </a:pPr>
+            <a:r>
+              <a:rPr lang="en-US" sz="1500" b="1" dirty="0">
+                <a:solidFill>
+                  <a:srgbClr val="FFFFFF"/>
+                </a:solidFill>
+                <a:latin typeface="Calibri" pitchFamily="34" charset="0"/>
+                <a:ea typeface="Calibri" pitchFamily="34" charset="-122"/>
+                <a:cs typeface="Calibri" pitchFamily="34" charset="-120"/>
+              </a:rPr>
+              <a:t>Our Solution</a:t>
+            </a:r>
+            <a:endParaRPr lang="en-US" sz="1500" dirty="0"/>
+          </a:p>
+        </p:txBody>
+      </p:sp>
+      <p:sp>
+        <p:nvSpPr>
+          <p:cNvPr id="13" name="Text 11"/>
+          <p:cNvSpPr/>
+          <p:nvPr/>
+        </p:nvSpPr>
+        <p:spPr>
+          <a:xfrm>
+            <a:off x="4864608" y="1417320"/>
+            <a:ext cx="3703320" cy="2971800"/>
+          </a:xfrm>
+          <a:prstGeom prst="rect">
+            <a:avLst/>
+          </a:prstGeom>
+          <a:noFill/>
+          <a:ln/>
+        </p:spPr>
+        <p:txBody>
+          <a:bodyPr wrap="square" rtlCol="0" anchor="t"/>
+          <a:lstStyle/>
+          <a:p>
+            <a:pPr marL="342900" indent="-342900">
+              <a:spcAft>
+                <a:spcPts val="500"/>
+              </a:spcAft>
+              <a:buSzPct val="100000"/>
+              <a:buChar char="•"/>
+            </a:pPr>
+            <a:r>
+              <a:rPr lang="en-US" sz="1300" dirty="0">
+                <a:solidFill>
+                  <a:srgbClr val="2D3748"/>
+                </a:solidFill>
+                <a:latin typeface="Calibri" pitchFamily="34" charset="0"/>
+                <a:ea typeface="Calibri" pitchFamily="34" charset="-122"/>
+                <a:cs typeface="Calibri" pitchFamily="34" charset="-120"/>
+              </a:rPr>
+              <a:t>Full-stack web application (Spring Boot + Thymeleaf)</a:t>
+            </a:r>
+            <a:endParaRPr lang="en-US" sz="1300" dirty="0"/>
+          </a:p>
+          <a:p>
+            <a:pPr marL="342900" indent="-342900">
+              <a:spcAft>
+                <a:spcPts val="500"/>
+              </a:spcAft>
+              <a:buSzPct val="100000"/>
+              <a:buChar char="•"/>
+            </a:pPr>
+            <a:r>
+              <a:rPr lang="en-US" sz="1300" dirty="0">
+                <a:solidFill>
+                  <a:srgbClr val="2D3748"/>
+                </a:solidFill>
+                <a:latin typeface="Calibri" pitchFamily="34" charset="0"/>
+                <a:ea typeface="Calibri" pitchFamily="34" charset="-122"/>
+                <a:cs typeface="Calibri" pitchFamily="34" charset="-120"/>
+              </a:rPr>
+              <a:t>Implements official QT.03.TV.DV regulation exactly</a:t>
+            </a:r>
+            <a:endParaRPr lang="en-US" sz="1300" dirty="0"/>
+          </a:p>
+          <a:p>
+            <a:pPr marL="342900" indent="-342900">
+              <a:spcAft>
+                <a:spcPts val="500"/>
+              </a:spcAft>
+              <a:buSzPct val="100000"/>
+              <a:buChar char="•"/>
+            </a:pPr>
+            <a:r>
+              <a:rPr lang="en-US" sz="1300" dirty="0">
+                <a:solidFill>
+                  <a:srgbClr val="2D3748"/>
+                </a:solidFill>
+                <a:latin typeface="Calibri" pitchFamily="34" charset="0"/>
+                <a:ea typeface="Calibri" pitchFamily="34" charset="-122"/>
+                <a:cs typeface="Calibri" pitchFamily="34" charset="-120"/>
+              </a:rPr>
+              <a:t>Cart-based self-service loan request portal</a:t>
+            </a:r>
+            <a:endParaRPr lang="en-US" sz="1300" dirty="0"/>
+          </a:p>
+          <a:p>
+            <a:pPr marL="342900" indent="-342900">
+              <a:spcAft>
+                <a:spcPts val="500"/>
+              </a:spcAft>
+              <a:buSzPct val="100000"/>
+              <a:buChar char="•"/>
+            </a:pPr>
+            <a:r>
+              <a:rPr lang="en-US" sz="1300" dirty="0">
+                <a:solidFill>
+                  <a:srgbClr val="2D3748"/>
+                </a:solidFill>
+                <a:latin typeface="Calibri" pitchFamily="34" charset="0"/>
+                <a:ea typeface="Calibri" pitchFamily="34" charset="-122"/>
+                <a:cs typeface="Calibri" pitchFamily="34" charset="-120"/>
+              </a:rPr>
+              <a:t>Admin dashboard for approvals, returns &amp; overdue tracking</a:t>
+            </a:r>
+            <a:endParaRPr lang="en-US" sz="1300" dirty="0"/>
+          </a:p>
+          <a:p>
+            <a:pPr marL="342900" indent="-342900">
+              <a:spcAft>
+                <a:spcPts val="500"/>
+              </a:spcAft>
+              <a:buSzPct val="100000"/>
+              <a:buChar char="•"/>
+            </a:pPr>
+            <a:r>
+              <a:rPr lang="en-US" sz="1300" dirty="0">
+                <a:solidFill>
+                  <a:srgbClr val="2D3748"/>
+                </a:solidFill>
+                <a:latin typeface="Calibri" pitchFamily="34" charset="0"/>
+                <a:ea typeface="Calibri" pitchFamily="34" charset="-122"/>
+                <a:cs typeface="Calibri" pitchFamily="34" charset="-120"/>
+              </a:rPr>
+              <a:t>Automatic fine calculation (2,000 VND/day)</a:t>
+            </a:r>
+            <a:endParaRPr lang="en-US" sz="1300" dirty="0"/>
+          </a:p>
+          <a:p>
+            <a:pPr marL="342900" indent="-342900">
+              <a:spcAft>
+                <a:spcPts val="500"/>
+              </a:spcAft>
+              <a:buSzPct val="100000"/>
+              <a:buChar char="•"/>
+            </a:pPr>
+            <a:r>
+              <a:rPr lang="en-US" sz="1300" dirty="0">
+                <a:solidFill>
+                  <a:srgbClr val="2D3748"/>
+                </a:solidFill>
+                <a:latin typeface="Calibri" pitchFamily="34" charset="0"/>
+                <a:ea typeface="Calibri" pitchFamily="34" charset="-122"/>
+                <a:cs typeface="Calibri" pitchFamily="34" charset="-120"/>
+              </a:rPr>
+              <a:t>Role-based access: Student, Lecturer, Researcher, Admin</a:t>
+            </a:r>
+            <a:endParaRPr lang="en-US" sz="1300" dirty="0"/>
+          </a:p>
+        </p:txBody>
+      </p:sp>
+    </p:spTree>
+  </p:cSld>
+  <p:clrMapOvr>
+    <a:masterClrMapping/>
+  </p:clrMapOvr>
+  <mc:AlternateContent xmlns:mc="http://schemas.openxmlformats.org/markup-compatibility/2006" xmlns:p14="http://schemas.microsoft.com/office/powerpoint/2010/main">
+    <mc:Choice Requires="p14">
+      <p:transition spd="med" p14:dur="700">
+        <p:fade/>
+      </p:transition>
+    </mc:Choice>
+    <mc:Fallback xmlns="">
+      <p:transition spd="med">
+        <p:fade/>
+      </p:transition>
+    </mc:Fallback>
+  </mc:AlternateContent>
+</p:sld>
+</file>
+
+<file path=ppt/slides/slide4.xml><?xml version="1.0" encoding="utf-8"?>
 <p:sld xmlns:a="http://schemas.openxmlformats.org/drawingml/2006/main" xmlns:r="http://schemas.openxmlformats.org/officeDocument/2006/relationships" xmlns:p="http://schemas.openxmlformats.org/presentationml/2006/main">
   <p:cSld>
     <p:bg>
@@ -18612,696 +19339,13 @@
   <p:clrMapOvr>
     <a:masterClrMapping/>
   </p:clrMapOvr>
-  <mc:AlternateContent xmlns:mc="http://schemas.openxmlformats.org/markup-compatibility/2006">
-    <mc:Choice xmlns:p14="http://schemas.microsoft.com/office/powerpoint/2010/main" Requires="p14">
+  <mc:AlternateContent xmlns:mc="http://schemas.openxmlformats.org/markup-compatibility/2006" xmlns:p14="http://schemas.microsoft.com/office/powerpoint/2010/main">
+    <mc:Choice Requires="p14">
       <p:transition spd="med" p14:dur="700">
         <p:fade/>
       </p:transition>
     </mc:Choice>
-    <mc:Fallback>
-      <p:transition spd="med">
-        <p:fade/>
-      </p:transition>
-    </mc:Fallback>
-  </mc:AlternateContent>
-</p:sld>
-</file>
-
-<file path=ppt/slides/slide4.xml><?xml version="1.0" encoding="utf-8"?>
-<p:sld xmlns:a="http://schemas.openxmlformats.org/drawingml/2006/main" xmlns:r="http://schemas.openxmlformats.org/officeDocument/2006/relationships" xmlns:p="http://schemas.openxmlformats.org/presentationml/2006/main">
-  <p:cSld name="Slide 3">
-    <p:bg>
-      <p:bgPr>
-        <a:solidFill>
-          <a:srgbClr val="F8F9FC"/>
-        </a:solidFill>
-        <a:effectLst/>
-      </p:bgPr>
-    </p:bg>
-    <p:spTree>
-      <p:nvGrpSpPr>
-        <p:cNvPr id="1" name=""/>
-        <p:cNvGrpSpPr/>
-        <p:nvPr/>
-      </p:nvGrpSpPr>
-      <p:grpSpPr>
-        <a:xfrm>
-          <a:off x="0" y="0"/>
-          <a:ext cx="0" cy="0"/>
-          <a:chOff x="0" y="0"/>
-          <a:chExt cx="0" cy="0"/>
-        </a:xfrm>
-      </p:grpSpPr>
-      <p:sp>
-        <p:nvSpPr>
-          <p:cNvPr id="2" name="Shape 0"/>
-          <p:cNvSpPr/>
-          <p:nvPr/>
-        </p:nvSpPr>
-        <p:spPr>
-          <a:xfrm>
-            <a:off x="201168" y="146304"/>
-            <a:ext cx="329184" cy="329184"/>
-          </a:xfrm>
-          <a:prstGeom prst="ellipse">
-            <a:avLst/>
-          </a:prstGeom>
-          <a:solidFill>
-            <a:srgbClr val="2E5FA3"/>
-          </a:solidFill>
-          <a:ln w="12700">
-            <a:solidFill>
-              <a:srgbClr val="2E5FA3"/>
-            </a:solidFill>
-            <a:prstDash val="solid"/>
-          </a:ln>
-        </p:spPr>
-        <p:txBody>
-          <a:bodyPr/>
-          <a:lstStyle/>
-          <a:p>
-            <a:endParaRPr lang="en-US"/>
-          </a:p>
-        </p:txBody>
-      </p:sp>
-      <p:sp>
-        <p:nvSpPr>
-          <p:cNvPr id="3" name="Text 1"/>
-          <p:cNvSpPr/>
-          <p:nvPr/>
-        </p:nvSpPr>
-        <p:spPr>
-          <a:xfrm>
-            <a:off x="201168" y="146304"/>
-            <a:ext cx="329184" cy="329184"/>
-          </a:xfrm>
-          <a:prstGeom prst="rect">
-            <a:avLst/>
-          </a:prstGeom>
-          <a:noFill/>
-          <a:ln/>
-        </p:spPr>
-        <p:txBody>
-          <a:bodyPr wrap="square" lIns="0" tIns="0" rIns="0" bIns="0" rtlCol="0" anchor="ctr"/>
-          <a:lstStyle/>
-          <a:p>
-            <a:pPr marL="0" indent="0" algn="ctr">
-              <a:buNone/>
-            </a:pPr>
-            <a:r>
-              <a:rPr lang="en-US" sz="1200" b="1" dirty="0">
-                <a:solidFill>
-                  <a:srgbClr val="FFFFFF"/>
-                </a:solidFill>
-              </a:rPr>
-              <a:t>3</a:t>
-            </a:r>
-            <a:endParaRPr lang="en-US" sz="1200" dirty="0"/>
-          </a:p>
-        </p:txBody>
-      </p:sp>
-      <p:sp>
-        <p:nvSpPr>
-          <p:cNvPr id="4" name="Text 2"/>
-          <p:cNvSpPr/>
-          <p:nvPr/>
-        </p:nvSpPr>
-        <p:spPr>
-          <a:xfrm>
-            <a:off x="457200" y="164592"/>
-            <a:ext cx="8229600" cy="594360"/>
-          </a:xfrm>
-          <a:prstGeom prst="rect">
-            <a:avLst/>
-          </a:prstGeom>
-          <a:noFill/>
-          <a:ln/>
-        </p:spPr>
-        <p:txBody>
-          <a:bodyPr wrap="square" rtlCol="0" anchor="ctr"/>
-          <a:lstStyle/>
-          <a:p>
-            <a:pPr marL="0" indent="0" algn="l">
-              <a:buNone/>
-            </a:pPr>
-            <a:r>
-              <a:rPr lang="en-US" sz="3000" b="1" dirty="0">
-                <a:solidFill>
-                  <a:srgbClr val="1B2A4A"/>
-                </a:solidFill>
-                <a:latin typeface="Cambria" pitchFamily="34" charset="0"/>
-                <a:ea typeface="Cambria" pitchFamily="34" charset="-122"/>
-                <a:cs typeface="Cambria" pitchFamily="34" charset="-120"/>
-              </a:rPr>
-              <a:t>Introduction &amp; Motivation</a:t>
-            </a:r>
-            <a:endParaRPr lang="en-US" sz="3000" dirty="0"/>
-          </a:p>
-        </p:txBody>
-      </p:sp>
-      <p:sp>
-        <p:nvSpPr>
-          <p:cNvPr id="5" name="Shape 3"/>
-          <p:cNvSpPr/>
-          <p:nvPr/>
-        </p:nvSpPr>
-        <p:spPr>
-          <a:xfrm>
-            <a:off x="457200" y="768096"/>
-            <a:ext cx="1097280" cy="50292"/>
-          </a:xfrm>
-          <a:prstGeom prst="rect">
-            <a:avLst/>
-          </a:prstGeom>
-          <a:solidFill>
-            <a:srgbClr val="C9922A"/>
-          </a:solidFill>
-          <a:ln w="12700">
-            <a:solidFill>
-              <a:srgbClr val="C9922A"/>
-            </a:solidFill>
-            <a:prstDash val="solid"/>
-          </a:ln>
-        </p:spPr>
-        <p:txBody>
-          <a:bodyPr/>
-          <a:lstStyle/>
-          <a:p>
-            <a:endParaRPr lang="en-US"/>
-          </a:p>
-        </p:txBody>
-      </p:sp>
-      <p:sp>
-        <p:nvSpPr>
-          <p:cNvPr id="6" name="Shape 4"/>
-          <p:cNvSpPr/>
-          <p:nvPr/>
-        </p:nvSpPr>
-        <p:spPr>
-          <a:xfrm>
-            <a:off x="457200" y="932688"/>
-            <a:ext cx="4069080" cy="3611880"/>
-          </a:xfrm>
-          <a:prstGeom prst="roundRect">
-            <a:avLst>
-              <a:gd name="adj" fmla="val 3038"/>
-            </a:avLst>
-          </a:prstGeom>
-          <a:solidFill>
-            <a:srgbClr val="FFFFFF"/>
-          </a:solidFill>
-          <a:ln w="6350">
-            <a:solidFill>
-              <a:srgbClr val="E2E8F0"/>
-            </a:solidFill>
-            <a:prstDash val="solid"/>
-          </a:ln>
-          <a:effectLst>
-            <a:outerShdw blurRad="101600" dist="38100" dir="2700000" algn="bl" rotWithShape="0">
-              <a:srgbClr val="000000">
-                <a:alpha val="10000"/>
-              </a:srgbClr>
-            </a:outerShdw>
-          </a:effectLst>
-        </p:spPr>
-        <p:txBody>
-          <a:bodyPr/>
-          <a:lstStyle/>
-          <a:p>
-            <a:endParaRPr lang="en-US"/>
-          </a:p>
-        </p:txBody>
-      </p:sp>
-      <p:sp>
-        <p:nvSpPr>
-          <p:cNvPr id="7" name="Shape 5"/>
-          <p:cNvSpPr/>
-          <p:nvPr/>
-        </p:nvSpPr>
-        <p:spPr>
-          <a:xfrm>
-            <a:off x="457200" y="932688"/>
-            <a:ext cx="4069080" cy="420624"/>
-          </a:xfrm>
-          <a:prstGeom prst="rect">
-            <a:avLst/>
-          </a:prstGeom>
-          <a:solidFill>
-            <a:srgbClr val="1B2A4A"/>
-          </a:solidFill>
-          <a:ln w="12700">
-            <a:solidFill>
-              <a:srgbClr val="1B2A4A"/>
-            </a:solidFill>
-            <a:prstDash val="solid"/>
-          </a:ln>
-        </p:spPr>
-        <p:txBody>
-          <a:bodyPr/>
-          <a:lstStyle/>
-          <a:p>
-            <a:endParaRPr lang="en-US"/>
-          </a:p>
-        </p:txBody>
-      </p:sp>
-      <p:sp>
-        <p:nvSpPr>
-          <p:cNvPr id="8" name="Text 6"/>
-          <p:cNvSpPr/>
-          <p:nvPr/>
-        </p:nvSpPr>
-        <p:spPr>
-          <a:xfrm>
-            <a:off x="566928" y="950976"/>
-            <a:ext cx="3840480" cy="384048"/>
-          </a:xfrm>
-          <a:prstGeom prst="rect">
-            <a:avLst/>
-          </a:prstGeom>
-          <a:noFill/>
-          <a:ln/>
-        </p:spPr>
-        <p:txBody>
-          <a:bodyPr wrap="square" rtlCol="0" anchor="ctr"/>
-          <a:lstStyle/>
-          <a:p>
-            <a:pPr marL="0" indent="0">
-              <a:buNone/>
-            </a:pPr>
-            <a:r>
-              <a:rPr lang="en-US" sz="1500" b="1" dirty="0">
-                <a:solidFill>
-                  <a:srgbClr val="FFFFFF"/>
-                </a:solidFill>
-                <a:latin typeface="Calibri" pitchFamily="34" charset="0"/>
-                <a:ea typeface="Calibri" pitchFamily="34" charset="-122"/>
-                <a:cs typeface="Calibri" pitchFamily="34" charset="-120"/>
-              </a:rPr>
-              <a:t>The Problem</a:t>
-            </a:r>
-            <a:endParaRPr lang="en-US" sz="1500" dirty="0"/>
-          </a:p>
-        </p:txBody>
-      </p:sp>
-      <p:sp>
-        <p:nvSpPr>
-          <p:cNvPr id="9" name="Text 7"/>
-          <p:cNvSpPr/>
-          <p:nvPr/>
-        </p:nvSpPr>
-        <p:spPr>
-          <a:xfrm>
-            <a:off x="566928" y="1417320"/>
-            <a:ext cx="3840480" cy="2971800"/>
-          </a:xfrm>
-          <a:prstGeom prst="rect">
-            <a:avLst/>
-          </a:prstGeom>
-          <a:noFill/>
-          <a:ln/>
-        </p:spPr>
-        <p:txBody>
-          <a:bodyPr wrap="square" rtlCol="0" anchor="t"/>
-          <a:lstStyle/>
-          <a:p>
-            <a:pPr marL="342900" indent="-342900">
-              <a:spcAft>
-                <a:spcPts val="500"/>
-              </a:spcAft>
-              <a:buSzPct val="100000"/>
-              <a:buChar char="•"/>
-            </a:pPr>
-            <a:r>
-              <a:rPr lang="en-US" sz="1300" dirty="0">
-                <a:solidFill>
-                  <a:srgbClr val="2D3748"/>
-                </a:solidFill>
-                <a:latin typeface="Calibri" pitchFamily="34" charset="0"/>
-                <a:ea typeface="Calibri" pitchFamily="34" charset="-122"/>
-                <a:cs typeface="Calibri" pitchFamily="34" charset="-120"/>
-              </a:rPr>
-              <a:t>Paper-based library cards are slow and error-prone</a:t>
-            </a:r>
-            <a:endParaRPr lang="en-US" sz="1300" dirty="0"/>
-          </a:p>
-          <a:p>
-            <a:pPr marL="342900" indent="-342900">
-              <a:spcAft>
-                <a:spcPts val="500"/>
-              </a:spcAft>
-              <a:buSzPct val="100000"/>
-              <a:buChar char="•"/>
-            </a:pPr>
-            <a:r>
-              <a:rPr lang="en-US" sz="1300" dirty="0">
-                <a:solidFill>
-                  <a:srgbClr val="2D3748"/>
-                </a:solidFill>
-                <a:latin typeface="Calibri" pitchFamily="34" charset="0"/>
-                <a:ea typeface="Calibri" pitchFamily="34" charset="-122"/>
-                <a:cs typeface="Calibri" pitchFamily="34" charset="-120"/>
-              </a:rPr>
-              <a:t>Manual loan slips are hard to audit and trace</a:t>
-            </a:r>
-            <a:endParaRPr lang="en-US" sz="1300" dirty="0"/>
-          </a:p>
-          <a:p>
-            <a:pPr marL="342900" indent="-342900">
-              <a:spcAft>
-                <a:spcPts val="500"/>
-              </a:spcAft>
-              <a:buSzPct val="100000"/>
-              <a:buChar char="•"/>
-            </a:pPr>
-            <a:r>
-              <a:rPr lang="en-US" sz="1300" dirty="0">
-                <a:solidFill>
-                  <a:srgbClr val="2D3748"/>
-                </a:solidFill>
-                <a:latin typeface="Calibri" pitchFamily="34" charset="0"/>
-                <a:ea typeface="Calibri" pitchFamily="34" charset="-122"/>
-                <a:cs typeface="Calibri" pitchFamily="34" charset="-120"/>
-              </a:rPr>
-              <a:t>Overdue fines calculated by hand — inconsistent</a:t>
-            </a:r>
-            <a:endParaRPr lang="en-US" sz="1300" dirty="0"/>
-          </a:p>
-          <a:p>
-            <a:pPr marL="342900" indent="-342900">
-              <a:spcAft>
-                <a:spcPts val="500"/>
-              </a:spcAft>
-              <a:buSzPct val="100000"/>
-              <a:buChar char="•"/>
-            </a:pPr>
-            <a:r>
-              <a:rPr lang="en-US" sz="1300" dirty="0">
-                <a:solidFill>
-                  <a:srgbClr val="2D3748"/>
-                </a:solidFill>
-                <a:latin typeface="Calibri" pitchFamily="34" charset="0"/>
-                <a:ea typeface="Calibri" pitchFamily="34" charset="-122"/>
-                <a:cs typeface="Calibri" pitchFamily="34" charset="-120"/>
-              </a:rPr>
-              <a:t>No digital history for readers or administrators</a:t>
-            </a:r>
-            <a:endParaRPr lang="en-US" sz="1300" dirty="0"/>
-          </a:p>
-          <a:p>
-            <a:pPr marL="342900" indent="-342900">
-              <a:spcAft>
-                <a:spcPts val="500"/>
-              </a:spcAft>
-              <a:buSzPct val="100000"/>
-              <a:buChar char="•"/>
-            </a:pPr>
-            <a:r>
-              <a:rPr lang="en-US" sz="1300" dirty="0">
-                <a:solidFill>
-                  <a:srgbClr val="2D3748"/>
-                </a:solidFill>
-                <a:latin typeface="Calibri" pitchFamily="34" charset="0"/>
-                <a:ea typeface="Calibri" pitchFamily="34" charset="-122"/>
-                <a:cs typeface="Calibri" pitchFamily="34" charset="-120"/>
-              </a:rPr>
-              <a:t>Thousands of students served each semester at Phenikaa University</a:t>
-            </a:r>
-            <a:endParaRPr lang="en-US" sz="1300" dirty="0"/>
-          </a:p>
-        </p:txBody>
-      </p:sp>
-      <p:sp>
-        <p:nvSpPr>
-          <p:cNvPr id="10" name="Shape 8"/>
-          <p:cNvSpPr/>
-          <p:nvPr/>
-        </p:nvSpPr>
-        <p:spPr>
-          <a:xfrm>
-            <a:off x="4754880" y="932688"/>
-            <a:ext cx="3931920" cy="3611880"/>
-          </a:xfrm>
-          <a:prstGeom prst="roundRect">
-            <a:avLst>
-              <a:gd name="adj" fmla="val 3038"/>
-            </a:avLst>
-          </a:prstGeom>
-          <a:solidFill>
-            <a:srgbClr val="FFFFFF"/>
-          </a:solidFill>
-          <a:ln w="6350">
-            <a:solidFill>
-              <a:srgbClr val="E2E8F0"/>
-            </a:solidFill>
-            <a:prstDash val="solid"/>
-          </a:ln>
-          <a:effectLst>
-            <a:outerShdw blurRad="101600" dist="38100" dir="2700000" algn="bl" rotWithShape="0">
-              <a:srgbClr val="000000">
-                <a:alpha val="10000"/>
-              </a:srgbClr>
-            </a:outerShdw>
-          </a:effectLst>
-        </p:spPr>
-        <p:txBody>
-          <a:bodyPr/>
-          <a:lstStyle/>
-          <a:p>
-            <a:endParaRPr lang="en-US"/>
-          </a:p>
-        </p:txBody>
-      </p:sp>
-      <p:sp>
-        <p:nvSpPr>
-          <p:cNvPr id="11" name="Shape 9"/>
-          <p:cNvSpPr/>
-          <p:nvPr/>
-        </p:nvSpPr>
-        <p:spPr>
-          <a:xfrm>
-            <a:off x="4754880" y="932688"/>
-            <a:ext cx="3931920" cy="420624"/>
-          </a:xfrm>
-          <a:prstGeom prst="rect">
-            <a:avLst/>
-          </a:prstGeom>
-          <a:solidFill>
-            <a:srgbClr val="1A7A4A"/>
-          </a:solidFill>
-          <a:ln w="12700">
-            <a:solidFill>
-              <a:srgbClr val="1A7A4A"/>
-            </a:solidFill>
-            <a:prstDash val="solid"/>
-          </a:ln>
-        </p:spPr>
-        <p:txBody>
-          <a:bodyPr/>
-          <a:lstStyle/>
-          <a:p>
-            <a:endParaRPr lang="en-US"/>
-          </a:p>
-        </p:txBody>
-      </p:sp>
-      <p:sp>
-        <p:nvSpPr>
-          <p:cNvPr id="12" name="Text 10"/>
-          <p:cNvSpPr/>
-          <p:nvPr/>
-        </p:nvSpPr>
-        <p:spPr>
-          <a:xfrm>
-            <a:off x="4864608" y="950976"/>
-            <a:ext cx="3703320" cy="384048"/>
-          </a:xfrm>
-          <a:prstGeom prst="rect">
-            <a:avLst/>
-          </a:prstGeom>
-          <a:noFill/>
-          <a:ln/>
-        </p:spPr>
-        <p:txBody>
-          <a:bodyPr wrap="square" rtlCol="0" anchor="ctr"/>
-          <a:lstStyle/>
-          <a:p>
-            <a:pPr marL="0" indent="0">
-              <a:buNone/>
-            </a:pPr>
-            <a:r>
-              <a:rPr lang="en-US" sz="1500" b="1" dirty="0">
-                <a:solidFill>
-                  <a:srgbClr val="FFFFFF"/>
-                </a:solidFill>
-                <a:latin typeface="Calibri" pitchFamily="34" charset="0"/>
-                <a:ea typeface="Calibri" pitchFamily="34" charset="-122"/>
-                <a:cs typeface="Calibri" pitchFamily="34" charset="-120"/>
-              </a:rPr>
-              <a:t>Our Solution</a:t>
-            </a:r>
-            <a:endParaRPr lang="en-US" sz="1500" dirty="0"/>
-          </a:p>
-        </p:txBody>
-      </p:sp>
-      <p:sp>
-        <p:nvSpPr>
-          <p:cNvPr id="13" name="Text 11"/>
-          <p:cNvSpPr/>
-          <p:nvPr/>
-        </p:nvSpPr>
-        <p:spPr>
-          <a:xfrm>
-            <a:off x="4864608" y="1417320"/>
-            <a:ext cx="3703320" cy="2971800"/>
-          </a:xfrm>
-          <a:prstGeom prst="rect">
-            <a:avLst/>
-          </a:prstGeom>
-          <a:noFill/>
-          <a:ln/>
-        </p:spPr>
-        <p:txBody>
-          <a:bodyPr wrap="square" rtlCol="0" anchor="t"/>
-          <a:lstStyle/>
-          <a:p>
-            <a:pPr marL="342900" indent="-342900">
-              <a:spcAft>
-                <a:spcPts val="500"/>
-              </a:spcAft>
-              <a:buSzPct val="100000"/>
-              <a:buChar char="•"/>
-            </a:pPr>
-            <a:r>
-              <a:rPr lang="en-US" sz="1300" dirty="0">
-                <a:solidFill>
-                  <a:srgbClr val="2D3748"/>
-                </a:solidFill>
-                <a:latin typeface="Calibri" pitchFamily="34" charset="0"/>
-                <a:ea typeface="Calibri" pitchFamily="34" charset="-122"/>
-                <a:cs typeface="Calibri" pitchFamily="34" charset="-120"/>
-              </a:rPr>
-              <a:t>Full-stack web application (Spring Boot + Thymeleaf)</a:t>
-            </a:r>
-            <a:endParaRPr lang="en-US" sz="1300" dirty="0"/>
-          </a:p>
-          <a:p>
-            <a:pPr marL="342900" indent="-342900">
-              <a:spcAft>
-                <a:spcPts val="500"/>
-              </a:spcAft>
-              <a:buSzPct val="100000"/>
-              <a:buChar char="•"/>
-            </a:pPr>
-            <a:r>
-              <a:rPr lang="en-US" sz="1300" dirty="0">
-                <a:solidFill>
-                  <a:srgbClr val="2D3748"/>
-                </a:solidFill>
-                <a:latin typeface="Calibri" pitchFamily="34" charset="0"/>
-                <a:ea typeface="Calibri" pitchFamily="34" charset="-122"/>
-                <a:cs typeface="Calibri" pitchFamily="34" charset="-120"/>
-              </a:rPr>
-              <a:t>Implements official QT.03.TV.DV regulation exactly</a:t>
-            </a:r>
-            <a:endParaRPr lang="en-US" sz="1300" dirty="0"/>
-          </a:p>
-          <a:p>
-            <a:pPr marL="342900" indent="-342900">
-              <a:spcAft>
-                <a:spcPts val="500"/>
-              </a:spcAft>
-              <a:buSzPct val="100000"/>
-              <a:buChar char="•"/>
-            </a:pPr>
-            <a:r>
-              <a:rPr lang="en-US" sz="1300" dirty="0">
-                <a:solidFill>
-                  <a:srgbClr val="2D3748"/>
-                </a:solidFill>
-                <a:latin typeface="Calibri" pitchFamily="34" charset="0"/>
-                <a:ea typeface="Calibri" pitchFamily="34" charset="-122"/>
-                <a:cs typeface="Calibri" pitchFamily="34" charset="-120"/>
-              </a:rPr>
-              <a:t>Cart-based self-service loan request portal</a:t>
-            </a:r>
-            <a:endParaRPr lang="en-US" sz="1300" dirty="0"/>
-          </a:p>
-          <a:p>
-            <a:pPr marL="342900" indent="-342900">
-              <a:spcAft>
-                <a:spcPts val="500"/>
-              </a:spcAft>
-              <a:buSzPct val="100000"/>
-              <a:buChar char="•"/>
-            </a:pPr>
-            <a:r>
-              <a:rPr lang="en-US" sz="1300" dirty="0">
-                <a:solidFill>
-                  <a:srgbClr val="2D3748"/>
-                </a:solidFill>
-                <a:latin typeface="Calibri" pitchFamily="34" charset="0"/>
-                <a:ea typeface="Calibri" pitchFamily="34" charset="-122"/>
-                <a:cs typeface="Calibri" pitchFamily="34" charset="-120"/>
-              </a:rPr>
-              <a:t>Admin dashboard for approvals, returns &amp; overdue tracking</a:t>
-            </a:r>
-            <a:endParaRPr lang="en-US" sz="1300" dirty="0"/>
-          </a:p>
-          <a:p>
-            <a:pPr marL="342900" indent="-342900">
-              <a:spcAft>
-                <a:spcPts val="500"/>
-              </a:spcAft>
-              <a:buSzPct val="100000"/>
-              <a:buChar char="•"/>
-            </a:pPr>
-            <a:r>
-              <a:rPr lang="en-US" sz="1300" dirty="0">
-                <a:solidFill>
-                  <a:srgbClr val="2D3748"/>
-                </a:solidFill>
-                <a:latin typeface="Calibri" pitchFamily="34" charset="0"/>
-                <a:ea typeface="Calibri" pitchFamily="34" charset="-122"/>
-                <a:cs typeface="Calibri" pitchFamily="34" charset="-120"/>
-              </a:rPr>
-              <a:t>Automatic fine calculation (2,000 VND/day)</a:t>
-            </a:r>
-            <a:endParaRPr lang="en-US" sz="1300" dirty="0"/>
-          </a:p>
-          <a:p>
-            <a:pPr marL="342900" indent="-342900">
-              <a:spcAft>
-                <a:spcPts val="500"/>
-              </a:spcAft>
-              <a:buSzPct val="100000"/>
-              <a:buChar char="•"/>
-            </a:pPr>
-            <a:r>
-              <a:rPr lang="en-US" sz="1300" dirty="0">
-                <a:solidFill>
-                  <a:srgbClr val="2D3748"/>
-                </a:solidFill>
-                <a:latin typeface="Calibri" pitchFamily="34" charset="0"/>
-                <a:ea typeface="Calibri" pitchFamily="34" charset="-122"/>
-                <a:cs typeface="Calibri" pitchFamily="34" charset="-120"/>
-              </a:rPr>
-              <a:t>Role-based access: Student, Lecturer, Researcher, Admin</a:t>
-            </a:r>
-            <a:endParaRPr lang="en-US" sz="1300" dirty="0"/>
-          </a:p>
-        </p:txBody>
-      </p:sp>
-    </p:spTree>
-  </p:cSld>
-  <p:clrMapOvr>
-    <a:masterClrMapping/>
-  </p:clrMapOvr>
-  <mc:AlternateContent xmlns:mc="http://schemas.openxmlformats.org/markup-compatibility/2006">
-    <mc:Choice xmlns:p14="http://schemas.microsoft.com/office/powerpoint/2010/main" Requires="p14">
-      <p:transition spd="med" p14:dur="700">
-        <p:fade/>
-      </p:transition>
-    </mc:Choice>
-    <mc:Fallback>
+    <mc:Fallback xmlns="">
       <p:transition spd="med">
         <p:fade/>
       </p:transition>
@@ -21149,13 +21193,13 @@
   <p:clrMapOvr>
     <a:masterClrMapping/>
   </p:clrMapOvr>
-  <mc:AlternateContent xmlns:mc="http://schemas.openxmlformats.org/markup-compatibility/2006">
-    <mc:Choice xmlns:p14="http://schemas.microsoft.com/office/powerpoint/2010/main" Requires="p14">
+  <mc:AlternateContent xmlns:mc="http://schemas.openxmlformats.org/markup-compatibility/2006" xmlns:p14="http://schemas.microsoft.com/office/powerpoint/2010/main">
+    <mc:Choice Requires="p14">
       <p:transition spd="med" p14:dur="700">
         <p:fade/>
       </p:transition>
     </mc:Choice>
-    <mc:Fallback>
+    <mc:Fallback xmlns="">
       <p:transition spd="med">
         <p:fade/>
       </p:transition>
@@ -21954,13 +21998,13 @@
   <p:clrMapOvr>
     <a:masterClrMapping/>
   </p:clrMapOvr>
-  <mc:AlternateContent xmlns:mc="http://schemas.openxmlformats.org/markup-compatibility/2006">
-    <mc:Choice xmlns:p14="http://schemas.microsoft.com/office/powerpoint/2010/main" Requires="p14">
+  <mc:AlternateContent xmlns:mc="http://schemas.openxmlformats.org/markup-compatibility/2006" xmlns:p14="http://schemas.microsoft.com/office/powerpoint/2010/main">
+    <mc:Choice Requires="p14">
       <p:transition spd="med" p14:dur="700">
         <p:fade/>
       </p:transition>
     </mc:Choice>
-    <mc:Fallback>
+    <mc:Fallback xmlns="">
       <p:transition spd="med">
         <p:fade/>
       </p:transition>
@@ -23745,13 +23789,13 @@
   <p:clrMapOvr>
     <a:masterClrMapping/>
   </p:clrMapOvr>
-  <mc:AlternateContent xmlns:mc="http://schemas.openxmlformats.org/markup-compatibility/2006">
-    <mc:Choice xmlns:p14="http://schemas.microsoft.com/office/powerpoint/2010/main" Requires="p14">
+  <mc:AlternateContent xmlns:mc="http://schemas.openxmlformats.org/markup-compatibility/2006" xmlns:p14="http://schemas.microsoft.com/office/powerpoint/2010/main">
+    <mc:Choice Requires="p14">
       <p:transition spd="med" p14:dur="700">
         <p:fade/>
       </p:transition>
     </mc:Choice>
-    <mc:Fallback>
+    <mc:Fallback xmlns="">
       <p:transition spd="med">
         <p:fade/>
       </p:transition>
@@ -24932,13 +24976,13 @@
   <p:clrMapOvr>
     <a:masterClrMapping/>
   </p:clrMapOvr>
-  <mc:AlternateContent xmlns:mc="http://schemas.openxmlformats.org/markup-compatibility/2006">
-    <mc:Choice xmlns:p14="http://schemas.microsoft.com/office/powerpoint/2010/main" Requires="p14">
+  <mc:AlternateContent xmlns:mc="http://schemas.openxmlformats.org/markup-compatibility/2006" xmlns:p14="http://schemas.microsoft.com/office/powerpoint/2010/main">
+    <mc:Choice Requires="p14">
       <p:transition spd="med" p14:dur="700">
         <p:fade/>
       </p:transition>
     </mc:Choice>
-    <mc:Fallback>
+    <mc:Fallback xmlns="">
       <p:transition spd="med">
         <p:fade/>
       </p:transition>
@@ -27172,13 +27216,13 @@
   <p:clrMapOvr>
     <a:masterClrMapping/>
   </p:clrMapOvr>
-  <mc:AlternateContent xmlns:mc="http://schemas.openxmlformats.org/markup-compatibility/2006">
-    <mc:Choice xmlns:p14="http://schemas.microsoft.com/office/powerpoint/2010/main" Requires="p14">
+  <mc:AlternateContent xmlns:mc="http://schemas.openxmlformats.org/markup-compatibility/2006" xmlns:p14="http://schemas.microsoft.com/office/powerpoint/2010/main">
+    <mc:Choice Requires="p14">
       <p:transition spd="med" p14:dur="700">
         <p:fade/>
       </p:transition>
     </mc:Choice>
-    <mc:Fallback>
+    <mc:Fallback xmlns="">
       <p:transition spd="med">
         <p:fade/>
       </p:transition>

--- a/FinalPresentation_LibraryManagement.pptx
+++ b/FinalPresentation_LibraryManagement.pptx
@@ -1864,10 +1864,10 @@
       </p:grpSpPr>
       <p:sp>
         <p:nvSpPr>
-          <p:cNvPr id="7" name="9Slide.vn - 2019">
+          <p:cNvPr id="2" name="9Slide.vn - 2019">
             <a:extLst>
               <a:ext uri="{FF2B5EF4-FFF2-40B4-BE49-F238E27FC236}">
-                <a16:creationId xmlns:a16="http://schemas.microsoft.com/office/drawing/2014/main" id="{4BA02655-BFB8-B398-D9B0-083628BD474C}"/>
+                <a16:creationId xmlns:a16="http://schemas.microsoft.com/office/drawing/2014/main" id="{684624F3-F978-EE9C-B8D5-E0572E16C032}"/>
               </a:ext>
             </a:extLst>
           </p:cNvPr>
@@ -17788,7 +17788,29 @@
                 <a:ea typeface="Calibri" pitchFamily="34" charset="-122"/>
                 <a:cs typeface="Calibri" pitchFamily="34" charset="-120"/>
               </a:rPr>
-              <a:t>Role-based access: Student, Lecturer, Researcher, Admin</a:t>
+              <a:t>Role-based access: Student, Lecturer, Researcher</a:t>
+            </a:r>
+            <a:r>
+              <a:rPr lang="en-US" sz="1300">
+                <a:solidFill>
+                  <a:srgbClr val="2D3748"/>
+                </a:solidFill>
+                <a:latin typeface="Calibri" pitchFamily="34" charset="0"/>
+                <a:ea typeface="Calibri" pitchFamily="34" charset="-122"/>
+                <a:cs typeface="Calibri" pitchFamily="34" charset="-120"/>
+              </a:rPr>
+              <a:t>, </a:t>
+            </a:r>
+            <a:r>
+              <a:rPr lang="vi-VN" sz="1300">
+                <a:solidFill>
+                  <a:srgbClr val="2D3748"/>
+                </a:solidFill>
+                <a:latin typeface="Calibri" pitchFamily="34" charset="0"/>
+                <a:ea typeface="Calibri" pitchFamily="34" charset="-122"/>
+                <a:cs typeface="Calibri" pitchFamily="34" charset="-120"/>
+              </a:rPr>
+              <a:t>Admin, Librarian</a:t>
             </a:r>
             <a:endParaRPr lang="en-US" sz="1300" dirty="0"/>
           </a:p>

--- a/FinalPresentation_LibraryManagement.pptx
+++ b/FinalPresentation_LibraryManagement.pptx
@@ -1864,10 +1864,10 @@
       </p:grpSpPr>
       <p:sp>
         <p:nvSpPr>
-          <p:cNvPr id="2" name="9Slide.vn - 2019">
+          <p:cNvPr id="11" name="9Slide.vn - 2019">
             <a:extLst>
               <a:ext uri="{FF2B5EF4-FFF2-40B4-BE49-F238E27FC236}">
-                <a16:creationId xmlns:a16="http://schemas.microsoft.com/office/drawing/2014/main" id="{684624F3-F978-EE9C-B8D5-E0572E16C032}"/>
+                <a16:creationId xmlns:a16="http://schemas.microsoft.com/office/drawing/2014/main" id="{CFAB907E-0406-980A-6D19-64D0A0DC4F4B}"/>
               </a:ext>
             </a:extLst>
           </p:cNvPr>
@@ -3961,7 +3961,7 @@
                 <a:ea typeface="Calibri" pitchFamily="34" charset="-122"/>
                 <a:cs typeface="Calibri" pitchFamily="34" charset="-120"/>
               </a:rPr>
-              <a:t>Triggers 3-layer RuleEngine validation → creates PENDING Loan + LoanDetails → decrements available_copies</a:t>
+              <a:t>3-layer RuleEngine validation → creates AWAITING_PICKUP loan + 6-char pickup code + 24h deadline; holds copies</a:t>
             </a:r>
             <a:endParaRPr lang="en-US" sz="1050" dirty="0"/>
           </a:p>
@@ -4657,7 +4657,7 @@
         <p:spPr>
           <a:xfrm>
             <a:off x="457200" y="932688"/>
-            <a:ext cx="2670048" cy="1481328"/>
+            <a:ext cx="2670048" cy="1828096"/>
           </a:xfrm>
           <a:prstGeom prst="roundRect">
             <a:avLst>
@@ -4832,7 +4832,7 @@
                 <a:ea typeface="Calibri" pitchFamily="34" charset="-122"/>
                 <a:cs typeface="Calibri" pitchFamily="34" charset="-120"/>
               </a:rPr>
-              <a:t>KPI cards: pending loans, active borrowings, overdue list with days-overdue and estimated fine</a:t>
+              <a:t>Awaiting-pickup count, active borrowings, overdue items, in-house readings; links to each queue</a:t>
             </a:r>
             <a:endParaRPr lang="en-US" sz="1050" dirty="0"/>
           </a:p>
@@ -4846,7 +4846,7 @@
         </p:nvSpPr>
         <p:spPr>
           <a:xfrm>
-            <a:off x="585216" y="2139696"/>
+            <a:off x="585216" y="2274514"/>
             <a:ext cx="2414016" cy="219456"/>
           </a:xfrm>
           <a:prstGeom prst="rect">
@@ -4871,7 +4871,7 @@
                 <a:ea typeface="Courier New" pitchFamily="34" charset="-122"/>
                 <a:cs typeface="Courier New" pitchFamily="34" charset="-120"/>
               </a:rPr>
-              <a:t>GET /admin/dashboard</a:t>
+              <a:t>GET /librarian/dashboard</a:t>
             </a:r>
             <a:endParaRPr lang="en-US" sz="900" dirty="0"/>
           </a:p>
@@ -4885,8 +4885,8 @@
         </p:nvSpPr>
         <p:spPr>
           <a:xfrm>
-            <a:off x="3355848" y="932688"/>
-            <a:ext cx="2670048" cy="1481328"/>
+            <a:off x="3355848" y="932687"/>
+            <a:ext cx="2670048" cy="1828097"/>
           </a:xfrm>
           <a:prstGeom prst="roundRect">
             <a:avLst>
@@ -5022,7 +5022,7 @@
                 <a:ea typeface="Calibri" pitchFamily="34" charset="-122"/>
                 <a:cs typeface="Calibri" pitchFamily="34" charset="-120"/>
               </a:rPr>
-              <a:t>Pending Loans</a:t>
+              <a:t>Pickup Orders</a:t>
             </a:r>
             <a:endParaRPr lang="en-US" sz="1300" dirty="0"/>
           </a:p>
@@ -5061,7 +5061,7 @@
                 <a:ea typeface="Calibri" pitchFamily="34" charset="-122"/>
                 <a:cs typeface="Calibri" pitchFamily="34" charset="-120"/>
               </a:rPr>
-              <a:t>Lists all PENDING requests with reader name, date, book list. One-click Approve or Cancel</a:t>
+              <a:t>AWAITING_PICKUP list with pickup codes and 24 h deadlines for reference; enter pickup code to confirm handover when reader arrives at counter; can cancel order with mandatory reason</a:t>
             </a:r>
             <a:endParaRPr lang="en-US" sz="1050" dirty="0"/>
           </a:p>
@@ -5075,7 +5075,7 @@
         </p:nvSpPr>
         <p:spPr>
           <a:xfrm>
-            <a:off x="3483864" y="2139696"/>
+            <a:off x="3483864" y="2385876"/>
             <a:ext cx="2414016" cy="219456"/>
           </a:xfrm>
           <a:prstGeom prst="rect">
@@ -5100,7 +5100,7 @@
                 <a:ea typeface="Courier New" pitchFamily="34" charset="-122"/>
                 <a:cs typeface="Courier New" pitchFamily="34" charset="-120"/>
               </a:rPr>
-              <a:t>GET /admin/loans/pending</a:t>
+              <a:t>GET /librarian/loans?status=AWAITING_PICKUP</a:t>
             </a:r>
             <a:endParaRPr lang="en-US" sz="900" dirty="0"/>
           </a:p>
@@ -5115,7 +5115,7 @@
         <p:spPr>
           <a:xfrm>
             <a:off x="6254496" y="932688"/>
-            <a:ext cx="2670048" cy="1481328"/>
+            <a:ext cx="2670048" cy="1828096"/>
           </a:xfrm>
           <a:prstGeom prst="roundRect">
             <a:avLst>
@@ -5251,7 +5251,7 @@
                 <a:ea typeface="Calibri" pitchFamily="34" charset="-122"/>
                 <a:cs typeface="Calibri" pitchFamily="34" charset="-120"/>
               </a:rPr>
-              <a:t>Approve Loan</a:t>
+              <a:t>Librarian Confirms Pickup</a:t>
             </a:r>
             <a:endParaRPr lang="en-US" sz="1300" dirty="0"/>
           </a:p>
@@ -5290,7 +5290,7 @@
                 <a:ea typeface="Calibri" pitchFamily="34" charset="-122"/>
                 <a:cs typeface="Calibri" pitchFamily="34" charset="-120"/>
               </a:rPr>
-              <a:t>Sets status=APPROVED; calculates and sets due_date per (user_role × doc_type) rule for each item</a:t>
+              <a:t>Librarian enters reader's pickup code; system finds AWAITING_PICKUP loan → BORROWED + due_date per role × doc-type; reader notified</a:t>
             </a:r>
             <a:endParaRPr lang="en-US" sz="1050" dirty="0"/>
           </a:p>
@@ -5304,7 +5304,7 @@
         </p:nvSpPr>
         <p:spPr>
           <a:xfrm>
-            <a:off x="6382512" y="2139696"/>
+            <a:off x="6382512" y="2303822"/>
             <a:ext cx="2414016" cy="219456"/>
           </a:xfrm>
           <a:prstGeom prst="rect">
@@ -5329,7 +5329,7 @@
                 <a:ea typeface="Courier New" pitchFamily="34" charset="-122"/>
                 <a:cs typeface="Courier New" pitchFamily="34" charset="-120"/>
               </a:rPr>
-              <a:t>POST /admin/loans/{id}/approve</a:t>
+              <a:t>POST /librarian/loans/confirm-pickup</a:t>
             </a:r>
             <a:endParaRPr lang="en-US" sz="900" dirty="0"/>
           </a:p>
@@ -5343,8 +5343,8 @@
         </p:nvSpPr>
         <p:spPr>
           <a:xfrm>
-            <a:off x="457200" y="2596896"/>
-            <a:ext cx="2670048" cy="1481328"/>
+            <a:off x="457200" y="2831353"/>
+            <a:ext cx="2670048" cy="1786365"/>
           </a:xfrm>
           <a:prstGeom prst="roundRect">
             <a:avLst>
@@ -5384,7 +5384,7 @@
         </p:nvSpPr>
         <p:spPr>
           <a:xfrm>
-            <a:off x="585216" y="2706624"/>
+            <a:off x="585216" y="2941082"/>
             <a:ext cx="347472" cy="347472"/>
           </a:xfrm>
           <a:prstGeom prst="ellipse">
@@ -5416,7 +5416,7 @@
         </p:nvSpPr>
         <p:spPr>
           <a:xfrm>
-            <a:off x="585216" y="2706624"/>
+            <a:off x="585216" y="2941082"/>
             <a:ext cx="347472" cy="347472"/>
           </a:xfrm>
           <a:prstGeom prst="rect">
@@ -5455,7 +5455,7 @@
         </p:nvSpPr>
         <p:spPr>
           <a:xfrm>
-            <a:off x="1005840" y="2688336"/>
+            <a:off x="1005840" y="2922794"/>
             <a:ext cx="2011680" cy="384048"/>
           </a:xfrm>
           <a:prstGeom prst="rect">
@@ -5480,7 +5480,7 @@
                 <a:ea typeface="Calibri" pitchFamily="34" charset="-122"/>
                 <a:cs typeface="Calibri" pitchFamily="34" charset="-120"/>
               </a:rPr>
-              <a:t>Cancel Loan</a:t>
+              <a:t>Cancel Order (Reader / Librarian / Scheduler)</a:t>
             </a:r>
             <a:endParaRPr lang="en-US" sz="1300" dirty="0"/>
           </a:p>
@@ -5494,7 +5494,7 @@
         </p:nvSpPr>
         <p:spPr>
           <a:xfrm>
-            <a:off x="585216" y="3108960"/>
+            <a:off x="585216" y="3343418"/>
             <a:ext cx="2414016" cy="676656"/>
           </a:xfrm>
           <a:prstGeom prst="rect">
@@ -5519,7 +5519,7 @@
                 <a:ea typeface="Calibri" pitchFamily="34" charset="-122"/>
                 <a:cs typeface="Calibri" pitchFamily="34" charset="-120"/>
               </a:rPr>
-              <a:t>Restores available_copies for all books in loan. Persisted via @Transactional LoanService.cancelLoan()</a:t>
+              <a:t>Reader self-cancels before pickup; librarian cancels with mandatory reason; scheduler auto-cancels after 24h; all restore held copies</a:t>
             </a:r>
             <a:endParaRPr lang="en-US" sz="1050" dirty="0"/>
           </a:p>
@@ -5533,7 +5533,7 @@
         </p:nvSpPr>
         <p:spPr>
           <a:xfrm>
-            <a:off x="585216" y="3803904"/>
+            <a:off x="585216" y="4229554"/>
             <a:ext cx="2414016" cy="219456"/>
           </a:xfrm>
           <a:prstGeom prst="rect">
@@ -5558,7 +5558,7 @@
                 <a:ea typeface="Courier New" pitchFamily="34" charset="-122"/>
                 <a:cs typeface="Courier New" pitchFamily="34" charset="-120"/>
               </a:rPr>
-              <a:t>POST /admin/loans/{id}/cancel</a:t>
+              <a:t>POST /client/loans/{id}/cancel  ·  POST /librarian/loans/{id}/cancel</a:t>
             </a:r>
             <a:endParaRPr lang="en-US" sz="900" dirty="0"/>
           </a:p>
@@ -5572,8 +5572,8 @@
         </p:nvSpPr>
         <p:spPr>
           <a:xfrm>
-            <a:off x="3355848" y="2596896"/>
-            <a:ext cx="2670048" cy="1481328"/>
+            <a:off x="3355848" y="2831354"/>
+            <a:ext cx="2670048" cy="1786366"/>
           </a:xfrm>
           <a:prstGeom prst="roundRect">
             <a:avLst>
@@ -5613,7 +5613,7 @@
         </p:nvSpPr>
         <p:spPr>
           <a:xfrm>
-            <a:off x="3483864" y="2706624"/>
+            <a:off x="3483864" y="2941082"/>
             <a:ext cx="347472" cy="347472"/>
           </a:xfrm>
           <a:prstGeom prst="ellipse">
@@ -5645,7 +5645,7 @@
         </p:nvSpPr>
         <p:spPr>
           <a:xfrm>
-            <a:off x="3483864" y="2706624"/>
+            <a:off x="3483864" y="2941082"/>
             <a:ext cx="347472" cy="347472"/>
           </a:xfrm>
           <a:prstGeom prst="rect">
@@ -5684,7 +5684,7 @@
         </p:nvSpPr>
         <p:spPr>
           <a:xfrm>
-            <a:off x="3904488" y="2688336"/>
+            <a:off x="3904488" y="2922794"/>
             <a:ext cx="2011680" cy="384048"/>
           </a:xfrm>
           <a:prstGeom prst="rect">
@@ -5723,7 +5723,7 @@
         </p:nvSpPr>
         <p:spPr>
           <a:xfrm>
-            <a:off x="3483864" y="3108960"/>
+            <a:off x="3483864" y="3343418"/>
             <a:ext cx="2414016" cy="676656"/>
           </a:xfrm>
           <a:prstGeom prst="rect">
@@ -5748,7 +5748,7 @@
                 <a:ea typeface="Calibri" pitchFamily="34" charset="-122"/>
                 <a:cs typeface="Calibri" pitchFamily="34" charset="-120"/>
               </a:rPr>
-              <a:t>Records condition (GOOD/DAMAGED), calculates fine, marks RETURNED, increments copies, auto-closes loan</a:t>
+              <a:t>Librarian records condition (GOOD/DAMAGED), computes fine (overdue days × 2,000 VND), restores copy; loan → COMPLETED when all items returned &amp; fines paid</a:t>
             </a:r>
             <a:endParaRPr lang="en-US" sz="1050" dirty="0"/>
           </a:p>
@@ -5762,7 +5762,7 @@
         </p:nvSpPr>
         <p:spPr>
           <a:xfrm>
-            <a:off x="3483864" y="3803904"/>
+            <a:off x="3483864" y="4261106"/>
             <a:ext cx="2414016" cy="219456"/>
           </a:xfrm>
           <a:prstGeom prst="rect">
@@ -5787,7 +5787,7 @@
                 <a:ea typeface="Courier New" pitchFamily="34" charset="-122"/>
                 <a:cs typeface="Courier New" pitchFamily="34" charset="-120"/>
               </a:rPr>
-              <a:t>POST /admin/loans/details/{id}/return</a:t>
+              <a:t>POST /librarian/loans/details/{id}/return</a:t>
             </a:r>
             <a:endParaRPr lang="en-US" sz="900" dirty="0"/>
           </a:p>
@@ -5801,8 +5801,8 @@
         </p:nvSpPr>
         <p:spPr>
           <a:xfrm>
-            <a:off x="6254496" y="2596896"/>
-            <a:ext cx="2670048" cy="1481328"/>
+            <a:off x="6254496" y="2831353"/>
+            <a:ext cx="2670048" cy="1786366"/>
           </a:xfrm>
           <a:prstGeom prst="roundRect">
             <a:avLst>
@@ -5842,7 +5842,7 @@
         </p:nvSpPr>
         <p:spPr>
           <a:xfrm>
-            <a:off x="6382512" y="2706624"/>
+            <a:off x="6382512" y="2941082"/>
             <a:ext cx="347472" cy="347472"/>
           </a:xfrm>
           <a:prstGeom prst="ellipse">
@@ -5874,7 +5874,7 @@
         </p:nvSpPr>
         <p:spPr>
           <a:xfrm>
-            <a:off x="6382512" y="2706624"/>
+            <a:off x="6382512" y="2941082"/>
             <a:ext cx="347472" cy="347472"/>
           </a:xfrm>
           <a:prstGeom prst="rect">
@@ -5913,7 +5913,7 @@
         </p:nvSpPr>
         <p:spPr>
           <a:xfrm>
-            <a:off x="6803136" y="2688336"/>
+            <a:off x="6803136" y="2922794"/>
             <a:ext cx="2011680" cy="384048"/>
           </a:xfrm>
           <a:prstGeom prst="rect">
@@ -5938,7 +5938,7 @@
                 <a:ea typeface="Calibri" pitchFamily="34" charset="-122"/>
                 <a:cs typeface="Calibri" pitchFamily="34" charset="-120"/>
               </a:rPr>
-              <a:t>Book &amp; User CRUD</a:t>
+              <a:t>Book &amp; Stock Management + Borrowing Rules</a:t>
             </a:r>
             <a:endParaRPr lang="en-US" sz="1300" dirty="0"/>
           </a:p>
@@ -5952,7 +5952,7 @@
         </p:nvSpPr>
         <p:spPr>
           <a:xfrm>
-            <a:off x="6382512" y="3108960"/>
+            <a:off x="6382512" y="3343418"/>
             <a:ext cx="2414016" cy="676656"/>
           </a:xfrm>
           <a:prstGeom prst="rect">
@@ -5977,7 +5977,7 @@
                 <a:ea typeface="Calibri" pitchFamily="34" charset="-122"/>
                 <a:cs typeface="Calibri" pitchFamily="34" charset="-120"/>
               </a:rPr>
-              <a:t>Full book catalogue management. View/toggle user ACTIVE/LOCKED status. DocType selector for all 4 types</a:t>
+              <a:t>Librarian: book CRUD + Excel bulk import; edit borrowing-rule matrix &amp; doc-type visibility; issue in-house reading slips for RESTRICTED docs</a:t>
             </a:r>
             <a:endParaRPr lang="en-US" sz="1050" dirty="0"/>
           </a:p>
@@ -5991,7 +5991,7 @@
         </p:nvSpPr>
         <p:spPr>
           <a:xfrm>
-            <a:off x="6382512" y="3803904"/>
+            <a:off x="6382512" y="4179046"/>
             <a:ext cx="2414016" cy="219456"/>
           </a:xfrm>
           <a:prstGeom prst="rect">
@@ -6016,7 +6016,7 @@
                 <a:ea typeface="Courier New" pitchFamily="34" charset="-122"/>
                 <a:cs typeface="Courier New" pitchFamily="34" charset="-120"/>
               </a:rPr>
-              <a:t>GET/POST /admin/books/** · /admin/users</a:t>
+              <a:t>GET/POST /librarian/books/**  ·  /librarian/rules  ·  /librarian/inhouse</a:t>
             </a:r>
             <a:endParaRPr lang="en-US" sz="900" dirty="0"/>
           </a:p>
@@ -6030,7 +6030,7 @@
         </p:nvSpPr>
         <p:spPr>
           <a:xfrm>
-            <a:off x="7223760" y="4617720"/>
+            <a:off x="7223760" y="4715692"/>
             <a:ext cx="1691640" cy="384048"/>
           </a:xfrm>
           <a:prstGeom prst="roundRect">
@@ -6064,7 +6064,7 @@
         </p:nvSpPr>
         <p:spPr>
           <a:xfrm>
-            <a:off x="7223760" y="4617720"/>
+            <a:off x="7223760" y="4715692"/>
             <a:ext cx="1691640" cy="384048"/>
           </a:xfrm>
           <a:prstGeom prst="rect">
@@ -6089,7 +6089,7 @@
                 <a:ea typeface="Calibri" pitchFamily="34" charset="-122"/>
                 <a:cs typeface="Calibri" pitchFamily="34" charset="-120"/>
               </a:rPr>
-              <a:t>Total: 18 Features</a:t>
+              <a:t>Total: 30 Features</a:t>
             </a:r>
             <a:endParaRPr lang="en-US" sz="1100" dirty="0"/>
           </a:p>
@@ -9875,7 +9875,7 @@
                 <a:ea typeface="Calibri" pitchFamily="34" charset="-122"/>
                 <a:cs typeface="Calibri" pitchFamily="34" charset="-120"/>
               </a:rPr>
-              <a:t>Loan created PENDING; available_copies -1</a:t>
+              <a:t>Loan status = AWAITING_PICKUP; pickup code issued; available_copies -1</a:t>
             </a:r>
             <a:endParaRPr lang="en-US" sz="1000" dirty="0"/>
           </a:p>
@@ -10549,7 +10549,7 @@
                 <a:ea typeface="Calibri" pitchFamily="34" charset="-122"/>
                 <a:cs typeface="Calibri" pitchFamily="34" charset="-120"/>
               </a:rPr>
-              <a:t>Admin approves — due date set</a:t>
+              <a:t>Librarian confirms pickup — due date set</a:t>
             </a:r>
             <a:endParaRPr lang="en-US" sz="1000" dirty="0"/>
           </a:p>
@@ -10627,7 +10627,7 @@
                 <a:ea typeface="Calibri" pitchFamily="34" charset="-122"/>
                 <a:cs typeface="Calibri" pitchFamily="34" charset="-120"/>
               </a:rPr>
-              <a:t>due_date = today + 150 days (STUDENT/TEXTBOOK)</a:t>
+              <a:t>Librarian enters code → BORROWED; due_date = pickup_date + 150 days (STUDENT/TEXTBOOK)</a:t>
             </a:r>
             <a:endParaRPr lang="en-US" sz="1000" dirty="0"/>
           </a:p>
@@ -13012,7 +13012,7 @@
                 <a:ea typeface="Cambria" pitchFamily="34" charset="-122"/>
                 <a:cs typeface="Cambria" pitchFamily="34" charset="-120"/>
               </a:rPr>
-              <a:t>18</a:t>
+              <a:t>30</a:t>
             </a:r>
             <a:endParaRPr lang="en-US" sz="3400" dirty="0"/>
           </a:p>
@@ -13148,7 +13148,7 @@
                 <a:ea typeface="Cambria" pitchFamily="34" charset="-122"/>
                 <a:cs typeface="Cambria" pitchFamily="34" charset="-120"/>
               </a:rPr>
-              <a:t>5</a:t>
+              <a:t>8</a:t>
             </a:r>
             <a:endParaRPr lang="en-US" sz="3400" dirty="0"/>
           </a:p>
@@ -13763,7 +13763,7 @@
         <p:spPr>
           <a:xfrm>
             <a:off x="457200" y="2286000"/>
-            <a:ext cx="4069080" cy="2560320"/>
+            <a:ext cx="4069080" cy="2711196"/>
           </a:xfrm>
           <a:prstGeom prst="roundRect">
             <a:avLst>
@@ -13913,7 +13913,7 @@
                 <a:ea typeface="Calibri" pitchFamily="34" charset="-122"/>
                 <a:cs typeface="Calibri" pitchFamily="34" charset="-120"/>
               </a:rPr>
-              <a:t>Complete borrowing lifecycle: browse → cart → submit → approve → return</a:t>
+              <a:t>Complete borrowing lifecycle: browse → cart → submit → pickup code → librarian confirms → return</a:t>
             </a:r>
             <a:endParaRPr lang="en-US" sz="1150" dirty="0"/>
           </a:p>
@@ -13934,7 +13934,7 @@
                 <a:ea typeface="Calibri" pitchFamily="34" charset="-122"/>
                 <a:cs typeface="Calibri" pitchFamily="34" charset="-120"/>
               </a:rPr>
-              <a:t>H2 dev DB auto-seeded with 5 users, 10 books, 12 rules</a:t>
+              <a:t>H2 dev DB auto-seeded with 82 users, 24 books, 12 rules, permissions &amp; sample loans</a:t>
             </a:r>
             <a:endParaRPr lang="en-US" sz="1150" dirty="0"/>
           </a:p>
@@ -13991,7 +13991,7 @@
         <p:spPr>
           <a:xfrm>
             <a:off x="4754880" y="2286000"/>
-            <a:ext cx="3931920" cy="2560320"/>
+            <a:ext cx="3931920" cy="2711196"/>
           </a:xfrm>
           <a:prstGeom prst="roundRect">
             <a:avLst>
@@ -14510,7 +14510,7 @@
                 <a:ea typeface="Calibri" pitchFamily="34" charset="-122"/>
                 <a:cs typeface="Calibri" pitchFamily="34" charset="-120"/>
               </a:rPr>
-              <a:t>Spring ecosystem: Security, JPA, MVC in one project</a:t>
+              <a:t>Spring ecosystem: Security, JPA, MVC, Scheduling, Thymeleaf in one project</a:t>
             </a:r>
             <a:endParaRPr lang="en-US" sz="1200" dirty="0"/>
           </a:p>
@@ -14552,7 +14552,7 @@
                 <a:ea typeface="Calibri" pitchFamily="34" charset="-122"/>
                 <a:cs typeface="Calibri" pitchFamily="34" charset="-120"/>
               </a:rPr>
-              <a:t>Team division by vertical slice — minimised blocking</a:t>
+              <a:t>On-screen configuration: admin permission matrix + librarian rule &amp; visibility editor</a:t>
             </a:r>
             <a:endParaRPr lang="en-US" sz="1200" dirty="0"/>
           </a:p>
@@ -14668,7 +14668,7 @@
                 <a:ea typeface="Calibri" pitchFamily="34" charset="-122"/>
                 <a:cs typeface="Calibri" pitchFamily="34" charset="-120"/>
               </a:rPr>
-              <a:t>Admin UI for user registration (remove data.sql dependency)</a:t>
+              <a:t>QR code for pickup confirmation (render 6-char code as scannable QR)</a:t>
             </a:r>
             <a:endParaRPr lang="en-US" sz="1200" dirty="0"/>
           </a:p>
@@ -14885,7 +14885,7 @@
                 <a:ea typeface="Calibri" pitchFamily="34" charset="-122"/>
                 <a:cs typeface="Calibri" pitchFamily="34" charset="-120"/>
               </a:rPr>
-              <a:t>No UI-based account creation  ·  No automated overdue emails  ·  H2 is non-persistent (data resets on restart)</a:t>
+              <a:t>No automated overdue emails  ·  H2 is non-persistent (data resets on restart)  ·  No reservation queue</a:t>
             </a:r>
             <a:endParaRPr lang="en-US" sz="1100" dirty="0"/>
           </a:p>
@@ -14924,7 +14924,7 @@
                 <a:ea typeface="Calibri" pitchFamily="34" charset="-122"/>
                 <a:cs typeface="Calibri" pitchFamily="34" charset="-120"/>
               </a:rPr>
-              <a:t>No reservation queue  ·  No mobile-optimised views  ·  Pickup deadline scheduler not yet wired to UI notification</a:t>
+              <a:t>No QR pickup code  ·  No mobile-native app  ·  Overdue reminder emails not yet configured</a:t>
             </a:r>
             <a:endParaRPr lang="en-US" sz="1100" dirty="0"/>
           </a:p>
@@ -17746,7 +17746,7 @@
                 <a:ea typeface="Calibri" pitchFamily="34" charset="-122"/>
                 <a:cs typeface="Calibri" pitchFamily="34" charset="-120"/>
               </a:rPr>
-              <a:t>Admin dashboard for approvals, returns &amp; overdue tracking</a:t>
+              <a:t>Pickup-code handover: librarian enters code to confirm — no manual paper slip or approval step</a:t>
             </a:r>
             <a:endParaRPr lang="en-US" sz="1300" dirty="0"/>
           </a:p>
@@ -17882,7 +17882,7 @@
           <p:nvPr>
             <p:extLst>
               <p:ext uri="{D42A27DB-BD31-4B8C-83A1-F6EECF244321}">
-                <p14:modId xmlns:p14="http://schemas.microsoft.com/office/powerpoint/2010/main" val="2355230473"/>
+                <p14:modId xmlns:p14="http://schemas.microsoft.com/office/powerpoint/2010/main" val="308842629"/>
               </p:ext>
             </p:extLst>
           </p:nvPr>
@@ -17905,21 +17905,21 @@
                     </a:ext>
                   </a:extLst>
                 </a:gridCol>
-                <a:gridCol w="2873357">
+                <a:gridCol w="2443985">
                   <a:extLst>
                     <a:ext uri="{9D8B030D-6E8A-4147-A177-3AD203B41FA5}">
                       <a16:colId xmlns:a16="http://schemas.microsoft.com/office/drawing/2014/main" val="4093213329"/>
                     </a:ext>
                   </a:extLst>
                 </a:gridCol>
-                <a:gridCol w="1573072">
+                <a:gridCol w="1928553">
                   <a:extLst>
                     <a:ext uri="{9D8B030D-6E8A-4147-A177-3AD203B41FA5}">
                       <a16:colId xmlns:a16="http://schemas.microsoft.com/office/drawing/2014/main" val="3882899228"/>
                     </a:ext>
                   </a:extLst>
                 </a:gridCol>
-                <a:gridCol w="1682866">
+                <a:gridCol w="1756757">
                   <a:extLst>
                     <a:ext uri="{9D8B030D-6E8A-4147-A177-3AD203B41FA5}">
                       <a16:colId xmlns:a16="http://schemas.microsoft.com/office/drawing/2014/main" val="3273397462"/>
@@ -17950,12 +17950,12 @@
                         <a:buNone/>
                       </a:pPr>
                       <a:r>
-                        <a:rPr lang="en-US" sz="1000">
+                        <a:rPr lang="en-US" sz="1200">
                           <a:effectLst/>
                         </a:rPr>
                         <a:t>No.</a:t>
                       </a:r>
-                      <a:endParaRPr lang="en-US" sz="1000">
+                      <a:endParaRPr lang="en-US" sz="1200">
                         <a:effectLst/>
                         <a:latin typeface="Calibri" panose="020F0502020204030204" pitchFamily="34" charset="0"/>
                         <a:ea typeface="MS Mincho" panose="02020609040205080304" pitchFamily="49" charset="-128"/>
@@ -17980,12 +17980,12 @@
                         <a:buNone/>
                       </a:pPr>
                       <a:r>
-                        <a:rPr lang="en-US" sz="1000">
+                        <a:rPr lang="en-US" sz="1200">
                           <a:effectLst/>
                         </a:rPr>
                         <a:t>Flowchart (step)</a:t>
                       </a:r>
-                      <a:endParaRPr lang="en-US" sz="1000">
+                      <a:endParaRPr lang="en-US" sz="1200">
                         <a:effectLst/>
                         <a:latin typeface="Calibri" panose="020F0502020204030204" pitchFamily="34" charset="0"/>
                         <a:ea typeface="MS Mincho" panose="02020609040205080304" pitchFamily="49" charset="-128"/>
@@ -18010,12 +18010,12 @@
                         <a:buNone/>
                       </a:pPr>
                       <a:r>
-                        <a:rPr lang="en-US" sz="1000">
+                        <a:rPr lang="en-US" sz="1200">
                           <a:effectLst/>
                         </a:rPr>
                         <a:t>Performed by</a:t>
                       </a:r>
-                      <a:endParaRPr lang="en-US" sz="1000">
+                      <a:endParaRPr lang="en-US" sz="1200">
                         <a:effectLst/>
                         <a:latin typeface="Calibri" panose="020F0502020204030204" pitchFamily="34" charset="0"/>
                         <a:ea typeface="MS Mincho" panose="02020609040205080304" pitchFamily="49" charset="-128"/>
@@ -18040,12 +18040,12 @@
                         <a:buNone/>
                       </a:pPr>
                       <a:r>
-                        <a:rPr lang="en-US" sz="1000">
+                        <a:rPr lang="en-US" sz="1200">
                           <a:effectLst/>
                         </a:rPr>
                         <a:t>Coordinates with</a:t>
                       </a:r>
-                      <a:endParaRPr lang="en-US" sz="1000">
+                      <a:endParaRPr lang="en-US" sz="1200">
                         <a:effectLst/>
                         <a:latin typeface="Calibri" panose="020F0502020204030204" pitchFamily="34" charset="0"/>
                         <a:ea typeface="MS Mincho" panose="02020609040205080304" pitchFamily="49" charset="-128"/>
@@ -18070,12 +18070,12 @@
                         <a:buNone/>
                       </a:pPr>
                       <a:r>
-                        <a:rPr lang="en-US" sz="1000">
+                        <a:rPr lang="en-US" sz="1200">
                           <a:effectLst/>
                         </a:rPr>
                         <a:t>Form</a:t>
                       </a:r>
-                      <a:endParaRPr lang="en-US" sz="1000">
+                      <a:endParaRPr lang="en-US" sz="1200">
                         <a:effectLst/>
                         <a:latin typeface="Calibri" panose="020F0502020204030204" pitchFamily="34" charset="0"/>
                         <a:ea typeface="MS Mincho" panose="02020609040205080304" pitchFamily="49" charset="-128"/>
@@ -18107,12 +18107,12 @@
                         <a:buNone/>
                       </a:pPr>
                       <a:r>
-                        <a:rPr lang="en-US" sz="1000">
+                        <a:rPr lang="en-US" sz="1200">
                           <a:effectLst/>
                         </a:rPr>
                         <a:t>1</a:t>
                       </a:r>
-                      <a:endParaRPr lang="en-US" sz="1000">
+                      <a:endParaRPr lang="en-US" sz="1200">
                         <a:effectLst/>
                         <a:latin typeface="Calibri" panose="020F0502020204030204" pitchFamily="34" charset="0"/>
                         <a:ea typeface="MS Mincho" panose="02020609040205080304" pitchFamily="49" charset="-128"/>
@@ -18137,12 +18137,12 @@
                         <a:buNone/>
                       </a:pPr>
                       <a:r>
-                        <a:rPr lang="en-US" sz="1000">
+                        <a:rPr lang="en-US" sz="1200">
                           <a:effectLst/>
                         </a:rPr>
                         <a:t>Present card</a:t>
                       </a:r>
-                      <a:endParaRPr lang="en-US" sz="1000">
+                      <a:endParaRPr lang="en-US" sz="1200">
                         <a:effectLst/>
                         <a:latin typeface="Calibri" panose="020F0502020204030204" pitchFamily="34" charset="0"/>
                         <a:ea typeface="MS Mincho" panose="02020609040205080304" pitchFamily="49" charset="-128"/>
@@ -18167,12 +18167,12 @@
                         <a:buNone/>
                       </a:pPr>
                       <a:r>
-                        <a:rPr lang="en-US" sz="1000">
+                        <a:rPr lang="en-US" sz="1200">
                           <a:effectLst/>
                         </a:rPr>
                         <a:t>Reader</a:t>
                       </a:r>
-                      <a:endParaRPr lang="en-US" sz="1000">
+                      <a:endParaRPr lang="en-US" sz="1200">
                         <a:effectLst/>
                         <a:latin typeface="Calibri" panose="020F0502020204030204" pitchFamily="34" charset="0"/>
                         <a:ea typeface="MS Mincho" panose="02020609040205080304" pitchFamily="49" charset="-128"/>
@@ -18197,12 +18197,12 @@
                         <a:buNone/>
                       </a:pPr>
                       <a:r>
-                        <a:rPr lang="en-US" sz="1000">
+                        <a:rPr lang="en-US" sz="1200">
                           <a:effectLst/>
                         </a:rPr>
                         <a:t>Library staff</a:t>
                       </a:r>
-                      <a:endParaRPr lang="en-US" sz="1000">
+                      <a:endParaRPr lang="en-US" sz="1200">
                         <a:effectLst/>
                         <a:latin typeface="Calibri" panose="020F0502020204030204" pitchFamily="34" charset="0"/>
                         <a:ea typeface="MS Mincho" panose="02020609040205080304" pitchFamily="49" charset="-128"/>
@@ -18227,12 +18227,12 @@
                         <a:buNone/>
                       </a:pPr>
                       <a:r>
-                        <a:rPr lang="en-US" sz="1000">
+                        <a:rPr lang="en-US" sz="1200">
                           <a:effectLst/>
                         </a:rPr>
                         <a:t>HD.01.TV.DV.02</a:t>
                       </a:r>
-                      <a:endParaRPr lang="en-US" sz="1000">
+                      <a:endParaRPr lang="en-US" sz="1200">
                         <a:effectLst/>
                         <a:latin typeface="Calibri" panose="020F0502020204030204" pitchFamily="34" charset="0"/>
                         <a:ea typeface="MS Mincho" panose="02020609040205080304" pitchFamily="49" charset="-128"/>
@@ -18264,12 +18264,12 @@
                         <a:buNone/>
                       </a:pPr>
                       <a:r>
-                        <a:rPr lang="en-US" sz="1000">
+                        <a:rPr lang="en-US" sz="1200">
                           <a:effectLst/>
                         </a:rPr>
                         <a:t>2</a:t>
                       </a:r>
-                      <a:endParaRPr lang="en-US" sz="1000">
+                      <a:endParaRPr lang="en-US" sz="1200">
                         <a:effectLst/>
                         <a:latin typeface="Calibri" panose="020F0502020204030204" pitchFamily="34" charset="0"/>
                         <a:ea typeface="MS Mincho" panose="02020609040205080304" pitchFamily="49" charset="-128"/>
@@ -18294,12 +18294,12 @@
                         <a:buNone/>
                       </a:pPr>
                       <a:r>
-                        <a:rPr lang="en-US" sz="1000">
+                        <a:rPr lang="en-US" sz="1200">
                           <a:effectLst/>
                         </a:rPr>
                         <a:t>Search the catalogue</a:t>
                       </a:r>
-                      <a:endParaRPr lang="en-US" sz="1000">
+                      <a:endParaRPr lang="en-US" sz="1200">
                         <a:effectLst/>
                         <a:latin typeface="Calibri" panose="020F0502020204030204" pitchFamily="34" charset="0"/>
                         <a:ea typeface="MS Mincho" panose="02020609040205080304" pitchFamily="49" charset="-128"/>
@@ -18324,12 +18324,12 @@
                         <a:buNone/>
                       </a:pPr>
                       <a:r>
-                        <a:rPr lang="en-US" sz="1000">
+                        <a:rPr lang="en-US" sz="1200">
                           <a:effectLst/>
                         </a:rPr>
                         <a:t>Reader</a:t>
                       </a:r>
-                      <a:endParaRPr lang="en-US" sz="1000">
+                      <a:endParaRPr lang="en-US" sz="1200">
                         <a:effectLst/>
                         <a:latin typeface="Calibri" panose="020F0502020204030204" pitchFamily="34" charset="0"/>
                         <a:ea typeface="MS Mincho" panose="02020609040205080304" pitchFamily="49" charset="-128"/>
@@ -18354,12 +18354,12 @@
                         <a:buNone/>
                       </a:pPr>
                       <a:r>
-                        <a:rPr lang="en-US" sz="1000">
+                        <a:rPr lang="en-US" sz="1200">
                           <a:effectLst/>
                         </a:rPr>
                         <a:t>Library staff</a:t>
                       </a:r>
-                      <a:endParaRPr lang="en-US" sz="1000">
+                      <a:endParaRPr lang="en-US" sz="1200">
                         <a:effectLst/>
                         <a:latin typeface="Calibri" panose="020F0502020204030204" pitchFamily="34" charset="0"/>
                         <a:ea typeface="MS Mincho" panose="02020609040205080304" pitchFamily="49" charset="-128"/>
@@ -18384,12 +18384,12 @@
                         <a:buNone/>
                       </a:pPr>
                       <a:r>
-                        <a:rPr lang="en-US" sz="1000">
+                        <a:rPr lang="en-US" sz="1200">
                           <a:effectLst/>
                         </a:rPr>
                         <a:t>HD.01.TV.DV.01; BM.03.QT.03.TV.DV</a:t>
                       </a:r>
-                      <a:endParaRPr lang="en-US" sz="1000">
+                      <a:endParaRPr lang="en-US" sz="1200">
                         <a:effectLst/>
                         <a:latin typeface="Calibri" panose="020F0502020204030204" pitchFamily="34" charset="0"/>
                         <a:ea typeface="MS Mincho" panose="02020609040205080304" pitchFamily="49" charset="-128"/>
@@ -18421,12 +18421,12 @@
                         <a:buNone/>
                       </a:pPr>
                       <a:r>
-                        <a:rPr lang="en-US" sz="1000">
+                        <a:rPr lang="en-US" sz="1200">
                           <a:effectLst/>
                         </a:rPr>
                         <a:t>3</a:t>
                       </a:r>
-                      <a:endParaRPr lang="en-US" sz="1000">
+                      <a:endParaRPr lang="en-US" sz="1200">
                         <a:effectLst/>
                         <a:latin typeface="Calibri" panose="020F0502020204030204" pitchFamily="34" charset="0"/>
                         <a:ea typeface="MS Mincho" panose="02020609040205080304" pitchFamily="49" charset="-128"/>
@@ -18451,12 +18451,12 @@
                         <a:buNone/>
                       </a:pPr>
                       <a:r>
-                        <a:rPr lang="en-US" sz="1000">
+                        <a:rPr lang="en-US" sz="1200">
                           <a:effectLst/>
                         </a:rPr>
                         <a:t>Fill in the request slip</a:t>
                       </a:r>
-                      <a:endParaRPr lang="en-US" sz="1000">
+                      <a:endParaRPr lang="en-US" sz="1200">
                         <a:effectLst/>
                         <a:latin typeface="Calibri" panose="020F0502020204030204" pitchFamily="34" charset="0"/>
                         <a:ea typeface="MS Mincho" panose="02020609040205080304" pitchFamily="49" charset="-128"/>
@@ -18481,12 +18481,12 @@
                         <a:buNone/>
                       </a:pPr>
                       <a:r>
-                        <a:rPr lang="en-US" sz="1000">
+                        <a:rPr lang="en-US" sz="1200">
                           <a:effectLst/>
                         </a:rPr>
                         <a:t>Reader</a:t>
                       </a:r>
-                      <a:endParaRPr lang="en-US" sz="1000">
+                      <a:endParaRPr lang="en-US" sz="1200">
                         <a:effectLst/>
                         <a:latin typeface="Calibri" panose="020F0502020204030204" pitchFamily="34" charset="0"/>
                         <a:ea typeface="MS Mincho" panose="02020609040205080304" pitchFamily="49" charset="-128"/>
@@ -18511,12 +18511,12 @@
                         <a:buNone/>
                       </a:pPr>
                       <a:r>
-                        <a:rPr lang="en-US" sz="1000">
+                        <a:rPr lang="en-US" sz="1200">
                           <a:effectLst/>
                         </a:rPr>
                         <a:t>Library staff</a:t>
                       </a:r>
-                      <a:endParaRPr lang="en-US" sz="1000">
+                      <a:endParaRPr lang="en-US" sz="1200">
                         <a:effectLst/>
                         <a:latin typeface="Calibri" panose="020F0502020204030204" pitchFamily="34" charset="0"/>
                         <a:ea typeface="MS Mincho" panose="02020609040205080304" pitchFamily="49" charset="-128"/>
@@ -18541,12 +18541,12 @@
                         <a:buNone/>
                       </a:pPr>
                       <a:r>
-                        <a:rPr lang="en-US" sz="1000">
+                        <a:rPr lang="en-US" sz="1200">
                           <a:effectLst/>
                         </a:rPr>
                         <a:t>BM.01.QT.03.TV.DV (or record the loan directly in Koha)</a:t>
                       </a:r>
-                      <a:endParaRPr lang="en-US" sz="1000">
+                      <a:endParaRPr lang="en-US" sz="1200">
                         <a:effectLst/>
                         <a:latin typeface="Calibri" panose="020F0502020204030204" pitchFamily="34" charset="0"/>
                         <a:ea typeface="MS Mincho" panose="02020609040205080304" pitchFamily="49" charset="-128"/>
@@ -18578,12 +18578,12 @@
                         <a:buNone/>
                       </a:pPr>
                       <a:r>
-                        <a:rPr lang="en-US" sz="1000">
+                        <a:rPr lang="en-US" sz="1200">
                           <a:effectLst/>
                         </a:rPr>
                         <a:t>4</a:t>
                       </a:r>
-                      <a:endParaRPr lang="en-US" sz="1000">
+                      <a:endParaRPr lang="en-US" sz="1200">
                         <a:effectLst/>
                         <a:latin typeface="Calibri" panose="020F0502020204030204" pitchFamily="34" charset="0"/>
                         <a:ea typeface="MS Mincho" panose="02020609040205080304" pitchFamily="49" charset="-128"/>
@@ -18608,12 +18608,12 @@
                         <a:buNone/>
                       </a:pPr>
                       <a:r>
-                        <a:rPr lang="en-US" sz="1000">
+                        <a:rPr lang="en-US" sz="1200">
                           <a:effectLst/>
                         </a:rPr>
                         <a:t>Retrieve from the stacks</a:t>
                       </a:r>
-                      <a:endParaRPr lang="en-US" sz="1000">
+                      <a:endParaRPr lang="en-US" sz="1200">
                         <a:effectLst/>
                         <a:latin typeface="Calibri" panose="020F0502020204030204" pitchFamily="34" charset="0"/>
                         <a:ea typeface="MS Mincho" panose="02020609040205080304" pitchFamily="49" charset="-128"/>
@@ -18638,12 +18638,12 @@
                         <a:buNone/>
                       </a:pPr>
                       <a:r>
-                        <a:rPr lang="en-US" sz="1000">
+                        <a:rPr lang="en-US" sz="1200">
                           <a:effectLst/>
                         </a:rPr>
                         <a:t>Library staff</a:t>
                       </a:r>
-                      <a:endParaRPr lang="en-US" sz="1000">
+                      <a:endParaRPr lang="en-US" sz="1200">
                         <a:effectLst/>
                         <a:latin typeface="Calibri" panose="020F0502020204030204" pitchFamily="34" charset="0"/>
                         <a:ea typeface="MS Mincho" panose="02020609040205080304" pitchFamily="49" charset="-128"/>
@@ -18668,12 +18668,12 @@
                         <a:buNone/>
                       </a:pPr>
                       <a:r>
-                        <a:rPr lang="en-US" sz="1000">
+                        <a:rPr lang="en-US" sz="1200">
                           <a:effectLst/>
                         </a:rPr>
                         <a:t>—</a:t>
                       </a:r>
-                      <a:endParaRPr lang="en-US" sz="1000">
+                      <a:endParaRPr lang="en-US" sz="1200">
                         <a:effectLst/>
                         <a:latin typeface="Calibri" panose="020F0502020204030204" pitchFamily="34" charset="0"/>
                         <a:ea typeface="MS Mincho" panose="02020609040205080304" pitchFamily="49" charset="-128"/>
@@ -18698,12 +18698,12 @@
                         <a:buNone/>
                       </a:pPr>
                       <a:r>
-                        <a:rPr lang="en-US" sz="1000">
+                        <a:rPr lang="en-US" sz="1200">
                           <a:effectLst/>
                         </a:rPr>
                         <a:t>HD.01.TV.DV.01</a:t>
                       </a:r>
-                      <a:endParaRPr lang="en-US" sz="1000">
+                      <a:endParaRPr lang="en-US" sz="1200">
                         <a:effectLst/>
                         <a:latin typeface="Calibri" panose="020F0502020204030204" pitchFamily="34" charset="0"/>
                         <a:ea typeface="MS Mincho" panose="02020609040205080304" pitchFamily="49" charset="-128"/>
@@ -18735,12 +18735,12 @@
                         <a:buNone/>
                       </a:pPr>
                       <a:r>
-                        <a:rPr lang="en-US" sz="1000">
+                        <a:rPr lang="en-US" sz="1200">
                           <a:effectLst/>
                         </a:rPr>
                         <a:t>5</a:t>
                       </a:r>
-                      <a:endParaRPr lang="en-US" sz="1000">
+                      <a:endParaRPr lang="en-US" sz="1200">
                         <a:effectLst/>
                         <a:latin typeface="Calibri" panose="020F0502020204030204" pitchFamily="34" charset="0"/>
                         <a:ea typeface="MS Mincho" panose="02020609040205080304" pitchFamily="49" charset="-128"/>
@@ -18765,12 +18765,12 @@
                         <a:buNone/>
                       </a:pPr>
                       <a:r>
-                        <a:rPr lang="en-US" sz="1000">
+                        <a:rPr lang="en-US" sz="1200">
                           <a:effectLst/>
                         </a:rPr>
                         <a:t>Complete the loan</a:t>
                       </a:r>
-                      <a:endParaRPr lang="en-US" sz="1000">
+                      <a:endParaRPr lang="en-US" sz="1200">
                         <a:effectLst/>
                         <a:latin typeface="Calibri" panose="020F0502020204030204" pitchFamily="34" charset="0"/>
                         <a:ea typeface="MS Mincho" panose="02020609040205080304" pitchFamily="49" charset="-128"/>
@@ -18795,12 +18795,12 @@
                         <a:buNone/>
                       </a:pPr>
                       <a:r>
-                        <a:rPr lang="en-US" sz="1000">
+                        <a:rPr lang="en-US" sz="1200">
                           <a:effectLst/>
                         </a:rPr>
                         <a:t>Library staff</a:t>
                       </a:r>
-                      <a:endParaRPr lang="en-US" sz="1000">
+                      <a:endParaRPr lang="en-US" sz="1200">
                         <a:effectLst/>
                         <a:latin typeface="Calibri" panose="020F0502020204030204" pitchFamily="34" charset="0"/>
                         <a:ea typeface="MS Mincho" panose="02020609040205080304" pitchFamily="49" charset="-128"/>
@@ -18825,12 +18825,12 @@
                         <a:buNone/>
                       </a:pPr>
                       <a:r>
-                        <a:rPr lang="en-US" sz="1000">
+                        <a:rPr lang="en-US" sz="1200">
                           <a:effectLst/>
                         </a:rPr>
                         <a:t>—</a:t>
                       </a:r>
-                      <a:endParaRPr lang="en-US" sz="1000">
+                      <a:endParaRPr lang="en-US" sz="1200">
                         <a:effectLst/>
                         <a:latin typeface="Calibri" panose="020F0502020204030204" pitchFamily="34" charset="0"/>
                         <a:ea typeface="MS Mincho" panose="02020609040205080304" pitchFamily="49" charset="-128"/>
@@ -18855,12 +18855,12 @@
                         <a:buNone/>
                       </a:pPr>
                       <a:r>
-                        <a:rPr lang="en-US" sz="1000">
+                        <a:rPr lang="en-US" sz="1200">
                           <a:effectLst/>
                         </a:rPr>
                         <a:t>BM.01.QT.03.TV.DV; Koha software</a:t>
                       </a:r>
-                      <a:endParaRPr lang="en-US" sz="1000">
+                      <a:endParaRPr lang="en-US" sz="1200">
                         <a:effectLst/>
                         <a:latin typeface="Calibri" panose="020F0502020204030204" pitchFamily="34" charset="0"/>
                         <a:ea typeface="MS Mincho" panose="02020609040205080304" pitchFamily="49" charset="-128"/>
@@ -18892,12 +18892,12 @@
                         <a:buNone/>
                       </a:pPr>
                       <a:r>
-                        <a:rPr lang="en-US" sz="1000">
+                        <a:rPr lang="en-US" sz="1200">
                           <a:effectLst/>
                         </a:rPr>
                         <a:t>6</a:t>
                       </a:r>
-                      <a:endParaRPr lang="en-US" sz="1000">
+                      <a:endParaRPr lang="en-US" sz="1200">
                         <a:effectLst/>
                         <a:latin typeface="Calibri" panose="020F0502020204030204" pitchFamily="34" charset="0"/>
                         <a:ea typeface="MS Mincho" panose="02020609040205080304" pitchFamily="49" charset="-128"/>
@@ -18922,12 +18922,12 @@
                         <a:buNone/>
                       </a:pPr>
                       <a:r>
-                        <a:rPr lang="en-US" sz="1000">
+                        <a:rPr lang="en-US" sz="1200">
                           <a:effectLst/>
                         </a:rPr>
                         <a:t>Return at the staff desk</a:t>
                       </a:r>
-                      <a:endParaRPr lang="en-US" sz="1000">
+                      <a:endParaRPr lang="en-US" sz="1200">
                         <a:effectLst/>
                         <a:latin typeface="Calibri" panose="020F0502020204030204" pitchFamily="34" charset="0"/>
                         <a:ea typeface="MS Mincho" panose="02020609040205080304" pitchFamily="49" charset="-128"/>
@@ -18952,12 +18952,12 @@
                         <a:buNone/>
                       </a:pPr>
                       <a:r>
-                        <a:rPr lang="en-US" sz="1000">
+                        <a:rPr lang="en-US" sz="1200">
                           <a:effectLst/>
                         </a:rPr>
                         <a:t>Reader</a:t>
                       </a:r>
-                      <a:endParaRPr lang="en-US" sz="1000">
+                      <a:endParaRPr lang="en-US" sz="1200">
                         <a:effectLst/>
                         <a:latin typeface="Calibri" panose="020F0502020204030204" pitchFamily="34" charset="0"/>
                         <a:ea typeface="MS Mincho" panose="02020609040205080304" pitchFamily="49" charset="-128"/>
@@ -18982,12 +18982,12 @@
                         <a:buNone/>
                       </a:pPr>
                       <a:r>
-                        <a:rPr lang="en-US" sz="1000">
+                        <a:rPr lang="en-US" sz="1200">
                           <a:effectLst/>
                         </a:rPr>
                         <a:t>Library staff</a:t>
                       </a:r>
-                      <a:endParaRPr lang="en-US" sz="1000">
+                      <a:endParaRPr lang="en-US" sz="1200">
                         <a:effectLst/>
                         <a:latin typeface="Calibri" panose="020F0502020204030204" pitchFamily="34" charset="0"/>
                         <a:ea typeface="MS Mincho" panose="02020609040205080304" pitchFamily="49" charset="-128"/>
@@ -19012,12 +19012,12 @@
                         <a:buNone/>
                       </a:pPr>
                       <a:r>
-                        <a:rPr lang="en-US" sz="1000">
+                        <a:rPr lang="en-US" sz="1200">
                           <a:effectLst/>
                         </a:rPr>
                         <a:t>BM.02.QT.03.TV.DV; Koha software</a:t>
                       </a:r>
-                      <a:endParaRPr lang="en-US" sz="1000">
+                      <a:endParaRPr lang="en-US" sz="1200">
                         <a:effectLst/>
                         <a:latin typeface="Calibri" panose="020F0502020204030204" pitchFamily="34" charset="0"/>
                         <a:ea typeface="MS Mincho" panose="02020609040205080304" pitchFamily="49" charset="-128"/>
@@ -19049,12 +19049,12 @@
                         <a:buNone/>
                       </a:pPr>
                       <a:r>
-                        <a:rPr lang="en-US" sz="1000">
+                        <a:rPr lang="en-US" sz="1200">
                           <a:effectLst/>
                         </a:rPr>
                         <a:t>7</a:t>
                       </a:r>
-                      <a:endParaRPr lang="en-US" sz="1000">
+                      <a:endParaRPr lang="en-US" sz="1200">
                         <a:effectLst/>
                         <a:latin typeface="Calibri" panose="020F0502020204030204" pitchFamily="34" charset="0"/>
                         <a:ea typeface="MS Mincho" panose="02020609040205080304" pitchFamily="49" charset="-128"/>
@@ -19079,12 +19079,12 @@
                         <a:buNone/>
                       </a:pPr>
                       <a:r>
-                        <a:rPr lang="en-US" sz="1000">
+                        <a:rPr lang="en-US" sz="1200">
                           <a:effectLst/>
                         </a:rPr>
                         <a:t>Process return / renewal / handle violations (if any)</a:t>
                       </a:r>
-                      <a:endParaRPr lang="en-US" sz="1000">
+                      <a:endParaRPr lang="en-US" sz="1200">
                         <a:effectLst/>
                         <a:latin typeface="Calibri" panose="020F0502020204030204" pitchFamily="34" charset="0"/>
                         <a:ea typeface="MS Mincho" panose="02020609040205080304" pitchFamily="49" charset="-128"/>
@@ -19109,12 +19109,12 @@
                         <a:buNone/>
                       </a:pPr>
                       <a:r>
-                        <a:rPr lang="en-US" sz="1000">
+                        <a:rPr lang="en-US" sz="1200">
                           <a:effectLst/>
                         </a:rPr>
                         <a:t>Library staff</a:t>
                       </a:r>
-                      <a:endParaRPr lang="en-US" sz="1000">
+                      <a:endParaRPr lang="en-US" sz="1200">
                         <a:effectLst/>
                         <a:latin typeface="Calibri" panose="020F0502020204030204" pitchFamily="34" charset="0"/>
                         <a:ea typeface="MS Mincho" panose="02020609040205080304" pitchFamily="49" charset="-128"/>
@@ -19139,12 +19139,12 @@
                         <a:buNone/>
                       </a:pPr>
                       <a:r>
-                        <a:rPr lang="en-US" sz="1000">
+                        <a:rPr lang="en-US" sz="1200">
                           <a:effectLst/>
                         </a:rPr>
                         <a:t>—</a:t>
                       </a:r>
-                      <a:endParaRPr lang="en-US" sz="1000">
+                      <a:endParaRPr lang="en-US" sz="1200">
                         <a:effectLst/>
                         <a:latin typeface="Calibri" panose="020F0502020204030204" pitchFamily="34" charset="0"/>
                         <a:ea typeface="MS Mincho" panose="02020609040205080304" pitchFamily="49" charset="-128"/>
@@ -19169,12 +19169,12 @@
                         <a:buNone/>
                       </a:pPr>
                       <a:r>
-                        <a:rPr lang="en-US" sz="1000">
+                        <a:rPr lang="en-US" sz="1200">
                           <a:effectLst/>
                         </a:rPr>
                         <a:t>BM.02.QT.03.TV.DV; HD.01.TV.DV.02</a:t>
                       </a:r>
-                      <a:endParaRPr lang="en-US" sz="1000">
+                      <a:endParaRPr lang="en-US" sz="1200">
                         <a:effectLst/>
                         <a:latin typeface="Calibri" panose="020F0502020204030204" pitchFamily="34" charset="0"/>
                         <a:ea typeface="MS Mincho" panose="02020609040205080304" pitchFamily="49" charset="-128"/>
@@ -19206,12 +19206,12 @@
                         <a:buNone/>
                       </a:pPr>
                       <a:r>
-                        <a:rPr lang="en-US" sz="1000">
+                        <a:rPr lang="en-US" sz="1200">
                           <a:effectLst/>
                         </a:rPr>
                         <a:t>8</a:t>
                       </a:r>
-                      <a:endParaRPr lang="en-US" sz="1000">
+                      <a:endParaRPr lang="en-US" sz="1200">
                         <a:effectLst/>
                         <a:latin typeface="Calibri" panose="020F0502020204030204" pitchFamily="34" charset="0"/>
                         <a:ea typeface="MS Mincho" panose="02020609040205080304" pitchFamily="49" charset="-128"/>
@@ -19236,12 +19236,12 @@
                         <a:buNone/>
                       </a:pPr>
                       <a:r>
-                        <a:rPr lang="en-US" sz="1000">
+                        <a:rPr lang="en-US" sz="1200">
                           <a:effectLst/>
                         </a:rPr>
                         <a:t>Reshelve / handle documents per violation status</a:t>
                       </a:r>
-                      <a:endParaRPr lang="en-US" sz="1000">
+                      <a:endParaRPr lang="en-US" sz="1200">
                         <a:effectLst/>
                         <a:latin typeface="Calibri" panose="020F0502020204030204" pitchFamily="34" charset="0"/>
                         <a:ea typeface="MS Mincho" panose="02020609040205080304" pitchFamily="49" charset="-128"/>
@@ -19266,12 +19266,12 @@
                         <a:buNone/>
                       </a:pPr>
                       <a:r>
-                        <a:rPr lang="en-US" sz="1000">
+                        <a:rPr lang="en-US" sz="1200">
                           <a:effectLst/>
                         </a:rPr>
                         <a:t>Library staff</a:t>
                       </a:r>
-                      <a:endParaRPr lang="en-US" sz="1000">
+                      <a:endParaRPr lang="en-US" sz="1200">
                         <a:effectLst/>
                         <a:latin typeface="Calibri" panose="020F0502020204030204" pitchFamily="34" charset="0"/>
                         <a:ea typeface="MS Mincho" panose="02020609040205080304" pitchFamily="49" charset="-128"/>
@@ -19296,12 +19296,12 @@
                         <a:buNone/>
                       </a:pPr>
                       <a:r>
-                        <a:rPr lang="en-US" sz="1000">
+                        <a:rPr lang="en-US" sz="1200">
                           <a:effectLst/>
                         </a:rPr>
                         <a:t>—</a:t>
                       </a:r>
-                      <a:endParaRPr lang="en-US" sz="1000">
+                      <a:endParaRPr lang="en-US" sz="1200">
                         <a:effectLst/>
                         <a:latin typeface="Calibri" panose="020F0502020204030204" pitchFamily="34" charset="0"/>
                         <a:ea typeface="MS Mincho" panose="02020609040205080304" pitchFamily="49" charset="-128"/>
@@ -19326,12 +19326,12 @@
                         <a:buNone/>
                       </a:pPr>
                       <a:r>
-                        <a:rPr lang="en-US" sz="1000">
+                        <a:rPr lang="en-US" sz="1200">
                           <a:effectLst/>
                         </a:rPr>
                         <a:t>HD.01.TV.DV.04; QT.01.TV.DV.04; QT.01.TV.DV.05</a:t>
                       </a:r>
-                      <a:endParaRPr lang="en-US" sz="1000">
+                      <a:endParaRPr lang="en-US" sz="1200">
                         <a:effectLst/>
                         <a:latin typeface="Calibri" panose="020F0502020204030204" pitchFamily="34" charset="0"/>
                         <a:ea typeface="MS Mincho" panose="02020609040205080304" pitchFamily="49" charset="-128"/>
@@ -19409,10 +19409,10 @@
       </p:grpSpPr>
       <p:graphicFrame>
         <p:nvGraphicFramePr>
-          <p:cNvPr id="2" name="Table 1">
+          <p:cNvPr id="3" name="Table 2">
             <a:extLst>
               <a:ext uri="{FF2B5EF4-FFF2-40B4-BE49-F238E27FC236}">
-                <a16:creationId xmlns:a16="http://schemas.microsoft.com/office/drawing/2014/main" id="{C41AED9E-54E4-FC21-B51A-9B955D5B2916}"/>
+                <a16:creationId xmlns:a16="http://schemas.microsoft.com/office/drawing/2014/main" id="{149CA1DE-0E07-DBF6-A5CB-47165798BF9B}"/>
               </a:ext>
             </a:extLst>
           </p:cNvPr>
@@ -19422,14 +19422,14 @@
           <p:nvPr>
             <p:extLst>
               <p:ext uri="{D42A27DB-BD31-4B8C-83A1-F6EECF244321}">
-                <p14:modId xmlns:p14="http://schemas.microsoft.com/office/powerpoint/2010/main" val="3066800508"/>
+                <p14:modId xmlns:p14="http://schemas.microsoft.com/office/powerpoint/2010/main" val="63814606"/>
               </p:ext>
             </p:extLst>
           </p:nvPr>
         </p:nvGraphicFramePr>
         <p:xfrm>
-          <a:off x="-1" y="0"/>
-          <a:ext cx="9227127" cy="5165784"/>
+          <a:off x="0" y="0"/>
+          <a:ext cx="9143999" cy="5320549"/>
         </p:xfrm>
         <a:graphic>
           <a:graphicData uri="http://schemas.openxmlformats.org/drawingml/2006/table">
@@ -19438,43 +19438,43 @@
                 <a:tableStyleId>{5C22544A-7EE6-4342-B048-85BDC9FD1C3A}</a:tableStyleId>
               </a:tblPr>
               <a:tblGrid>
-                <a:gridCol w="402772">
+                <a:gridCol w="448887">
                   <a:extLst>
                     <a:ext uri="{9D8B030D-6E8A-4147-A177-3AD203B41FA5}">
-                      <a16:colId xmlns:a16="http://schemas.microsoft.com/office/drawing/2014/main" val="2843021117"/>
+                      <a16:colId xmlns:a16="http://schemas.microsoft.com/office/drawing/2014/main" val="229686758"/>
                     </a:ext>
                   </a:extLst>
                 </a:gridCol>
-                <a:gridCol w="2749828">
+                <a:gridCol w="2244437">
                   <a:extLst>
                     <a:ext uri="{9D8B030D-6E8A-4147-A177-3AD203B41FA5}">
-                      <a16:colId xmlns:a16="http://schemas.microsoft.com/office/drawing/2014/main" val="3280783715"/>
+                      <a16:colId xmlns:a16="http://schemas.microsoft.com/office/drawing/2014/main" val="3385941286"/>
                     </a:ext>
                   </a:extLst>
                 </a:gridCol>
-                <a:gridCol w="1307175">
+                <a:gridCol w="1604356">
                   <a:extLst>
                     <a:ext uri="{9D8B030D-6E8A-4147-A177-3AD203B41FA5}">
-                      <a16:colId xmlns:a16="http://schemas.microsoft.com/office/drawing/2014/main" val="2891183480"/>
+                      <a16:colId xmlns:a16="http://schemas.microsoft.com/office/drawing/2014/main" val="1636488809"/>
                     </a:ext>
                   </a:extLst>
                 </a:gridCol>
-                <a:gridCol w="2460568">
+                <a:gridCol w="2560318">
                   <a:extLst>
                     <a:ext uri="{9D8B030D-6E8A-4147-A177-3AD203B41FA5}">
-                      <a16:colId xmlns:a16="http://schemas.microsoft.com/office/drawing/2014/main" val="778125781"/>
+                      <a16:colId xmlns:a16="http://schemas.microsoft.com/office/drawing/2014/main" val="2289595826"/>
                     </a:ext>
                   </a:extLst>
                 </a:gridCol>
-                <a:gridCol w="2306784">
+                <a:gridCol w="2286001">
                   <a:extLst>
                     <a:ext uri="{9D8B030D-6E8A-4147-A177-3AD203B41FA5}">
-                      <a16:colId xmlns:a16="http://schemas.microsoft.com/office/drawing/2014/main" val="2828864994"/>
+                      <a16:colId xmlns:a16="http://schemas.microsoft.com/office/drawing/2014/main" val="3226971746"/>
                     </a:ext>
                   </a:extLst>
                 </a:gridCol>
               </a:tblGrid>
-              <a:tr h="165207">
+              <a:tr h="213840">
                 <a:tc>
                   <a:txBody>
                     <a:bodyPr/>
@@ -19490,12 +19490,12 @@
                         <a:buNone/>
                       </a:pPr>
                       <a:r>
-                        <a:rPr lang="en-US" sz="1000">
+                        <a:rPr lang="en-US" sz="1200">
                           <a:effectLst/>
                         </a:rPr>
                         <a:t>No.</a:t>
                       </a:r>
-                      <a:endParaRPr lang="en-US" sz="1000">
+                      <a:endParaRPr lang="en-US" sz="1200">
                         <a:effectLst/>
                         <a:latin typeface="Calibri" panose="020F0502020204030204" pitchFamily="34" charset="0"/>
                         <a:ea typeface="MS Mincho" panose="02020609040205080304" pitchFamily="49" charset="-128"/>
@@ -19503,7 +19503,7 @@
                       </a:endParaRPr>
                     </a:p>
                   </a:txBody>
-                  <a:tcPr marL="15123" marR="15123" marT="0" marB="0"/>
+                  <a:tcPr marL="19225" marR="19225" marT="0" marB="0"/>
                 </a:tc>
                 <a:tc>
                   <a:txBody>
@@ -19520,12 +19520,12 @@
                         <a:buNone/>
                       </a:pPr>
                       <a:r>
-                        <a:rPr lang="en-US" sz="1000">
+                        <a:rPr lang="en-US" sz="1200">
                           <a:effectLst/>
                         </a:rPr>
                         <a:t>Step (flowchart)</a:t>
                       </a:r>
-                      <a:endParaRPr lang="en-US" sz="1000">
+                      <a:endParaRPr lang="en-US" sz="1200">
                         <a:effectLst/>
                         <a:latin typeface="Calibri" panose="020F0502020204030204" pitchFamily="34" charset="0"/>
                         <a:ea typeface="MS Mincho" panose="02020609040205080304" pitchFamily="49" charset="-128"/>
@@ -19533,7 +19533,7 @@
                       </a:endParaRPr>
                     </a:p>
                   </a:txBody>
-                  <a:tcPr marL="15123" marR="15123" marT="0" marB="0"/>
+                  <a:tcPr marL="19225" marR="19225" marT="0" marB="0"/>
                 </a:tc>
                 <a:tc>
                   <a:txBody>
@@ -19550,12 +19550,12 @@
                         <a:buNone/>
                       </a:pPr>
                       <a:r>
-                        <a:rPr lang="en-US" sz="1000">
+                        <a:rPr lang="en-US" sz="1200">
                           <a:effectLst/>
                         </a:rPr>
                         <a:t>Performed by</a:t>
                       </a:r>
-                      <a:endParaRPr lang="en-US" sz="1000">
+                      <a:endParaRPr lang="en-US" sz="1200">
                         <a:effectLst/>
                         <a:latin typeface="Calibri" panose="020F0502020204030204" pitchFamily="34" charset="0"/>
                         <a:ea typeface="MS Mincho" panose="02020609040205080304" pitchFamily="49" charset="-128"/>
@@ -19563,7 +19563,7 @@
                       </a:endParaRPr>
                     </a:p>
                   </a:txBody>
-                  <a:tcPr marL="15123" marR="15123" marT="0" marB="0"/>
+                  <a:tcPr marL="19225" marR="19225" marT="0" marB="0"/>
                 </a:tc>
                 <a:tc>
                   <a:txBody>
@@ -19580,12 +19580,12 @@
                         <a:buNone/>
                       </a:pPr>
                       <a:r>
-                        <a:rPr lang="en-US" sz="1000">
+                        <a:rPr lang="en-US" sz="1200">
                           <a:effectLst/>
                         </a:rPr>
                         <a:t>System / Coordination</a:t>
                       </a:r>
-                      <a:endParaRPr lang="en-US" sz="1000">
+                      <a:endParaRPr lang="en-US" sz="1200">
                         <a:effectLst/>
                         <a:latin typeface="Calibri" panose="020F0502020204030204" pitchFamily="34" charset="0"/>
                         <a:ea typeface="MS Mincho" panose="02020609040205080304" pitchFamily="49" charset="-128"/>
@@ -19593,7 +19593,7 @@
                       </a:endParaRPr>
                     </a:p>
                   </a:txBody>
-                  <a:tcPr marL="15123" marR="15123" marT="0" marB="0"/>
+                  <a:tcPr marL="19225" marR="19225" marT="0" marB="0"/>
                 </a:tc>
                 <a:tc>
                   <a:txBody>
@@ -19610,12 +19610,12 @@
                         <a:buNone/>
                       </a:pPr>
                       <a:r>
-                        <a:rPr lang="en-US" sz="1000">
+                        <a:rPr lang="en-US" sz="1200">
                           <a:effectLst/>
                         </a:rPr>
                         <a:t>Route / Artifact</a:t>
                       </a:r>
-                      <a:endParaRPr lang="en-US" sz="1000">
+                      <a:endParaRPr lang="en-US" sz="1200">
                         <a:effectLst/>
                         <a:latin typeface="Calibri" panose="020F0502020204030204" pitchFamily="34" charset="0"/>
                         <a:ea typeface="MS Mincho" panose="02020609040205080304" pitchFamily="49" charset="-128"/>
@@ -19623,15 +19623,15 @@
                       </a:endParaRPr>
                     </a:p>
                   </a:txBody>
-                  <a:tcPr marL="15123" marR="15123" marT="0" marB="0"/>
+                  <a:tcPr marL="19225" marR="19225" marT="0" marB="0"/>
                 </a:tc>
                 <a:extLst>
                   <a:ext uri="{0D108BD9-81ED-4DB2-BD59-A6C34878D82A}">
-                    <a16:rowId xmlns:a16="http://schemas.microsoft.com/office/drawing/2014/main" val="1571515369"/>
+                    <a16:rowId xmlns:a16="http://schemas.microsoft.com/office/drawing/2014/main" val="3937701900"/>
                   </a:ext>
                 </a:extLst>
               </a:tr>
-              <a:tr h="250516">
+              <a:tr h="415126">
                 <a:tc>
                   <a:txBody>
                     <a:bodyPr/>
@@ -19647,12 +19647,12 @@
                         <a:buNone/>
                       </a:pPr>
                       <a:r>
-                        <a:rPr lang="en-US" sz="1000">
+                        <a:rPr lang="en-US" sz="1200">
                           <a:effectLst/>
                         </a:rPr>
                         <a:t>1</a:t>
                       </a:r>
-                      <a:endParaRPr lang="en-US" sz="1000">
+                      <a:endParaRPr lang="en-US" sz="1200">
                         <a:effectLst/>
                         <a:latin typeface="Calibri" panose="020F0502020204030204" pitchFamily="34" charset="0"/>
                         <a:ea typeface="MS Mincho" panose="02020609040205080304" pitchFamily="49" charset="-128"/>
@@ -19660,7 +19660,7 @@
                       </a:endParaRPr>
                     </a:p>
                   </a:txBody>
-                  <a:tcPr marL="15123" marR="15123" marT="0" marB="0"/>
+                  <a:tcPr marL="19225" marR="19225" marT="0" marB="0"/>
                 </a:tc>
                 <a:tc>
                   <a:txBody>
@@ -19677,12 +19677,12 @@
                         <a:buNone/>
                       </a:pPr>
                       <a:r>
-                        <a:rPr lang="en-US" sz="1000">
+                        <a:rPr lang="en-US" sz="1200">
                           <a:effectLst/>
                         </a:rPr>
                         <a:t>Log in</a:t>
                       </a:r>
-                      <a:endParaRPr lang="en-US" sz="1000">
+                      <a:endParaRPr lang="en-US" sz="1200">
                         <a:effectLst/>
                         <a:latin typeface="Calibri" panose="020F0502020204030204" pitchFamily="34" charset="0"/>
                         <a:ea typeface="MS Mincho" panose="02020609040205080304" pitchFamily="49" charset="-128"/>
@@ -19690,7 +19690,7 @@
                       </a:endParaRPr>
                     </a:p>
                   </a:txBody>
-                  <a:tcPr marL="15123" marR="15123" marT="0" marB="0"/>
+                  <a:tcPr marL="19225" marR="19225" marT="0" marB="0"/>
                 </a:tc>
                 <a:tc>
                   <a:txBody>
@@ -19707,12 +19707,12 @@
                         <a:buNone/>
                       </a:pPr>
                       <a:r>
-                        <a:rPr lang="en-US" sz="1000">
+                        <a:rPr lang="en-US" sz="1200">
                           <a:effectLst/>
                         </a:rPr>
                         <a:t>Reader</a:t>
                       </a:r>
-                      <a:endParaRPr lang="en-US" sz="1000">
+                      <a:endParaRPr lang="en-US" sz="1200">
                         <a:effectLst/>
                         <a:latin typeface="Calibri" panose="020F0502020204030204" pitchFamily="34" charset="0"/>
                         <a:ea typeface="MS Mincho" panose="02020609040205080304" pitchFamily="49" charset="-128"/>
@@ -19720,7 +19720,7 @@
                       </a:endParaRPr>
                     </a:p>
                   </a:txBody>
-                  <a:tcPr marL="15123" marR="15123" marT="0" marB="0"/>
+                  <a:tcPr marL="19225" marR="19225" marT="0" marB="0"/>
                 </a:tc>
                 <a:tc>
                   <a:txBody>
@@ -19737,12 +19737,12 @@
                         <a:buNone/>
                       </a:pPr>
                       <a:r>
-                        <a:rPr lang="en-US" sz="1000">
+                        <a:rPr lang="en-US" sz="1200">
                           <a:effectLst/>
                         </a:rPr>
                         <a:t>Spring Security (BCrypt); role-based routing</a:t>
                       </a:r>
-                      <a:endParaRPr lang="en-US" sz="1000">
+                      <a:endParaRPr lang="en-US" sz="1200">
                         <a:effectLst/>
                         <a:latin typeface="Calibri" panose="020F0502020204030204" pitchFamily="34" charset="0"/>
                         <a:ea typeface="MS Mincho" panose="02020609040205080304" pitchFamily="49" charset="-128"/>
@@ -19750,7 +19750,7 @@
                       </a:endParaRPr>
                     </a:p>
                   </a:txBody>
-                  <a:tcPr marL="15123" marR="15123" marT="0" marB="0"/>
+                  <a:tcPr marL="19225" marR="19225" marT="0" marB="0"/>
                 </a:tc>
                 <a:tc>
                   <a:txBody>
@@ -19767,12 +19767,12 @@
                         <a:buNone/>
                       </a:pPr>
                       <a:r>
-                        <a:rPr lang="en-US" sz="1000">
+                        <a:rPr lang="en-US" sz="1200">
                           <a:effectLst/>
                         </a:rPr>
                         <a:t>GET /login → /client/home</a:t>
                       </a:r>
-                      <a:endParaRPr lang="en-US" sz="1000">
+                      <a:endParaRPr lang="en-US" sz="1200">
                         <a:effectLst/>
                         <a:latin typeface="Calibri" panose="020F0502020204030204" pitchFamily="34" charset="0"/>
                         <a:ea typeface="MS Mincho" panose="02020609040205080304" pitchFamily="49" charset="-128"/>
@@ -19780,15 +19780,15 @@
                       </a:endParaRPr>
                     </a:p>
                   </a:txBody>
-                  <a:tcPr marL="15123" marR="15123" marT="0" marB="0"/>
+                  <a:tcPr marL="19225" marR="19225" marT="0" marB="0"/>
                 </a:tc>
                 <a:extLst>
                   <a:ext uri="{0D108BD9-81ED-4DB2-BD59-A6C34878D82A}">
-                    <a16:rowId xmlns:a16="http://schemas.microsoft.com/office/drawing/2014/main" val="4279776836"/>
+                    <a16:rowId xmlns:a16="http://schemas.microsoft.com/office/drawing/2014/main" val="2621299564"/>
                   </a:ext>
                 </a:extLst>
               </a:tr>
-              <a:tr h="335823">
+              <a:tr h="434164">
                 <a:tc>
                   <a:txBody>
                     <a:bodyPr/>
@@ -19804,12 +19804,12 @@
                         <a:buNone/>
                       </a:pPr>
                       <a:r>
-                        <a:rPr lang="en-US" sz="1000">
+                        <a:rPr lang="en-US" sz="1200">
                           <a:effectLst/>
                         </a:rPr>
                         <a:t>2</a:t>
                       </a:r>
-                      <a:endParaRPr lang="en-US" sz="1000">
+                      <a:endParaRPr lang="en-US" sz="1200">
                         <a:effectLst/>
                         <a:latin typeface="Calibri" panose="020F0502020204030204" pitchFamily="34" charset="0"/>
                         <a:ea typeface="MS Mincho" panose="02020609040205080304" pitchFamily="49" charset="-128"/>
@@ -19817,7 +19817,7 @@
                       </a:endParaRPr>
                     </a:p>
                   </a:txBody>
-                  <a:tcPr marL="15123" marR="15123" marT="0" marB="0"/>
+                  <a:tcPr marL="19225" marR="19225" marT="0" marB="0"/>
                 </a:tc>
                 <a:tc>
                   <a:txBody>
@@ -19834,12 +19834,12 @@
                         <a:buNone/>
                       </a:pPr>
                       <a:r>
-                        <a:rPr lang="en-US" sz="1000">
+                        <a:rPr lang="en-US" sz="1200">
                           <a:effectLst/>
                         </a:rPr>
                         <a:t>Search &amp; view details</a:t>
                       </a:r>
-                      <a:endParaRPr lang="en-US" sz="1000">
+                      <a:endParaRPr lang="en-US" sz="1200">
                         <a:effectLst/>
                         <a:latin typeface="Calibri" panose="020F0502020204030204" pitchFamily="34" charset="0"/>
                         <a:ea typeface="MS Mincho" panose="02020609040205080304" pitchFamily="49" charset="-128"/>
@@ -19847,7 +19847,7 @@
                       </a:endParaRPr>
                     </a:p>
                   </a:txBody>
-                  <a:tcPr marL="15123" marR="15123" marT="0" marB="0"/>
+                  <a:tcPr marL="19225" marR="19225" marT="0" marB="0"/>
                 </a:tc>
                 <a:tc>
                   <a:txBody>
@@ -19864,12 +19864,12 @@
                         <a:buNone/>
                       </a:pPr>
                       <a:r>
-                        <a:rPr lang="en-US" sz="1000">
+                        <a:rPr lang="en-US" sz="1200">
                           <a:effectLst/>
                         </a:rPr>
                         <a:t>Reader</a:t>
                       </a:r>
-                      <a:endParaRPr lang="en-US" sz="1000">
+                      <a:endParaRPr lang="en-US" sz="1200">
                         <a:effectLst/>
                         <a:latin typeface="Calibri" panose="020F0502020204030204" pitchFamily="34" charset="0"/>
                         <a:ea typeface="MS Mincho" panose="02020609040205080304" pitchFamily="49" charset="-128"/>
@@ -19877,7 +19877,7 @@
                       </a:endParaRPr>
                     </a:p>
                   </a:txBody>
-                  <a:tcPr marL="15123" marR="15123" marT="0" marB="0"/>
+                  <a:tcPr marL="19225" marR="19225" marT="0" marB="0"/>
                 </a:tc>
                 <a:tc>
                   <a:txBody>
@@ -19894,12 +19894,12 @@
                         <a:buNone/>
                       </a:pPr>
                       <a:r>
-                        <a:rPr lang="en-US" sz="1000">
+                        <a:rPr lang="en-US" sz="1200">
                           <a:effectLst/>
                         </a:rPr>
                         <a:t>Shows only visible document types (visibleDocTypes)</a:t>
                       </a:r>
-                      <a:endParaRPr lang="en-US" sz="1000">
+                      <a:endParaRPr lang="en-US" sz="1200">
                         <a:effectLst/>
                         <a:latin typeface="Calibri" panose="020F0502020204030204" pitchFamily="34" charset="0"/>
                         <a:ea typeface="MS Mincho" panose="02020609040205080304" pitchFamily="49" charset="-128"/>
@@ -19907,7 +19907,7 @@
                       </a:endParaRPr>
                     </a:p>
                   </a:txBody>
-                  <a:tcPr marL="15123" marR="15123" marT="0" marB="0"/>
+                  <a:tcPr marL="19225" marR="19225" marT="0" marB="0"/>
                 </a:tc>
                 <a:tc>
                   <a:txBody>
@@ -19924,12 +19924,12 @@
                         <a:buNone/>
                       </a:pPr>
                       <a:r>
-                        <a:rPr lang="en-US" sz="1000">
+                        <a:rPr lang="en-US" sz="1200">
                           <a:effectLst/>
                         </a:rPr>
                         <a:t>GET /client/home, /client/books/{id}</a:t>
                       </a:r>
-                      <a:endParaRPr lang="en-US" sz="1000">
+                      <a:endParaRPr lang="en-US" sz="1200">
                         <a:effectLst/>
                         <a:latin typeface="Calibri" panose="020F0502020204030204" pitchFamily="34" charset="0"/>
                         <a:ea typeface="MS Mincho" panose="02020609040205080304" pitchFamily="49" charset="-128"/>
@@ -19937,15 +19937,15 @@
                       </a:endParaRPr>
                     </a:p>
                   </a:txBody>
-                  <a:tcPr marL="15123" marR="15123" marT="0" marB="0"/>
+                  <a:tcPr marL="19225" marR="19225" marT="0" marB="0"/>
                 </a:tc>
                 <a:extLst>
                   <a:ext uri="{0D108BD9-81ED-4DB2-BD59-A6C34878D82A}">
-                    <a16:rowId xmlns:a16="http://schemas.microsoft.com/office/drawing/2014/main" val="2139382636"/>
+                    <a16:rowId xmlns:a16="http://schemas.microsoft.com/office/drawing/2014/main" val="4161744844"/>
                   </a:ext>
                 </a:extLst>
               </a:tr>
-              <a:tr h="421131">
+              <a:tr h="544326">
                 <a:tc>
                   <a:txBody>
                     <a:bodyPr/>
@@ -19961,12 +19961,12 @@
                         <a:buNone/>
                       </a:pPr>
                       <a:r>
-                        <a:rPr lang="en-US" sz="1000">
+                        <a:rPr lang="en-US" sz="1200">
                           <a:effectLst/>
                         </a:rPr>
                         <a:t>3</a:t>
                       </a:r>
-                      <a:endParaRPr lang="en-US" sz="1000">
+                      <a:endParaRPr lang="en-US" sz="1200">
                         <a:effectLst/>
                         <a:latin typeface="Calibri" panose="020F0502020204030204" pitchFamily="34" charset="0"/>
                         <a:ea typeface="MS Mincho" panose="02020609040205080304" pitchFamily="49" charset="-128"/>
@@ -19974,7 +19974,7 @@
                       </a:endParaRPr>
                     </a:p>
                   </a:txBody>
-                  <a:tcPr marL="15123" marR="15123" marT="0" marB="0"/>
+                  <a:tcPr marL="19225" marR="19225" marT="0" marB="0"/>
                 </a:tc>
                 <a:tc>
                   <a:txBody>
@@ -19991,12 +19991,12 @@
                         <a:buNone/>
                       </a:pPr>
                       <a:r>
-                        <a:rPr lang="en-US" sz="1000">
+                        <a:rPr lang="en-US" sz="1200">
                           <a:effectLst/>
                         </a:rPr>
                         <a:t>Add to cart</a:t>
                       </a:r>
-                      <a:endParaRPr lang="en-US" sz="1000">
+                      <a:endParaRPr lang="en-US" sz="1200">
                         <a:effectLst/>
                         <a:latin typeface="Calibri" panose="020F0502020204030204" pitchFamily="34" charset="0"/>
                         <a:ea typeface="MS Mincho" panose="02020609040205080304" pitchFamily="49" charset="-128"/>
@@ -20004,7 +20004,7 @@
                       </a:endParaRPr>
                     </a:p>
                   </a:txBody>
-                  <a:tcPr marL="15123" marR="15123" marT="0" marB="0"/>
+                  <a:tcPr marL="19225" marR="19225" marT="0" marB="0"/>
                 </a:tc>
                 <a:tc>
                   <a:txBody>
@@ -20021,12 +20021,12 @@
                         <a:buNone/>
                       </a:pPr>
                       <a:r>
-                        <a:rPr lang="en-US" sz="1000">
+                        <a:rPr lang="en-US" sz="1200">
                           <a:effectLst/>
                         </a:rPr>
                         <a:t>Reader</a:t>
                       </a:r>
-                      <a:endParaRPr lang="en-US" sz="1000">
+                      <a:endParaRPr lang="en-US" sz="1200">
                         <a:effectLst/>
                         <a:latin typeface="Calibri" panose="020F0502020204030204" pitchFamily="34" charset="0"/>
                         <a:ea typeface="MS Mincho" panose="02020609040205080304" pitchFamily="49" charset="-128"/>
@@ -20034,7 +20034,7 @@
                       </a:endParaRPr>
                     </a:p>
                   </a:txBody>
-                  <a:tcPr marL="15123" marR="15123" marT="0" marB="0"/>
+                  <a:tcPr marL="19225" marR="19225" marT="0" marB="0"/>
                 </a:tc>
                 <a:tc>
                   <a:txBody>
@@ -20051,12 +20051,12 @@
                         <a:buNone/>
                       </a:pPr>
                       <a:r>
-                        <a:rPr lang="en-US" sz="1000">
+                        <a:rPr lang="en-US" sz="1200">
                           <a:effectLst/>
                         </a:rPr>
                         <a:t>6 checks: permission · duplicate · ≤5 · not restricted · visible · in stock</a:t>
                       </a:r>
-                      <a:endParaRPr lang="en-US" sz="1000">
+                      <a:endParaRPr lang="en-US" sz="1200">
                         <a:effectLst/>
                         <a:latin typeface="Calibri" panose="020F0502020204030204" pitchFamily="34" charset="0"/>
                         <a:ea typeface="MS Mincho" panose="02020609040205080304" pitchFamily="49" charset="-128"/>
@@ -20064,7 +20064,7 @@
                       </a:endParaRPr>
                     </a:p>
                   </a:txBody>
-                  <a:tcPr marL="15123" marR="15123" marT="0" marB="0"/>
+                  <a:tcPr marL="19225" marR="19225" marT="0" marB="0"/>
                 </a:tc>
                 <a:tc>
                   <a:txBody>
@@ -20081,12 +20081,12 @@
                         <a:buNone/>
                       </a:pPr>
                       <a:r>
-                        <a:rPr lang="en-US" sz="1000">
+                        <a:rPr lang="en-US" sz="1200">
                           <a:effectLst/>
                         </a:rPr>
                         <a:t>POST /client/cart/add(-ajax)</a:t>
                       </a:r>
-                      <a:endParaRPr lang="en-US" sz="1000">
+                      <a:endParaRPr lang="en-US" sz="1200">
                         <a:effectLst/>
                         <a:latin typeface="Calibri" panose="020F0502020204030204" pitchFamily="34" charset="0"/>
                         <a:ea typeface="MS Mincho" panose="02020609040205080304" pitchFamily="49" charset="-128"/>
@@ -20094,15 +20094,15 @@
                       </a:endParaRPr>
                     </a:p>
                   </a:txBody>
-                  <a:tcPr marL="15123" marR="15123" marT="0" marB="0"/>
+                  <a:tcPr marL="19225" marR="19225" marT="0" marB="0"/>
                 </a:tc>
                 <a:extLst>
                   <a:ext uri="{0D108BD9-81ED-4DB2-BD59-A6C34878D82A}">
-                    <a16:rowId xmlns:a16="http://schemas.microsoft.com/office/drawing/2014/main" val="423142761"/>
+                    <a16:rowId xmlns:a16="http://schemas.microsoft.com/office/drawing/2014/main" val="1765032139"/>
                   </a:ext>
                 </a:extLst>
               </a:tr>
-              <a:tr h="506439">
+              <a:tr h="654489">
                 <a:tc>
                   <a:txBody>
                     <a:bodyPr/>
@@ -20118,12 +20118,12 @@
                         <a:buNone/>
                       </a:pPr>
                       <a:r>
-                        <a:rPr lang="en-US" sz="1000">
+                        <a:rPr lang="en-US" sz="1200">
                           <a:effectLst/>
                         </a:rPr>
                         <a:t>4</a:t>
                       </a:r>
-                      <a:endParaRPr lang="en-US" sz="1000">
+                      <a:endParaRPr lang="en-US" sz="1200">
                         <a:effectLst/>
                         <a:latin typeface="Calibri" panose="020F0502020204030204" pitchFamily="34" charset="0"/>
                         <a:ea typeface="MS Mincho" panose="02020609040205080304" pitchFamily="49" charset="-128"/>
@@ -20131,7 +20131,7 @@
                       </a:endParaRPr>
                     </a:p>
                   </a:txBody>
-                  <a:tcPr marL="15123" marR="15123" marT="0" marB="0"/>
+                  <a:tcPr marL="19225" marR="19225" marT="0" marB="0"/>
                 </a:tc>
                 <a:tc>
                   <a:txBody>
@@ -20148,12 +20148,12 @@
                         <a:buNone/>
                       </a:pPr>
                       <a:r>
-                        <a:rPr lang="en-US" sz="1000">
+                        <a:rPr lang="en-US" sz="1200">
                           <a:effectLst/>
                         </a:rPr>
                         <a:t>Submit loan request (self-service)</a:t>
                       </a:r>
-                      <a:endParaRPr lang="en-US" sz="1000">
+                      <a:endParaRPr lang="en-US" sz="1200">
                         <a:effectLst/>
                         <a:latin typeface="Calibri" panose="020F0502020204030204" pitchFamily="34" charset="0"/>
                         <a:ea typeface="MS Mincho" panose="02020609040205080304" pitchFamily="49" charset="-128"/>
@@ -20161,7 +20161,7 @@
                       </a:endParaRPr>
                     </a:p>
                   </a:txBody>
-                  <a:tcPr marL="15123" marR="15123" marT="0" marB="0"/>
+                  <a:tcPr marL="19225" marR="19225" marT="0" marB="0"/>
                 </a:tc>
                 <a:tc>
                   <a:txBody>
@@ -20178,12 +20178,12 @@
                         <a:buNone/>
                       </a:pPr>
                       <a:r>
-                        <a:rPr lang="en-US" sz="1000">
+                        <a:rPr lang="en-US" sz="1200">
                           <a:effectLst/>
                         </a:rPr>
                         <a:t>Reader</a:t>
                       </a:r>
-                      <a:endParaRPr lang="en-US" sz="1000">
+                      <a:endParaRPr lang="en-US" sz="1200">
                         <a:effectLst/>
                         <a:latin typeface="Calibri" panose="020F0502020204030204" pitchFamily="34" charset="0"/>
                         <a:ea typeface="MS Mincho" panose="02020609040205080304" pitchFamily="49" charset="-128"/>
@@ -20191,7 +20191,7 @@
                       </a:endParaRPr>
                     </a:p>
                   </a:txBody>
-                  <a:tcPr marL="15123" marR="15123" marT="0" marB="0"/>
+                  <a:tcPr marL="19225" marR="19225" marT="0" marB="0"/>
                 </a:tc>
                 <a:tc>
                   <a:txBody>
@@ -20208,12 +20208,12 @@
                         <a:buNone/>
                       </a:pPr>
                       <a:r>
-                        <a:rPr lang="en-US" sz="1000">
+                        <a:rPr lang="en-US" sz="1200">
                           <a:effectLst/>
                         </a:rPr>
                         <a:t>RuleEngine 3-tier validate → create AWAITING_PICKUP loan + 6-char code + hold copies (copies−1)</a:t>
                       </a:r>
-                      <a:endParaRPr lang="en-US" sz="1000">
+                      <a:endParaRPr lang="en-US" sz="1200">
                         <a:effectLst/>
                         <a:latin typeface="Calibri" panose="020F0502020204030204" pitchFamily="34" charset="0"/>
                         <a:ea typeface="MS Mincho" panose="02020609040205080304" pitchFamily="49" charset="-128"/>
@@ -20221,7 +20221,7 @@
                       </a:endParaRPr>
                     </a:p>
                   </a:txBody>
-                  <a:tcPr marL="15123" marR="15123" marT="0" marB="0"/>
+                  <a:tcPr marL="19225" marR="19225" marT="0" marB="0"/>
                 </a:tc>
                 <a:tc>
                   <a:txBody>
@@ -20238,12 +20238,12 @@
                         <a:buNone/>
                       </a:pPr>
                       <a:r>
-                        <a:rPr lang="en-US" sz="1000">
+                        <a:rPr lang="en-US" sz="1200">
                           <a:effectLst/>
                         </a:rPr>
                         <a:t>POST /client/loans/submit</a:t>
                       </a:r>
-                      <a:endParaRPr lang="en-US" sz="1000">
+                      <a:endParaRPr lang="en-US" sz="1200">
                         <a:effectLst/>
                         <a:latin typeface="Calibri" panose="020F0502020204030204" pitchFamily="34" charset="0"/>
                         <a:ea typeface="MS Mincho" panose="02020609040205080304" pitchFamily="49" charset="-128"/>
@@ -20251,15 +20251,15 @@
                       </a:endParaRPr>
                     </a:p>
                   </a:txBody>
-                  <a:tcPr marL="15123" marR="15123" marT="0" marB="0"/>
+                  <a:tcPr marL="19225" marR="19225" marT="0" marB="0"/>
                 </a:tc>
                 <a:extLst>
                   <a:ext uri="{0D108BD9-81ED-4DB2-BD59-A6C34878D82A}">
-                    <a16:rowId xmlns:a16="http://schemas.microsoft.com/office/drawing/2014/main" val="996819236"/>
+                    <a16:rowId xmlns:a16="http://schemas.microsoft.com/office/drawing/2014/main" val="2687477975"/>
                   </a:ext>
                 </a:extLst>
               </a:tr>
-              <a:tr h="335823">
+              <a:tr h="764651">
                 <a:tc>
                   <a:txBody>
                     <a:bodyPr/>
@@ -20275,12 +20275,12 @@
                         <a:buNone/>
                       </a:pPr>
                       <a:r>
-                        <a:rPr lang="en-US" sz="1000">
+                        <a:rPr lang="en-US" sz="1200">
                           <a:effectLst/>
                         </a:rPr>
                         <a:t>5</a:t>
                       </a:r>
-                      <a:endParaRPr lang="en-US" sz="1000">
+                      <a:endParaRPr lang="en-US" sz="1200">
                         <a:effectLst/>
                         <a:latin typeface="Calibri" panose="020F0502020204030204" pitchFamily="34" charset="0"/>
                         <a:ea typeface="MS Mincho" panose="02020609040205080304" pitchFamily="49" charset="-128"/>
@@ -20288,7 +20288,7 @@
                       </a:endParaRPr>
                     </a:p>
                   </a:txBody>
-                  <a:tcPr marL="15123" marR="15123" marT="0" marB="0"/>
+                  <a:tcPr marL="19225" marR="19225" marT="0" marB="0"/>
                 </a:tc>
                 <a:tc>
                   <a:txBody>
@@ -20305,12 +20305,12 @@
                         <a:buNone/>
                       </a:pPr>
                       <a:r>
-                        <a:rPr lang="en-US" sz="1000">
+                        <a:rPr lang="en-US" sz="1200">
                           <a:effectLst/>
                         </a:rPr>
-                        <a:t>Prepare books by code</a:t>
+                        <a:t>Collect books (self-service)</a:t>
                       </a:r>
-                      <a:endParaRPr lang="en-US" sz="1000">
+                      <a:endParaRPr lang="en-US" sz="1200">
                         <a:effectLst/>
                         <a:latin typeface="Calibri" panose="020F0502020204030204" pitchFamily="34" charset="0"/>
                         <a:ea typeface="MS Mincho" panose="02020609040205080304" pitchFamily="49" charset="-128"/>
@@ -20318,7 +20318,7 @@
                       </a:endParaRPr>
                     </a:p>
                   </a:txBody>
-                  <a:tcPr marL="15123" marR="15123" marT="0" marB="0"/>
+                  <a:tcPr marL="19225" marR="19225" marT="0" marB="0"/>
                 </a:tc>
                 <a:tc>
                   <a:txBody>
@@ -20335,12 +20335,12 @@
                         <a:buNone/>
                       </a:pPr>
                       <a:r>
-                        <a:rPr lang="en-US" sz="1000">
+                        <a:rPr lang="en-US" sz="1200">
                           <a:effectLst/>
                         </a:rPr>
-                        <a:t>Librarian</a:t>
+                        <a:t>Reader</a:t>
                       </a:r>
-                      <a:endParaRPr lang="en-US" sz="1000">
+                      <a:endParaRPr lang="en-US" sz="1200">
                         <a:effectLst/>
                         <a:latin typeface="Calibri" panose="020F0502020204030204" pitchFamily="34" charset="0"/>
                         <a:ea typeface="MS Mincho" panose="02020609040205080304" pitchFamily="49" charset="-128"/>
@@ -20348,7 +20348,7 @@
                       </a:endParaRPr>
                     </a:p>
                   </a:txBody>
-                  <a:tcPr marL="15123" marR="15123" marT="0" marB="0"/>
+                  <a:tcPr marL="19225" marR="19225" marT="0" marB="0"/>
                 </a:tc>
                 <a:tc>
                   <a:txBody>
@@ -20365,12 +20365,12 @@
                         <a:buNone/>
                       </a:pPr>
                       <a:r>
-                        <a:rPr lang="en-US" sz="1000">
+                        <a:rPr lang="en-US" sz="1200">
                           <a:effectLst/>
                         </a:rPr>
-                        <a:t>View the awaiting-pickup list by code &amp; 24h deadline</a:t>
+                        <a:t>Reader visits the library within 24 h, retrieves reserved books from open shelves; no system step</a:t>
                       </a:r>
-                      <a:endParaRPr lang="en-US" sz="1000">
+                      <a:endParaRPr lang="en-US" sz="1200">
                         <a:effectLst/>
                         <a:latin typeface="Calibri" panose="020F0502020204030204" pitchFamily="34" charset="0"/>
                         <a:ea typeface="MS Mincho" panose="02020609040205080304" pitchFamily="49" charset="-128"/>
@@ -20378,7 +20378,7 @@
                       </a:endParaRPr>
                     </a:p>
                   </a:txBody>
-                  <a:tcPr marL="15123" marR="15123" marT="0" marB="0"/>
+                  <a:tcPr marL="19225" marR="19225" marT="0" marB="0"/>
                 </a:tc>
                 <a:tc>
                   <a:txBody>
@@ -20395,12 +20395,12 @@
                         <a:buNone/>
                       </a:pPr>
                       <a:r>
-                        <a:rPr lang="en-US" sz="1000">
+                        <a:rPr lang="en-US" sz="1200">
                           <a:effectLst/>
                         </a:rPr>
-                        <a:t>GET /librarian/loans?status=AWAITING_PICKUP</a:t>
+                        <a:t>—</a:t>
                       </a:r>
-                      <a:endParaRPr lang="en-US" sz="1000">
+                      <a:endParaRPr lang="en-US" sz="1200">
                         <a:effectLst/>
                         <a:latin typeface="Calibri" panose="020F0502020204030204" pitchFamily="34" charset="0"/>
                         <a:ea typeface="MS Mincho" panose="02020609040205080304" pitchFamily="49" charset="-128"/>
@@ -20408,15 +20408,15 @@
                       </a:endParaRPr>
                     </a:p>
                   </a:txBody>
-                  <a:tcPr marL="15123" marR="15123" marT="0" marB="0"/>
+                  <a:tcPr marL="19225" marR="19225" marT="0" marB="0"/>
                 </a:tc>
                 <a:extLst>
                   <a:ext uri="{0D108BD9-81ED-4DB2-BD59-A6C34878D82A}">
-                    <a16:rowId xmlns:a16="http://schemas.microsoft.com/office/drawing/2014/main" val="1155531466"/>
+                    <a16:rowId xmlns:a16="http://schemas.microsoft.com/office/drawing/2014/main" val="2875446950"/>
                   </a:ext>
                 </a:extLst>
               </a:tr>
-              <a:tr h="505646">
+              <a:tr h="984976">
                 <a:tc>
                   <a:txBody>
                     <a:bodyPr/>
@@ -20432,12 +20432,12 @@
                         <a:buNone/>
                       </a:pPr>
                       <a:r>
-                        <a:rPr lang="en-US" sz="1000">
+                        <a:rPr lang="en-US" sz="1200">
                           <a:effectLst/>
                         </a:rPr>
                         <a:t>6</a:t>
                       </a:r>
-                      <a:endParaRPr lang="en-US" sz="1000">
+                      <a:endParaRPr lang="en-US" sz="1200">
                         <a:effectLst/>
                         <a:latin typeface="Calibri" panose="020F0502020204030204" pitchFamily="34" charset="0"/>
                         <a:ea typeface="MS Mincho" panose="02020609040205080304" pitchFamily="49" charset="-128"/>
@@ -20445,7 +20445,7 @@
                       </a:endParaRPr>
                     </a:p>
                   </a:txBody>
-                  <a:tcPr marL="15123" marR="15123" marT="0" marB="0"/>
+                  <a:tcPr marL="19225" marR="19225" marT="0" marB="0"/>
                 </a:tc>
                 <a:tc>
                   <a:txBody>
@@ -20462,12 +20462,12 @@
                         <a:buNone/>
                       </a:pPr>
                       <a:r>
-                        <a:rPr lang="en-US" sz="1000">
+                        <a:rPr lang="en-US" sz="1200">
                           <a:effectLst/>
                         </a:rPr>
-                        <a:t>Self-confirm pickup</a:t>
+                        <a:t>Librarian confirms pickup</a:t>
                       </a:r>
-                      <a:endParaRPr lang="en-US" sz="1000">
+                      <a:endParaRPr lang="en-US" sz="1200">
                         <a:effectLst/>
                         <a:latin typeface="Calibri" panose="020F0502020204030204" pitchFamily="34" charset="0"/>
                         <a:ea typeface="MS Mincho" panose="02020609040205080304" pitchFamily="49" charset="-128"/>
@@ -20475,7 +20475,7 @@
                       </a:endParaRPr>
                     </a:p>
                   </a:txBody>
-                  <a:tcPr marL="15123" marR="15123" marT="0" marB="0"/>
+                  <a:tcPr marL="19225" marR="19225" marT="0" marB="0"/>
                 </a:tc>
                 <a:tc>
                   <a:txBody>
@@ -20492,12 +20492,12 @@
                         <a:buNone/>
                       </a:pPr>
                       <a:r>
-                        <a:rPr lang="en-US" sz="1000">
+                        <a:rPr lang="en-US" sz="1200">
                           <a:effectLst/>
                         </a:rPr>
-                        <a:t>Reader</a:t>
+                        <a:t>Reader + Librarian</a:t>
                       </a:r>
-                      <a:endParaRPr lang="en-US" sz="1000">
+                      <a:endParaRPr lang="en-US" sz="1200">
                         <a:effectLst/>
                         <a:latin typeface="Calibri" panose="020F0502020204030204" pitchFamily="34" charset="0"/>
                         <a:ea typeface="MS Mincho" panose="02020609040205080304" pitchFamily="49" charset="-128"/>
@@ -20505,7 +20505,7 @@
                       </a:endParaRPr>
                     </a:p>
                   </a:txBody>
-                  <a:tcPr marL="15123" marR="15123" marT="0" marB="0"/>
+                  <a:tcPr marL="19225" marR="19225" marT="0" marB="0"/>
                 </a:tc>
                 <a:tc>
                   <a:txBody>
@@ -20522,12 +20522,12 @@
                         <a:buNone/>
                       </a:pPr>
                       <a:r>
-                        <a:rPr lang="en-US" sz="1000">
+                        <a:rPr lang="en-US" sz="1200">
                           <a:effectLst/>
                         </a:rPr>
-                        <a:t>confirmPickup: correct owner + correct code → BORROWED, due date set by role × doc type</a:t>
+                        <a:t>confirmPickupByLibrarian: finds AWAITING_PICKUP loan by pickup code → BORROWED + due_date per role × doc_type; reader notified</a:t>
                       </a:r>
-                      <a:endParaRPr lang="en-US" sz="1000">
+                      <a:endParaRPr lang="en-US" sz="1200">
                         <a:effectLst/>
                         <a:latin typeface="Calibri" panose="020F0502020204030204" pitchFamily="34" charset="0"/>
                         <a:ea typeface="MS Mincho" panose="02020609040205080304" pitchFamily="49" charset="-128"/>
@@ -20535,7 +20535,7 @@
                       </a:endParaRPr>
                     </a:p>
                   </a:txBody>
-                  <a:tcPr marL="15123" marR="15123" marT="0" marB="0"/>
+                  <a:tcPr marL="19225" marR="19225" marT="0" marB="0"/>
                 </a:tc>
                 <a:tc>
                   <a:txBody>
@@ -20552,12 +20552,12 @@
                         <a:buNone/>
                       </a:pPr>
                       <a:r>
-                        <a:rPr lang="en-US" sz="1000">
+                        <a:rPr lang="en-US" sz="1200">
                           <a:effectLst/>
                         </a:rPr>
-                        <a:t>POST /client/loans/{id}/pickup</a:t>
+                        <a:t>POST /librarian/loans/confirm-pickup</a:t>
                       </a:r>
-                      <a:endParaRPr lang="en-US" sz="1000">
+                      <a:endParaRPr lang="en-US" sz="1200">
                         <a:effectLst/>
                         <a:latin typeface="Calibri" panose="020F0502020204030204" pitchFamily="34" charset="0"/>
                         <a:ea typeface="MS Mincho" panose="02020609040205080304" pitchFamily="49" charset="-128"/>
@@ -20565,15 +20565,15 @@
                       </a:endParaRPr>
                     </a:p>
                   </a:txBody>
-                  <a:tcPr marL="15123" marR="15123" marT="0" marB="0"/>
+                  <a:tcPr marL="19225" marR="19225" marT="0" marB="0"/>
                 </a:tc>
                 <a:extLst>
                   <a:ext uri="{0D108BD9-81ED-4DB2-BD59-A6C34878D82A}">
-                    <a16:rowId xmlns:a16="http://schemas.microsoft.com/office/drawing/2014/main" val="3997666137"/>
+                    <a16:rowId xmlns:a16="http://schemas.microsoft.com/office/drawing/2014/main" val="1879986186"/>
                   </a:ext>
                 </a:extLst>
               </a:tr>
-              <a:tr h="335823">
+              <a:tr h="434164">
                 <a:tc>
                   <a:txBody>
                     <a:bodyPr/>
@@ -20589,12 +20589,12 @@
                         <a:buNone/>
                       </a:pPr>
                       <a:r>
-                        <a:rPr lang="en-US" sz="1000">
+                        <a:rPr lang="en-US" sz="1200">
                           <a:effectLst/>
                         </a:rPr>
                         <a:t>7</a:t>
                       </a:r>
-                      <a:endParaRPr lang="en-US" sz="1000">
+                      <a:endParaRPr lang="en-US" sz="1200">
                         <a:effectLst/>
                         <a:latin typeface="Calibri" panose="020F0502020204030204" pitchFamily="34" charset="0"/>
                         <a:ea typeface="MS Mincho" panose="02020609040205080304" pitchFamily="49" charset="-128"/>
@@ -20602,7 +20602,7 @@
                       </a:endParaRPr>
                     </a:p>
                   </a:txBody>
-                  <a:tcPr marL="15123" marR="15123" marT="0" marB="0"/>
+                  <a:tcPr marL="19225" marR="19225" marT="0" marB="0"/>
                 </a:tc>
                 <a:tc>
                   <a:txBody>
@@ -20619,12 +20619,12 @@
                         <a:buNone/>
                       </a:pPr>
                       <a:r>
-                        <a:rPr lang="en-US" sz="1000">
+                        <a:rPr lang="en-US" sz="1200">
                           <a:effectLst/>
                         </a:rPr>
                         <a:t>Renew (if allowed)</a:t>
                       </a:r>
-                      <a:endParaRPr lang="en-US" sz="1000">
+                      <a:endParaRPr lang="en-US" sz="1200">
                         <a:effectLst/>
                         <a:latin typeface="Calibri" panose="020F0502020204030204" pitchFamily="34" charset="0"/>
                         <a:ea typeface="MS Mincho" panose="02020609040205080304" pitchFamily="49" charset="-128"/>
@@ -20632,7 +20632,7 @@
                       </a:endParaRPr>
                     </a:p>
                   </a:txBody>
-                  <a:tcPr marL="15123" marR="15123" marT="0" marB="0"/>
+                  <a:tcPr marL="19225" marR="19225" marT="0" marB="0"/>
                 </a:tc>
                 <a:tc>
                   <a:txBody>
@@ -20649,12 +20649,12 @@
                         <a:buNone/>
                       </a:pPr>
                       <a:r>
-                        <a:rPr lang="en-US" sz="1000">
+                        <a:rPr lang="en-US" sz="1200">
                           <a:effectLst/>
                         </a:rPr>
                         <a:t>Reader</a:t>
                       </a:r>
-                      <a:endParaRPr lang="en-US" sz="1000">
+                      <a:endParaRPr lang="en-US" sz="1200">
                         <a:effectLst/>
                         <a:latin typeface="Calibri" panose="020F0502020204030204" pitchFamily="34" charset="0"/>
                         <a:ea typeface="MS Mincho" panose="02020609040205080304" pitchFamily="49" charset="-128"/>
@@ -20662,7 +20662,7 @@
                       </a:endParaRPr>
                     </a:p>
                   </a:txBody>
-                  <a:tcPr marL="15123" marR="15123" marT="0" marB="0"/>
+                  <a:tcPr marL="19225" marR="19225" marT="0" marB="0"/>
                 </a:tc>
                 <a:tc>
                   <a:txBody>
@@ -20679,12 +20679,12 @@
                         <a:buNone/>
                       </a:pPr>
                       <a:r>
-                        <a:rPr lang="en-US" sz="1000">
+                        <a:rPr lang="en-US" sz="1200">
                           <a:effectLst/>
                         </a:rPr>
                         <a:t>canRenew: renewalCount &lt; maxRenewals; +renewalDays</a:t>
                       </a:r>
-                      <a:endParaRPr lang="en-US" sz="1000">
+                      <a:endParaRPr lang="en-US" sz="1200">
                         <a:effectLst/>
                         <a:latin typeface="Calibri" panose="020F0502020204030204" pitchFamily="34" charset="0"/>
                         <a:ea typeface="MS Mincho" panose="02020609040205080304" pitchFamily="49" charset="-128"/>
@@ -20692,7 +20692,7 @@
                       </a:endParaRPr>
                     </a:p>
                   </a:txBody>
-                  <a:tcPr marL="15123" marR="15123" marT="0" marB="0"/>
+                  <a:tcPr marL="19225" marR="19225" marT="0" marB="0"/>
                 </a:tc>
                 <a:tc>
                   <a:txBody>
@@ -20709,12 +20709,12 @@
                         <a:buNone/>
                       </a:pPr>
                       <a:r>
-                        <a:rPr lang="en-US" sz="1000">
+                        <a:rPr lang="en-US" sz="1200">
                           <a:effectLst/>
                         </a:rPr>
                         <a:t>POST /client/loans/renew/{detailId}</a:t>
                       </a:r>
-                      <a:endParaRPr lang="en-US" sz="1000">
+                      <a:endParaRPr lang="en-US" sz="1200">
                         <a:effectLst/>
                         <a:latin typeface="Calibri" panose="020F0502020204030204" pitchFamily="34" charset="0"/>
                         <a:ea typeface="MS Mincho" panose="02020609040205080304" pitchFamily="49" charset="-128"/>
@@ -20722,15 +20722,15 @@
                       </a:endParaRPr>
                     </a:p>
                   </a:txBody>
-                  <a:tcPr marL="15123" marR="15123" marT="0" marB="0"/>
+                  <a:tcPr marL="19225" marR="19225" marT="0" marB="0"/>
                 </a:tc>
                 <a:extLst>
                   <a:ext uri="{0D108BD9-81ED-4DB2-BD59-A6C34878D82A}">
-                    <a16:rowId xmlns:a16="http://schemas.microsoft.com/office/drawing/2014/main" val="537773817"/>
+                    <a16:rowId xmlns:a16="http://schemas.microsoft.com/office/drawing/2014/main" val="1762873702"/>
                   </a:ext>
                 </a:extLst>
               </a:tr>
-              <a:tr h="677056">
+              <a:tr h="874813">
                 <a:tc>
                   <a:txBody>
                     <a:bodyPr/>
@@ -20746,12 +20746,12 @@
                         <a:buNone/>
                       </a:pPr>
                       <a:r>
-                        <a:rPr lang="en-US" sz="1000">
+                        <a:rPr lang="en-US" sz="1200">
                           <a:effectLst/>
                         </a:rPr>
                         <a:t>8</a:t>
                       </a:r>
-                      <a:endParaRPr lang="en-US" sz="1000">
+                      <a:endParaRPr lang="en-US" sz="1200">
                         <a:effectLst/>
                         <a:latin typeface="Calibri" panose="020F0502020204030204" pitchFamily="34" charset="0"/>
                         <a:ea typeface="MS Mincho" panose="02020609040205080304" pitchFamily="49" charset="-128"/>
@@ -20759,7 +20759,7 @@
                       </a:endParaRPr>
                     </a:p>
                   </a:txBody>
-                  <a:tcPr marL="15123" marR="15123" marT="0" marB="0"/>
+                  <a:tcPr marL="19225" marR="19225" marT="0" marB="0"/>
                 </a:tc>
                 <a:tc>
                   <a:txBody>
@@ -20776,12 +20776,12 @@
                         <a:buNone/>
                       </a:pPr>
                       <a:r>
-                        <a:rPr lang="en-US" sz="1000">
+                        <a:rPr lang="en-US" sz="1200">
                           <a:effectLst/>
                         </a:rPr>
                         <a:t>Return &amp; collect fines</a:t>
                       </a:r>
-                      <a:endParaRPr lang="en-US" sz="1000">
+                      <a:endParaRPr lang="en-US" sz="1200">
                         <a:effectLst/>
                         <a:latin typeface="Calibri" panose="020F0502020204030204" pitchFamily="34" charset="0"/>
                         <a:ea typeface="MS Mincho" panose="02020609040205080304" pitchFamily="49" charset="-128"/>
@@ -20789,7 +20789,7 @@
                       </a:endParaRPr>
                     </a:p>
                   </a:txBody>
-                  <a:tcPr marL="15123" marR="15123" marT="0" marB="0"/>
+                  <a:tcPr marL="19225" marR="19225" marT="0" marB="0"/>
                 </a:tc>
                 <a:tc>
                   <a:txBody>
@@ -20806,12 +20806,12 @@
                         <a:buNone/>
                       </a:pPr>
                       <a:r>
-                        <a:rPr lang="en-US" sz="1000">
+                        <a:rPr lang="en-US" sz="1200">
                           <a:effectLst/>
                         </a:rPr>
                         <a:t>Librarian</a:t>
                       </a:r>
-                      <a:endParaRPr lang="en-US" sz="1000">
+                      <a:endParaRPr lang="en-US" sz="1200">
                         <a:effectLst/>
                         <a:latin typeface="Calibri" panose="020F0502020204030204" pitchFamily="34" charset="0"/>
                         <a:ea typeface="MS Mincho" panose="02020609040205080304" pitchFamily="49" charset="-128"/>
@@ -20819,7 +20819,7 @@
                       </a:endParaRPr>
                     </a:p>
                   </a:txBody>
-                  <a:tcPr marL="15123" marR="15123" marT="0" marB="0"/>
+                  <a:tcPr marL="19225" marR="19225" marT="0" marB="0"/>
                 </a:tc>
                 <a:tc>
                   <a:txBody>
@@ -20836,12 +20836,12 @@
                         <a:buNone/>
                       </a:pPr>
                       <a:r>
-                        <a:rPr lang="en-US" sz="1000">
+                        <a:rPr lang="en-US" sz="1200">
                           <a:effectLst/>
                         </a:rPr>
                         <a:t>returnBook: fine = overdue days × 2,000 VND, restore copies; pay-fine; loan → COMPLETED when all returned &amp; all fines paid</a:t>
                       </a:r>
-                      <a:endParaRPr lang="en-US" sz="1000">
+                      <a:endParaRPr lang="en-US" sz="1200">
                         <a:effectLst/>
                         <a:latin typeface="Calibri" panose="020F0502020204030204" pitchFamily="34" charset="0"/>
                         <a:ea typeface="MS Mincho" panose="02020609040205080304" pitchFamily="49" charset="-128"/>
@@ -20849,7 +20849,7 @@
                       </a:endParaRPr>
                     </a:p>
                   </a:txBody>
-                  <a:tcPr marL="15123" marR="15123" marT="0" marB="0"/>
+                  <a:tcPr marL="19225" marR="19225" marT="0" marB="0"/>
                 </a:tc>
                 <a:tc>
                   <a:txBody>
@@ -20866,12 +20866,12 @@
                         <a:buNone/>
                       </a:pPr>
                       <a:r>
-                        <a:rPr lang="en-US" sz="1000">
+                        <a:rPr lang="en-US" sz="1200">
                           <a:effectLst/>
                         </a:rPr>
                         <a:t>POST /librarian/loans/details/{id}/return, …/pay-fine</a:t>
                       </a:r>
-                      <a:endParaRPr lang="en-US" sz="1000">
+                      <a:endParaRPr lang="en-US" sz="1200">
                         <a:effectLst/>
                         <a:latin typeface="Calibri" panose="020F0502020204030204" pitchFamily="34" charset="0"/>
                         <a:ea typeface="MS Mincho" panose="02020609040205080304" pitchFamily="49" charset="-128"/>
@@ -20879,325 +20879,11 @@
                       </a:endParaRPr>
                     </a:p>
                   </a:txBody>
-                  <a:tcPr marL="15123" marR="15123" marT="0" marB="0"/>
+                  <a:tcPr marL="19225" marR="19225" marT="0" marB="0"/>
                 </a:tc>
                 <a:extLst>
                   <a:ext uri="{0D108BD9-81ED-4DB2-BD59-A6C34878D82A}">
-                    <a16:rowId xmlns:a16="http://schemas.microsoft.com/office/drawing/2014/main" val="246664785"/>
-                  </a:ext>
-                </a:extLst>
-              </a:tr>
-              <a:tr h="677056">
-                <a:tc>
-                  <a:txBody>
-                    <a:bodyPr/>
-                    <a:lstStyle/>
-                    <a:p>
-                      <a:pPr>
-                        <a:lnSpc>
-                          <a:spcPct val="115000"/>
-                        </a:lnSpc>
-                        <a:spcAft>
-                          <a:spcPts val="1000"/>
-                        </a:spcAft>
-                        <a:buNone/>
-                      </a:pPr>
-                      <a:r>
-                        <a:rPr lang="en-US" sz="1000">
-                          <a:effectLst/>
-                        </a:rPr>
-                        <a:t>9</a:t>
-                      </a:r>
-                      <a:endParaRPr lang="en-US" sz="1000">
-                        <a:effectLst/>
-                        <a:latin typeface="Calibri" panose="020F0502020204030204" pitchFamily="34" charset="0"/>
-                        <a:ea typeface="MS Mincho" panose="02020609040205080304" pitchFamily="49" charset="-128"/>
-                        <a:cs typeface="Times New Roman" panose="02020603050405020304" pitchFamily="18" charset="0"/>
-                      </a:endParaRPr>
-                    </a:p>
-                  </a:txBody>
-                  <a:tcPr marL="15123" marR="15123" marT="0" marB="0"/>
-                </a:tc>
-                <a:tc>
-                  <a:txBody>
-                    <a:bodyPr/>
-                    <a:lstStyle/>
-                    <a:p>
-                      <a:pPr>
-                        <a:lnSpc>
-                          <a:spcPct val="115000"/>
-                        </a:lnSpc>
-                        <a:spcAft>
-                          <a:spcPts val="1000"/>
-                        </a:spcAft>
-                        <a:buNone/>
-                      </a:pPr>
-                      <a:r>
-                        <a:rPr lang="en-US" sz="1000">
-                          <a:effectLst/>
-                        </a:rPr>
-                        <a:t>Background jobs (automatic)</a:t>
-                      </a:r>
-                      <a:endParaRPr lang="en-US" sz="1000">
-                        <a:effectLst/>
-                        <a:latin typeface="Calibri" panose="020F0502020204030204" pitchFamily="34" charset="0"/>
-                        <a:ea typeface="MS Mincho" panose="02020609040205080304" pitchFamily="49" charset="-128"/>
-                        <a:cs typeface="Times New Roman" panose="02020603050405020304" pitchFamily="18" charset="0"/>
-                      </a:endParaRPr>
-                    </a:p>
-                  </a:txBody>
-                  <a:tcPr marL="15123" marR="15123" marT="0" marB="0"/>
-                </a:tc>
-                <a:tc>
-                  <a:txBody>
-                    <a:bodyPr/>
-                    <a:lstStyle/>
-                    <a:p>
-                      <a:pPr>
-                        <a:lnSpc>
-                          <a:spcPct val="115000"/>
-                        </a:lnSpc>
-                        <a:spcAft>
-                          <a:spcPts val="1000"/>
-                        </a:spcAft>
-                        <a:buNone/>
-                      </a:pPr>
-                      <a:r>
-                        <a:rPr lang="en-US" sz="1000">
-                          <a:effectLst/>
-                        </a:rPr>
-                        <a:t>System</a:t>
-                      </a:r>
-                      <a:endParaRPr lang="en-US" sz="1000">
-                        <a:effectLst/>
-                        <a:latin typeface="Calibri" panose="020F0502020204030204" pitchFamily="34" charset="0"/>
-                        <a:ea typeface="MS Mincho" panose="02020609040205080304" pitchFamily="49" charset="-128"/>
-                        <a:cs typeface="Times New Roman" panose="02020603050405020304" pitchFamily="18" charset="0"/>
-                      </a:endParaRPr>
-                    </a:p>
-                  </a:txBody>
-                  <a:tcPr marL="15123" marR="15123" marT="0" marB="0"/>
-                </a:tc>
-                <a:tc>
-                  <a:txBody>
-                    <a:bodyPr/>
-                    <a:lstStyle/>
-                    <a:p>
-                      <a:pPr>
-                        <a:lnSpc>
-                          <a:spcPct val="115000"/>
-                        </a:lnSpc>
-                        <a:spcAft>
-                          <a:spcPts val="1000"/>
-                        </a:spcAft>
-                        <a:buNone/>
-                      </a:pPr>
-                      <a:r>
-                        <a:rPr lang="en-US" sz="1000">
-                          <a:effectLst/>
-                        </a:rPr>
-                        <a:t>Every 10 min cancels orders not collected within 24h (restores copies); reminds of due-soon/overdue items</a:t>
-                      </a:r>
-                      <a:endParaRPr lang="en-US" sz="1000">
-                        <a:effectLst/>
-                        <a:latin typeface="Calibri" panose="020F0502020204030204" pitchFamily="34" charset="0"/>
-                        <a:ea typeface="MS Mincho" panose="02020609040205080304" pitchFamily="49" charset="-128"/>
-                        <a:cs typeface="Times New Roman" panose="02020603050405020304" pitchFamily="18" charset="0"/>
-                      </a:endParaRPr>
-                    </a:p>
-                  </a:txBody>
-                  <a:tcPr marL="15123" marR="15123" marT="0" marB="0"/>
-                </a:tc>
-                <a:tc>
-                  <a:txBody>
-                    <a:bodyPr/>
-                    <a:lstStyle/>
-                    <a:p>
-                      <a:pPr>
-                        <a:lnSpc>
-                          <a:spcPct val="115000"/>
-                        </a:lnSpc>
-                        <a:spcAft>
-                          <a:spcPts val="1000"/>
-                        </a:spcAft>
-                        <a:buNone/>
-                      </a:pPr>
-                      <a:r>
-                        <a:rPr lang="en-US" sz="1000">
-                          <a:effectLst/>
-                        </a:rPr>
-                        <a:t>PickupExpiryScheduler; LoanService.sendDueReminders()</a:t>
-                      </a:r>
-                      <a:endParaRPr lang="en-US" sz="1000">
-                        <a:effectLst/>
-                        <a:latin typeface="Calibri" panose="020F0502020204030204" pitchFamily="34" charset="0"/>
-                        <a:ea typeface="MS Mincho" panose="02020609040205080304" pitchFamily="49" charset="-128"/>
-                        <a:cs typeface="Times New Roman" panose="02020603050405020304" pitchFamily="18" charset="0"/>
-                      </a:endParaRPr>
-                    </a:p>
-                  </a:txBody>
-                  <a:tcPr marL="15123" marR="15123" marT="0" marB="0"/>
-                </a:tc>
-                <a:extLst>
-                  <a:ext uri="{0D108BD9-81ED-4DB2-BD59-A6C34878D82A}">
-                    <a16:rowId xmlns:a16="http://schemas.microsoft.com/office/drawing/2014/main" val="2455066733"/>
-                  </a:ext>
-                </a:extLst>
-              </a:tr>
-              <a:tr h="932980">
-                <a:tc>
-                  <a:txBody>
-                    <a:bodyPr/>
-                    <a:lstStyle/>
-                    <a:p>
-                      <a:pPr>
-                        <a:lnSpc>
-                          <a:spcPct val="115000"/>
-                        </a:lnSpc>
-                        <a:spcAft>
-                          <a:spcPts val="1000"/>
-                        </a:spcAft>
-                        <a:buNone/>
-                      </a:pPr>
-                      <a:r>
-                        <a:rPr lang="en-US" sz="1000">
-                          <a:effectLst/>
-                        </a:rPr>
-                        <a:t>10</a:t>
-                      </a:r>
-                      <a:endParaRPr lang="en-US" sz="1000">
-                        <a:effectLst/>
-                        <a:latin typeface="Calibri" panose="020F0502020204030204" pitchFamily="34" charset="0"/>
-                        <a:ea typeface="MS Mincho" panose="02020609040205080304" pitchFamily="49" charset="-128"/>
-                        <a:cs typeface="Times New Roman" panose="02020603050405020304" pitchFamily="18" charset="0"/>
-                      </a:endParaRPr>
-                    </a:p>
-                  </a:txBody>
-                  <a:tcPr marL="15123" marR="15123" marT="0" marB="0"/>
-                </a:tc>
-                <a:tc>
-                  <a:txBody>
-                    <a:bodyPr/>
-                    <a:lstStyle/>
-                    <a:p>
-                      <a:pPr>
-                        <a:lnSpc>
-                          <a:spcPct val="115000"/>
-                        </a:lnSpc>
-                        <a:spcAft>
-                          <a:spcPts val="1000"/>
-                        </a:spcAft>
-                        <a:buNone/>
-                      </a:pPr>
-                      <a:r>
-                        <a:rPr lang="en-US" sz="1000">
-                          <a:effectLst/>
-                        </a:rPr>
-                        <a:t>Order branches</a:t>
-                      </a:r>
-                      <a:endParaRPr lang="en-US" sz="1000">
-                        <a:effectLst/>
-                        <a:latin typeface="Calibri" panose="020F0502020204030204" pitchFamily="34" charset="0"/>
-                        <a:ea typeface="MS Mincho" panose="02020609040205080304" pitchFamily="49" charset="-128"/>
-                        <a:cs typeface="Times New Roman" panose="02020603050405020304" pitchFamily="18" charset="0"/>
-                      </a:endParaRPr>
-                    </a:p>
-                  </a:txBody>
-                  <a:tcPr marL="15123" marR="15123" marT="0" marB="0"/>
-                </a:tc>
-                <a:tc>
-                  <a:txBody>
-                    <a:bodyPr/>
-                    <a:lstStyle/>
-                    <a:p>
-                      <a:pPr>
-                        <a:lnSpc>
-                          <a:spcPct val="115000"/>
-                        </a:lnSpc>
-                        <a:spcAft>
-                          <a:spcPts val="1000"/>
-                        </a:spcAft>
-                        <a:buNone/>
-                      </a:pPr>
-                      <a:r>
-                        <a:rPr lang="en-US" sz="1000">
-                          <a:effectLst/>
-                        </a:rPr>
-                        <a:t>Reader / Librarian / System</a:t>
-                      </a:r>
-                      <a:endParaRPr lang="en-US" sz="1000">
-                        <a:effectLst/>
-                        <a:latin typeface="Calibri" panose="020F0502020204030204" pitchFamily="34" charset="0"/>
-                        <a:ea typeface="MS Mincho" panose="02020609040205080304" pitchFamily="49" charset="-128"/>
-                        <a:cs typeface="Times New Roman" panose="02020603050405020304" pitchFamily="18" charset="0"/>
-                      </a:endParaRPr>
-                    </a:p>
-                  </a:txBody>
-                  <a:tcPr marL="15123" marR="15123" marT="0" marB="0"/>
-                </a:tc>
-                <a:tc>
-                  <a:txBody>
-                    <a:bodyPr/>
-                    <a:lstStyle/>
-                    <a:p>
-                      <a:pPr>
-                        <a:lnSpc>
-                          <a:spcPct val="115000"/>
-                        </a:lnSpc>
-                        <a:spcAft>
-                          <a:spcPts val="1000"/>
-                        </a:spcAft>
-                        <a:buNone/>
-                      </a:pPr>
-                      <a:r>
-                        <a:rPr lang="en-US" sz="1000">
-                          <a:effectLst/>
-                        </a:rPr>
-                        <a:t>Self-cancel (before pickup) · librarian cancel with reason · scheduler auto-cancel — all restore copies. Internal documents: issue an in-house reading slip</a:t>
-                      </a:r>
-                      <a:endParaRPr lang="en-US" sz="1000">
-                        <a:effectLst/>
-                        <a:latin typeface="Calibri" panose="020F0502020204030204" pitchFamily="34" charset="0"/>
-                        <a:ea typeface="MS Mincho" panose="02020609040205080304" pitchFamily="49" charset="-128"/>
-                        <a:cs typeface="Times New Roman" panose="02020603050405020304" pitchFamily="18" charset="0"/>
-                      </a:endParaRPr>
-                    </a:p>
-                  </a:txBody>
-                  <a:tcPr marL="15123" marR="15123" marT="0" marB="0"/>
-                </a:tc>
-                <a:tc>
-                  <a:txBody>
-                    <a:bodyPr/>
-                    <a:lstStyle/>
-                    <a:p>
-                      <a:pPr>
-                        <a:lnSpc>
-                          <a:spcPct val="115000"/>
-                        </a:lnSpc>
-                        <a:spcAft>
-                          <a:spcPts val="1000"/>
-                        </a:spcAft>
-                        <a:buNone/>
-                      </a:pPr>
-                      <a:r>
-                        <a:rPr lang="en-US" sz="1000">
-                          <a:effectLst/>
-                        </a:rPr>
-                        <a:t>/client/loans/{id}/cancel; /librarian/loans/{id}/cancel; /librarian/inhouse</a:t>
-                      </a:r>
-                      <a:endParaRPr lang="en-US" sz="1000">
-                        <a:effectLst/>
-                        <a:latin typeface="Calibri" panose="020F0502020204030204" pitchFamily="34" charset="0"/>
-                        <a:ea typeface="MS Mincho" panose="02020609040205080304" pitchFamily="49" charset="-128"/>
-                        <a:cs typeface="Times New Roman" panose="02020603050405020304" pitchFamily="18" charset="0"/>
-                      </a:endParaRPr>
-                    </a:p>
-                  </a:txBody>
-                  <a:tcPr marL="15123" marR="15123" marT="0" marB="0"/>
-                </a:tc>
-                <a:extLst>
-                  <a:ext uri="{0D108BD9-81ED-4DB2-BD59-A6C34878D82A}">
-                    <a16:rowId xmlns:a16="http://schemas.microsoft.com/office/drawing/2014/main" val="691717464"/>
+                    <a16:rowId xmlns:a16="http://schemas.microsoft.com/office/drawing/2014/main" val="475224808"/>
                   </a:ext>
                 </a:extLst>
               </a:tr>
@@ -21403,7 +21089,7 @@
         <p:spPr>
           <a:xfrm>
             <a:off x="457200" y="932688"/>
-            <a:ext cx="4069080" cy="3657600"/>
+            <a:ext cx="4069080" cy="3991004"/>
           </a:xfrm>
           <a:prstGeom prst="roundRect">
             <a:avLst>
@@ -21574,7 +21260,7 @@
                 <a:ea typeface="Calibri" pitchFamily="34" charset="-122"/>
                 <a:cs typeface="Calibri" pitchFamily="34" charset="-120"/>
               </a:rPr>
-              <a:t>Provide admin interface for approvals, returns &amp; cataloguing</a:t>
+              <a:t>Issue pickup code per request; auto-cancel un-collected holds after 24 h</a:t>
             </a:r>
             <a:endParaRPr lang="en-US" sz="1250" dirty="0"/>
           </a:p>
@@ -21631,7 +21317,7 @@
         <p:spPr>
           <a:xfrm>
             <a:off x="4754880" y="932688"/>
-            <a:ext cx="3931920" cy="1645920"/>
+            <a:ext cx="3931920" cy="1810512"/>
           </a:xfrm>
           <a:prstGeom prst="roundRect">
             <a:avLst>
@@ -21760,7 +21446,7 @@
                 <a:ea typeface="Calibri" pitchFamily="34" charset="-122"/>
                 <a:cs typeface="Calibri" pitchFamily="34" charset="-120"/>
               </a:rPr>
-              <a:t>18 features across borrowing lifecycle</a:t>
+              <a:t>30 features across borrowing lifecycle</a:t>
             </a:r>
             <a:endParaRPr lang="en-US" sz="1250" dirty="0"/>
           </a:p>
@@ -21802,7 +21488,7 @@
                 <a:ea typeface="Calibri" pitchFamily="34" charset="-122"/>
                 <a:cs typeface="Calibri" pitchFamily="34" charset="-120"/>
               </a:rPr>
-              <a:t>H2 in-memory (dev) &amp; MySQL (prod) support</a:t>
+              <a:t>H2 in-memory (dev) &amp; MySQL (prod); Excel bulk import for books &amp; users</a:t>
             </a:r>
             <a:endParaRPr lang="en-US" sz="1250" dirty="0"/>
           </a:p>
@@ -21816,8 +21502,8 @@
         </p:nvSpPr>
         <p:spPr>
           <a:xfrm>
-            <a:off x="4754880" y="2697480"/>
-            <a:ext cx="3931920" cy="1938528"/>
+            <a:off x="4754880" y="2835578"/>
+            <a:ext cx="3931920" cy="2088113"/>
           </a:xfrm>
           <a:prstGeom prst="roundRect">
             <a:avLst>
@@ -21857,7 +21543,7 @@
         </p:nvSpPr>
         <p:spPr>
           <a:xfrm>
-            <a:off x="4864608" y="2752344"/>
+            <a:off x="4864608" y="2881299"/>
             <a:ext cx="3703320" cy="329184"/>
           </a:xfrm>
           <a:prstGeom prst="rect">
@@ -21896,7 +21582,7 @@
         </p:nvSpPr>
         <p:spPr>
           <a:xfrm>
-            <a:off x="4864608" y="3127248"/>
+            <a:off x="4864608" y="3256203"/>
             <a:ext cx="3703320" cy="1389888"/>
           </a:xfrm>
           <a:prstGeom prst="rect">
@@ -21925,7 +21611,7 @@
                 <a:ea typeface="Calibri" pitchFamily="34" charset="-122"/>
                 <a:cs typeface="Calibri" pitchFamily="34" charset="-120"/>
               </a:rPr>
-              <a:t>UI-based user registration (seed data only)</a:t>
+              <a:t>QR code for pickup confirmation (pickup code is alphanumeric today)</a:t>
             </a:r>
             <a:endParaRPr lang="en-US" sz="1250" dirty="0"/>
           </a:p>
@@ -21988,7 +21674,7 @@
                 <a:ea typeface="Calibri" pitchFamily="34" charset="-122"/>
                 <a:cs typeface="Calibri" pitchFamily="34" charset="-120"/>
               </a:rPr>
-              <a:t>Excel / PDF report exports</a:t>
+              <a:t>Excel / PDF statistical report exports (data import IS in scope)</a:t>
             </a:r>
             <a:endParaRPr lang="en-US" sz="1250" dirty="0"/>
           </a:p>
@@ -22726,7 +22412,7 @@
                 <a:ea typeface="Calibri" pitchFamily="34" charset="-122"/>
                 <a:cs typeface="Calibri" pitchFamily="34" charset="-120"/>
               </a:rPr>
-              <a:t>Session cart (max 5); 3-layer RuleEngine validation; creates PENDING loan</a:t>
+              <a:t>Session cart (max 5); 3-layer RuleEngine validation; creates AWAITING_PICKUP loan + 6-char pickup code</a:t>
             </a:r>
             <a:endParaRPr lang="en-US" sz="1000" dirty="0"/>
           </a:p>
@@ -22838,7 +22524,7 @@
                 <a:ea typeface="Calibri" pitchFamily="34" charset="-122"/>
                 <a:cs typeface="Calibri" pitchFamily="34" charset="-120"/>
               </a:rPr>
-              <a:t>Loan Approval &amp; Due Date</a:t>
+              <a:t>Librarian Confirms Pickup</a:t>
             </a:r>
             <a:endParaRPr lang="en-US" sz="1100" dirty="0"/>
           </a:p>
@@ -22877,7 +22563,7 @@
                 <a:ea typeface="Calibri" pitchFamily="34" charset="-122"/>
                 <a:cs typeface="Calibri" pitchFamily="34" charset="-120"/>
               </a:rPr>
-              <a:t>Admin approves/cancels; system sets due_date per role × doc-type rule</a:t>
+              <a:t>Reader brings pickup code to library; librarian enters at /librarian/loans/confirm-pickup → BORROWED + due_date per role × doc-type</a:t>
             </a:r>
             <a:endParaRPr lang="en-US" sz="1000" dirty="0"/>
           </a:p>
@@ -23028,7 +22714,7 @@
                 <a:ea typeface="Calibri" pitchFamily="34" charset="-122"/>
                 <a:cs typeface="Calibri" pitchFamily="34" charset="-120"/>
               </a:rPr>
-              <a:t>Admin processes return; fine = overdue days × 2,000 VND; condition recorded</a:t>
+              <a:t>Librarian processes return; fine = overdue days × 2,000 VND; fine_paid tracked; loan COMPLETED when all settled</a:t>
             </a:r>
             <a:endParaRPr lang="en-US" sz="1000" dirty="0"/>
           </a:p>
@@ -23291,7 +22977,7 @@
                 <a:ea typeface="Calibri" pitchFamily="34" charset="-122"/>
                 <a:cs typeface="Calibri" pitchFamily="34" charset="-120"/>
               </a:rPr>
-              <a:t>Admin Management</a:t>
+              <a:t>Admin &amp; Librarian Management</a:t>
             </a:r>
             <a:endParaRPr lang="en-US" sz="1100" dirty="0"/>
           </a:p>
@@ -23330,7 +23016,7 @@
                 <a:ea typeface="Calibri" pitchFamily="34" charset="-122"/>
                 <a:cs typeface="Calibri" pitchFamily="34" charset="-120"/>
               </a:rPr>
-              <a:t>Book CRUD, user CRUD, toggle ACTIVE/LOCKED, overdue dashboard</a:t>
+              <a:t>Admin: user CRUD + functional permission matrix; Librarian: book CRUD + rules config + dashboard + in-house slips</a:t>
             </a:r>
             <a:endParaRPr lang="en-US" sz="1000" dirty="0"/>
           </a:p>
@@ -23488,7 +23174,7 @@
                 <a:ea typeface="Calibri" pitchFamily="34" charset="-122"/>
                 <a:cs typeface="Calibri" pitchFamily="34" charset="-120"/>
               </a:rPr>
-              <a:t>Role-based access: /admin/** → ADMIN, /client/** → authenticated users</a:t>
+              <a:t>Strict RBAC: /admin/** → ADMIN, /librarian/** → LIBRARIAN, /client/** → reader roles (no role inheritance)</a:t>
             </a:r>
             <a:endParaRPr lang="en-US" sz="1050" dirty="0"/>
           </a:p>
@@ -24707,7 +24393,7 @@
                 <a:ea typeface="Calibri" pitchFamily="34" charset="-122"/>
                 <a:cs typeface="Calibri" pitchFamily="34" charset="-120"/>
               </a:rPr>
-              <a:t>H2 In-Memory (dev)  ·  MySQL 8.0 (prod)  —  5 core tables, auto-seeded via data.sql</a:t>
+              <a:t>H2 In-Memory (dev)  ·  MySQL 8.0 (prod)  —  8 core tables, auto-seeded via data.sql</a:t>
             </a:r>
             <a:endParaRPr lang="en-US" sz="1000" dirty="0"/>
           </a:p>
@@ -25139,7 +24825,7 @@
                 <a:ea typeface="Cambria" pitchFamily="34" charset="-122"/>
                 <a:cs typeface="Cambria" pitchFamily="34" charset="-120"/>
               </a:rPr>
-              <a:t>Data Model — 5 Core Tables</a:t>
+              <a:t>Data Model — 8 Core Tables</a:t>
             </a:r>
             <a:endParaRPr lang="en-US" sz="3000" dirty="0"/>
           </a:p>
@@ -25480,18 +25166,7 @@
                 <a:ea typeface="Courier New" pitchFamily="34" charset="-122"/>
                 <a:cs typeface="Courier New" pitchFamily="34" charset="-120"/>
               </a:rPr>
-              <a:t>  role(</a:t>
-            </a:r>
-            <a:r>
-              <a:rPr lang="en-US" sz="950" dirty="0">
-                <a:solidFill>
-                  <a:srgbClr val="2D3748"/>
-                </a:solidFill>
-                <a:latin typeface="Courier New" pitchFamily="34" charset="0"/>
-                <a:ea typeface="Courier New" pitchFamily="34" charset="-122"/>
-                <a:cs typeface="Courier New" pitchFamily="34" charset="-120"/>
-              </a:rPr>
-              <a:t>STUDENT|LECTURER|RESEARCHER|ADMIN)</a:t>
+              <a:t>  role(STUDENT|LECTURER|RESEARCHER|LIBRARIAN|ADMIN)</a:t>
             </a:r>
             <a:endParaRPr lang="en-US" sz="950" dirty="0"/>
           </a:p>
@@ -26298,40 +25973,7 @@
                 <a:ea typeface="Courier New" pitchFamily="34" charset="-122"/>
                 <a:cs typeface="Courier New" pitchFamily="34" charset="-120"/>
               </a:rPr>
-              <a:t>  status(</a:t>
-            </a:r>
-            <a:r>
-              <a:rPr lang="vi-VN" sz="950">
-                <a:solidFill>
-                  <a:srgbClr val="2D3748"/>
-                </a:solidFill>
-                <a:latin typeface="Courier New" pitchFamily="34" charset="0"/>
-                <a:ea typeface="Courier New" pitchFamily="34" charset="-122"/>
-                <a:cs typeface="Courier New" pitchFamily="34" charset="-120"/>
-              </a:rPr>
-              <a:t>AWAITING/PICKUP/</a:t>
-            </a:r>
-            <a:r>
-              <a:rPr lang="en-US" sz="950">
-                <a:solidFill>
-                  <a:srgbClr val="2D3748"/>
-                </a:solidFill>
-                <a:latin typeface="Courier New" pitchFamily="34" charset="0"/>
-                <a:ea typeface="Courier New" pitchFamily="34" charset="-122"/>
-                <a:cs typeface="Courier New" pitchFamily="34" charset="-120"/>
-              </a:rPr>
-              <a:t>RETURNED</a:t>
-            </a:r>
-            <a:r>
-              <a:rPr lang="en-US" sz="950" dirty="0">
-                <a:solidFill>
-                  <a:srgbClr val="2D3748"/>
-                </a:solidFill>
-                <a:latin typeface="Courier New" pitchFamily="34" charset="0"/>
-                <a:ea typeface="Courier New" pitchFamily="34" charset="-122"/>
-                <a:cs typeface="Courier New" pitchFamily="34" charset="-120"/>
-              </a:rPr>
-              <a:t>)</a:t>
+              <a:t>  status(AWAITING_PICKUP|BORROWED|COMPLETED|CANCELLED)</a:t>
             </a:r>
             <a:endParaRPr lang="en-US" sz="950" dirty="0"/>
           </a:p>
@@ -27227,7 +26869,7 @@
                 <a:ea typeface="Calibri" pitchFamily="34" charset="-122"/>
                 <a:cs typeface="Calibri" pitchFamily="34" charset="-120"/>
               </a:rPr>
-              <a:t>users 1 : N loans 1 : N loan_details N : 1 books  |  borrowing_rules keyed on (user_role, doc_type)</a:t>
+              <a:t>users 1:N loans 1:N loan_details N:1 books  |  + role_permissions, notifications, loan_renewals (3 support tables)</a:t>
             </a:r>
             <a:endParaRPr lang="en-US" sz="1000" dirty="0"/>
           </a:p>
